--- a/files/7_ExamReview.pptx
+++ b/files/7_ExamReview.pptx
@@ -8,17 +8,27 @@
     <p:sldMasterId id="2147483669" r:id="rId4"/>
   </p:sldMasterIdLst>
   <p:notesMasterIdLst>
-    <p:notesMasterId r:id="rId13"/>
+    <p:notesMasterId r:id="rId23"/>
   </p:notesMasterIdLst>
   <p:sldIdLst>
-    <p:sldId id="711" r:id="rId5"/>
-    <p:sldId id="715" r:id="rId6"/>
-    <p:sldId id="712" r:id="rId7"/>
-    <p:sldId id="713" r:id="rId8"/>
-    <p:sldId id="714" r:id="rId9"/>
-    <p:sldId id="710" r:id="rId10"/>
-    <p:sldId id="708" r:id="rId11"/>
-    <p:sldId id="709" r:id="rId12"/>
+    <p:sldId id="713" r:id="rId5"/>
+    <p:sldId id="710" r:id="rId6"/>
+    <p:sldId id="714" r:id="rId7"/>
+    <p:sldId id="715" r:id="rId8"/>
+    <p:sldId id="716" r:id="rId9"/>
+    <p:sldId id="720" r:id="rId10"/>
+    <p:sldId id="717" r:id="rId11"/>
+    <p:sldId id="718" r:id="rId12"/>
+    <p:sldId id="719" r:id="rId13"/>
+    <p:sldId id="721" r:id="rId14"/>
+    <p:sldId id="722" r:id="rId15"/>
+    <p:sldId id="723" r:id="rId16"/>
+    <p:sldId id="724" r:id="rId17"/>
+    <p:sldId id="725" r:id="rId18"/>
+    <p:sldId id="726" r:id="rId19"/>
+    <p:sldId id="727" r:id="rId20"/>
+    <p:sldId id="728" r:id="rId21"/>
+    <p:sldId id="729" r:id="rId22"/>
   </p:sldIdLst>
   <p:sldSz cx="9144000" cy="5143500" type="screen16x9"/>
   <p:notesSz cx="6858000" cy="9313863"/>
@@ -152,14 +162,24 @@
       <p14:sectionLst xmlns:p14="http://schemas.microsoft.com/office/powerpoint/2010/main">
         <p14:section name="templates" id="{3540F3E4-3A56-594D-A98C-62123F4F527F}">
           <p14:sldIdLst>
-            <p14:sldId id="711"/>
+            <p14:sldId id="713"/>
+            <p14:sldId id="710"/>
+            <p14:sldId id="714"/>
             <p14:sldId id="715"/>
-            <p14:sldId id="712"/>
-            <p14:sldId id="713"/>
-            <p14:sldId id="714"/>
-            <p14:sldId id="710"/>
-            <p14:sldId id="708"/>
-            <p14:sldId id="709"/>
+            <p14:sldId id="716"/>
+            <p14:sldId id="720"/>
+            <p14:sldId id="717"/>
+            <p14:sldId id="718"/>
+            <p14:sldId id="719"/>
+            <p14:sldId id="721"/>
+            <p14:sldId id="722"/>
+            <p14:sldId id="723"/>
+            <p14:sldId id="724"/>
+            <p14:sldId id="725"/>
+            <p14:sldId id="726"/>
+            <p14:sldId id="727"/>
+            <p14:sldId id="728"/>
+            <p14:sldId id="729"/>
           </p14:sldIdLst>
         </p14:section>
       </p14:sectionLst>
@@ -726,7 +746,919 @@
     </p:spTree>
     <p:extLst>
       <p:ext uri="{BB962C8B-B14F-4D97-AF65-F5344CB8AC3E}">
-        <p14:creationId xmlns:p14="http://schemas.microsoft.com/office/powerpoint/2010/main" val="1468799901"/>
+        <p14:creationId xmlns:p14="http://schemas.microsoft.com/office/powerpoint/2010/main" val="1217704075"/>
+      </p:ext>
+    </p:extLst>
+  </p:cSld>
+  <p:clrMapOvr>
+    <a:masterClrMapping/>
+  </p:clrMapOvr>
+</p:notes>
+</file>
+
+<file path=ppt/notesSlides/notesSlide10.xml><?xml version="1.0" encoding="utf-8"?>
+<p:notes xmlns:a="http://schemas.openxmlformats.org/drawingml/2006/main" xmlns:r="http://schemas.openxmlformats.org/officeDocument/2006/relationships" xmlns:p="http://schemas.openxmlformats.org/presentationml/2006/main">
+  <p:cSld>
+    <p:spTree>
+      <p:nvGrpSpPr>
+        <p:cNvPr id="1" name="">
+          <a:extLst>
+            <a:ext uri="{FF2B5EF4-FFF2-40B4-BE49-F238E27FC236}">
+              <a16:creationId xmlns:a16="http://schemas.microsoft.com/office/drawing/2014/main" id="{BA15ABF2-4B4C-4B8E-5B51-0055102830F2}"/>
+            </a:ext>
+          </a:extLst>
+        </p:cNvPr>
+        <p:cNvGrpSpPr/>
+        <p:nvPr/>
+      </p:nvGrpSpPr>
+      <p:grpSpPr>
+        <a:xfrm>
+          <a:off x="0" y="0"/>
+          <a:ext cx="0" cy="0"/>
+          <a:chOff x="0" y="0"/>
+          <a:chExt cx="0" cy="0"/>
+        </a:xfrm>
+      </p:grpSpPr>
+      <p:sp>
+        <p:nvSpPr>
+          <p:cNvPr id="2" name="Slide Image Placeholder 1">
+            <a:extLst>
+              <a:ext uri="{FF2B5EF4-FFF2-40B4-BE49-F238E27FC236}">
+                <a16:creationId xmlns:a16="http://schemas.microsoft.com/office/drawing/2014/main" id="{B058444C-6407-DB64-A60D-DD271409D363}"/>
+              </a:ext>
+            </a:extLst>
+          </p:cNvPr>
+          <p:cNvSpPr>
+            <a:spLocks noGrp="1" noRot="1" noChangeAspect="1"/>
+          </p:cNvSpPr>
+          <p:nvPr>
+            <p:ph type="sldImg"/>
+          </p:nvPr>
+        </p:nvSpPr>
+        <p:spPr/>
+      </p:sp>
+      <p:sp>
+        <p:nvSpPr>
+          <p:cNvPr id="3" name="Notes Placeholder 2">
+            <a:extLst>
+              <a:ext uri="{FF2B5EF4-FFF2-40B4-BE49-F238E27FC236}">
+                <a16:creationId xmlns:a16="http://schemas.microsoft.com/office/drawing/2014/main" id="{25EA520F-49E4-90CD-44BF-A91A4D6AF2AF}"/>
+              </a:ext>
+            </a:extLst>
+          </p:cNvPr>
+          <p:cNvSpPr>
+            <a:spLocks noGrp="1"/>
+          </p:cNvSpPr>
+          <p:nvPr>
+            <p:ph type="body" idx="1"/>
+          </p:nvPr>
+        </p:nvSpPr>
+        <p:spPr/>
+        <p:txBody>
+          <a:bodyPr/>
+          <a:lstStyle/>
+          <a:p>
+            <a:endParaRPr lang="en-US" dirty="0"/>
+          </a:p>
+        </p:txBody>
+      </p:sp>
+      <p:sp>
+        <p:nvSpPr>
+          <p:cNvPr id="4" name="Slide Number Placeholder 3">
+            <a:extLst>
+              <a:ext uri="{FF2B5EF4-FFF2-40B4-BE49-F238E27FC236}">
+                <a16:creationId xmlns:a16="http://schemas.microsoft.com/office/drawing/2014/main" id="{68543DD3-0F20-0212-B4E6-10EFD22D1FF4}"/>
+              </a:ext>
+            </a:extLst>
+          </p:cNvPr>
+          <p:cNvSpPr>
+            <a:spLocks noGrp="1"/>
+          </p:cNvSpPr>
+          <p:nvPr>
+            <p:ph type="sldNum" sz="quarter" idx="5"/>
+          </p:nvPr>
+        </p:nvSpPr>
+        <p:spPr/>
+        <p:txBody>
+          <a:bodyPr/>
+          <a:lstStyle/>
+          <a:p>
+            <a:pPr>
+              <a:defRPr/>
+            </a:pPr>
+            <a:fld id="{6E074355-CE0D-4C68-A6CB-C364ED71B33B}" type="slidenum">
+              <a:rPr lang="en-US" smtClean="0"/>
+              <a:pPr>
+                <a:defRPr/>
+              </a:pPr>
+              <a:t>11</a:t>
+            </a:fld>
+            <a:endParaRPr lang="en-US"/>
+          </a:p>
+        </p:txBody>
+      </p:sp>
+    </p:spTree>
+    <p:extLst>
+      <p:ext uri="{BB962C8B-B14F-4D97-AF65-F5344CB8AC3E}">
+        <p14:creationId xmlns:p14="http://schemas.microsoft.com/office/powerpoint/2010/main" val="809967933"/>
+      </p:ext>
+    </p:extLst>
+  </p:cSld>
+  <p:clrMapOvr>
+    <a:masterClrMapping/>
+  </p:clrMapOvr>
+</p:notes>
+</file>
+
+<file path=ppt/notesSlides/notesSlide11.xml><?xml version="1.0" encoding="utf-8"?>
+<p:notes xmlns:a="http://schemas.openxmlformats.org/drawingml/2006/main" xmlns:r="http://schemas.openxmlformats.org/officeDocument/2006/relationships" xmlns:p="http://schemas.openxmlformats.org/presentationml/2006/main">
+  <p:cSld>
+    <p:spTree>
+      <p:nvGrpSpPr>
+        <p:cNvPr id="1" name="">
+          <a:extLst>
+            <a:ext uri="{FF2B5EF4-FFF2-40B4-BE49-F238E27FC236}">
+              <a16:creationId xmlns:a16="http://schemas.microsoft.com/office/drawing/2014/main" id="{A87E38C3-3744-13A3-FA1B-8BBBD168B294}"/>
+            </a:ext>
+          </a:extLst>
+        </p:cNvPr>
+        <p:cNvGrpSpPr/>
+        <p:nvPr/>
+      </p:nvGrpSpPr>
+      <p:grpSpPr>
+        <a:xfrm>
+          <a:off x="0" y="0"/>
+          <a:ext cx="0" cy="0"/>
+          <a:chOff x="0" y="0"/>
+          <a:chExt cx="0" cy="0"/>
+        </a:xfrm>
+      </p:grpSpPr>
+      <p:sp>
+        <p:nvSpPr>
+          <p:cNvPr id="2" name="Slide Image Placeholder 1">
+            <a:extLst>
+              <a:ext uri="{FF2B5EF4-FFF2-40B4-BE49-F238E27FC236}">
+                <a16:creationId xmlns:a16="http://schemas.microsoft.com/office/drawing/2014/main" id="{9D743805-C6C4-4E71-6A34-908C0ED98CF9}"/>
+              </a:ext>
+            </a:extLst>
+          </p:cNvPr>
+          <p:cNvSpPr>
+            <a:spLocks noGrp="1" noRot="1" noChangeAspect="1"/>
+          </p:cNvSpPr>
+          <p:nvPr>
+            <p:ph type="sldImg"/>
+          </p:nvPr>
+        </p:nvSpPr>
+        <p:spPr/>
+      </p:sp>
+      <p:sp>
+        <p:nvSpPr>
+          <p:cNvPr id="3" name="Notes Placeholder 2">
+            <a:extLst>
+              <a:ext uri="{FF2B5EF4-FFF2-40B4-BE49-F238E27FC236}">
+                <a16:creationId xmlns:a16="http://schemas.microsoft.com/office/drawing/2014/main" id="{AD2F4A17-D5FA-D11A-423C-452EA2B4E1CD}"/>
+              </a:ext>
+            </a:extLst>
+          </p:cNvPr>
+          <p:cNvSpPr>
+            <a:spLocks noGrp="1"/>
+          </p:cNvSpPr>
+          <p:nvPr>
+            <p:ph type="body" idx="1"/>
+          </p:nvPr>
+        </p:nvSpPr>
+        <p:spPr/>
+        <p:txBody>
+          <a:bodyPr/>
+          <a:lstStyle/>
+          <a:p>
+            <a:endParaRPr lang="en-US" dirty="0"/>
+          </a:p>
+        </p:txBody>
+      </p:sp>
+      <p:sp>
+        <p:nvSpPr>
+          <p:cNvPr id="4" name="Slide Number Placeholder 3">
+            <a:extLst>
+              <a:ext uri="{FF2B5EF4-FFF2-40B4-BE49-F238E27FC236}">
+                <a16:creationId xmlns:a16="http://schemas.microsoft.com/office/drawing/2014/main" id="{4C775E1E-7877-4F5B-284F-102AF421899E}"/>
+              </a:ext>
+            </a:extLst>
+          </p:cNvPr>
+          <p:cNvSpPr>
+            <a:spLocks noGrp="1"/>
+          </p:cNvSpPr>
+          <p:nvPr>
+            <p:ph type="sldNum" sz="quarter" idx="5"/>
+          </p:nvPr>
+        </p:nvSpPr>
+        <p:spPr/>
+        <p:txBody>
+          <a:bodyPr/>
+          <a:lstStyle/>
+          <a:p>
+            <a:pPr>
+              <a:defRPr/>
+            </a:pPr>
+            <a:fld id="{6E074355-CE0D-4C68-A6CB-C364ED71B33B}" type="slidenum">
+              <a:rPr lang="en-US" smtClean="0"/>
+              <a:pPr>
+                <a:defRPr/>
+              </a:pPr>
+              <a:t>12</a:t>
+            </a:fld>
+            <a:endParaRPr lang="en-US"/>
+          </a:p>
+        </p:txBody>
+      </p:sp>
+    </p:spTree>
+    <p:extLst>
+      <p:ext uri="{BB962C8B-B14F-4D97-AF65-F5344CB8AC3E}">
+        <p14:creationId xmlns:p14="http://schemas.microsoft.com/office/powerpoint/2010/main" val="3088692217"/>
+      </p:ext>
+    </p:extLst>
+  </p:cSld>
+  <p:clrMapOvr>
+    <a:masterClrMapping/>
+  </p:clrMapOvr>
+</p:notes>
+</file>
+
+<file path=ppt/notesSlides/notesSlide12.xml><?xml version="1.0" encoding="utf-8"?>
+<p:notes xmlns:a="http://schemas.openxmlformats.org/drawingml/2006/main" xmlns:r="http://schemas.openxmlformats.org/officeDocument/2006/relationships" xmlns:p="http://schemas.openxmlformats.org/presentationml/2006/main">
+  <p:cSld>
+    <p:spTree>
+      <p:nvGrpSpPr>
+        <p:cNvPr id="1" name="">
+          <a:extLst>
+            <a:ext uri="{FF2B5EF4-FFF2-40B4-BE49-F238E27FC236}">
+              <a16:creationId xmlns:a16="http://schemas.microsoft.com/office/drawing/2014/main" id="{AB3B6084-EE6D-1C86-242C-129F8C921E06}"/>
+            </a:ext>
+          </a:extLst>
+        </p:cNvPr>
+        <p:cNvGrpSpPr/>
+        <p:nvPr/>
+      </p:nvGrpSpPr>
+      <p:grpSpPr>
+        <a:xfrm>
+          <a:off x="0" y="0"/>
+          <a:ext cx="0" cy="0"/>
+          <a:chOff x="0" y="0"/>
+          <a:chExt cx="0" cy="0"/>
+        </a:xfrm>
+      </p:grpSpPr>
+      <p:sp>
+        <p:nvSpPr>
+          <p:cNvPr id="2" name="Slide Image Placeholder 1">
+            <a:extLst>
+              <a:ext uri="{FF2B5EF4-FFF2-40B4-BE49-F238E27FC236}">
+                <a16:creationId xmlns:a16="http://schemas.microsoft.com/office/drawing/2014/main" id="{CE09CC3A-820C-9852-6EF3-4FF3EC472AC1}"/>
+              </a:ext>
+            </a:extLst>
+          </p:cNvPr>
+          <p:cNvSpPr>
+            <a:spLocks noGrp="1" noRot="1" noChangeAspect="1"/>
+          </p:cNvSpPr>
+          <p:nvPr>
+            <p:ph type="sldImg"/>
+          </p:nvPr>
+        </p:nvSpPr>
+        <p:spPr/>
+      </p:sp>
+      <p:sp>
+        <p:nvSpPr>
+          <p:cNvPr id="3" name="Notes Placeholder 2">
+            <a:extLst>
+              <a:ext uri="{FF2B5EF4-FFF2-40B4-BE49-F238E27FC236}">
+                <a16:creationId xmlns:a16="http://schemas.microsoft.com/office/drawing/2014/main" id="{5CA0035D-CECB-0241-5601-134656986E82}"/>
+              </a:ext>
+            </a:extLst>
+          </p:cNvPr>
+          <p:cNvSpPr>
+            <a:spLocks noGrp="1"/>
+          </p:cNvSpPr>
+          <p:nvPr>
+            <p:ph type="body" idx="1"/>
+          </p:nvPr>
+        </p:nvSpPr>
+        <p:spPr/>
+        <p:txBody>
+          <a:bodyPr/>
+          <a:lstStyle/>
+          <a:p>
+            <a:endParaRPr lang="en-US" dirty="0"/>
+          </a:p>
+        </p:txBody>
+      </p:sp>
+      <p:sp>
+        <p:nvSpPr>
+          <p:cNvPr id="4" name="Slide Number Placeholder 3">
+            <a:extLst>
+              <a:ext uri="{FF2B5EF4-FFF2-40B4-BE49-F238E27FC236}">
+                <a16:creationId xmlns:a16="http://schemas.microsoft.com/office/drawing/2014/main" id="{9EC6E398-8A41-0ED6-A1BB-D29380A9E378}"/>
+              </a:ext>
+            </a:extLst>
+          </p:cNvPr>
+          <p:cNvSpPr>
+            <a:spLocks noGrp="1"/>
+          </p:cNvSpPr>
+          <p:nvPr>
+            <p:ph type="sldNum" sz="quarter" idx="5"/>
+          </p:nvPr>
+        </p:nvSpPr>
+        <p:spPr/>
+        <p:txBody>
+          <a:bodyPr/>
+          <a:lstStyle/>
+          <a:p>
+            <a:pPr>
+              <a:defRPr/>
+            </a:pPr>
+            <a:fld id="{6E074355-CE0D-4C68-A6CB-C364ED71B33B}" type="slidenum">
+              <a:rPr lang="en-US" smtClean="0"/>
+              <a:pPr>
+                <a:defRPr/>
+              </a:pPr>
+              <a:t>13</a:t>
+            </a:fld>
+            <a:endParaRPr lang="en-US"/>
+          </a:p>
+        </p:txBody>
+      </p:sp>
+    </p:spTree>
+    <p:extLst>
+      <p:ext uri="{BB962C8B-B14F-4D97-AF65-F5344CB8AC3E}">
+        <p14:creationId xmlns:p14="http://schemas.microsoft.com/office/powerpoint/2010/main" val="783026332"/>
+      </p:ext>
+    </p:extLst>
+  </p:cSld>
+  <p:clrMapOvr>
+    <a:masterClrMapping/>
+  </p:clrMapOvr>
+</p:notes>
+</file>
+
+<file path=ppt/notesSlides/notesSlide13.xml><?xml version="1.0" encoding="utf-8"?>
+<p:notes xmlns:a="http://schemas.openxmlformats.org/drawingml/2006/main" xmlns:r="http://schemas.openxmlformats.org/officeDocument/2006/relationships" xmlns:p="http://schemas.openxmlformats.org/presentationml/2006/main">
+  <p:cSld>
+    <p:spTree>
+      <p:nvGrpSpPr>
+        <p:cNvPr id="1" name="">
+          <a:extLst>
+            <a:ext uri="{FF2B5EF4-FFF2-40B4-BE49-F238E27FC236}">
+              <a16:creationId xmlns:a16="http://schemas.microsoft.com/office/drawing/2014/main" id="{E5962510-AC7D-B9AB-2653-B7B1B9811BDB}"/>
+            </a:ext>
+          </a:extLst>
+        </p:cNvPr>
+        <p:cNvGrpSpPr/>
+        <p:nvPr/>
+      </p:nvGrpSpPr>
+      <p:grpSpPr>
+        <a:xfrm>
+          <a:off x="0" y="0"/>
+          <a:ext cx="0" cy="0"/>
+          <a:chOff x="0" y="0"/>
+          <a:chExt cx="0" cy="0"/>
+        </a:xfrm>
+      </p:grpSpPr>
+      <p:sp>
+        <p:nvSpPr>
+          <p:cNvPr id="2" name="Slide Image Placeholder 1">
+            <a:extLst>
+              <a:ext uri="{FF2B5EF4-FFF2-40B4-BE49-F238E27FC236}">
+                <a16:creationId xmlns:a16="http://schemas.microsoft.com/office/drawing/2014/main" id="{30673206-BC10-EDB5-2899-86263EC35682}"/>
+              </a:ext>
+            </a:extLst>
+          </p:cNvPr>
+          <p:cNvSpPr>
+            <a:spLocks noGrp="1" noRot="1" noChangeAspect="1"/>
+          </p:cNvSpPr>
+          <p:nvPr>
+            <p:ph type="sldImg"/>
+          </p:nvPr>
+        </p:nvSpPr>
+        <p:spPr/>
+      </p:sp>
+      <p:sp>
+        <p:nvSpPr>
+          <p:cNvPr id="3" name="Notes Placeholder 2">
+            <a:extLst>
+              <a:ext uri="{FF2B5EF4-FFF2-40B4-BE49-F238E27FC236}">
+                <a16:creationId xmlns:a16="http://schemas.microsoft.com/office/drawing/2014/main" id="{08D18F76-5AD5-25F3-25A8-0A7FD2DC0B31}"/>
+              </a:ext>
+            </a:extLst>
+          </p:cNvPr>
+          <p:cNvSpPr>
+            <a:spLocks noGrp="1"/>
+          </p:cNvSpPr>
+          <p:nvPr>
+            <p:ph type="body" idx="1"/>
+          </p:nvPr>
+        </p:nvSpPr>
+        <p:spPr/>
+        <p:txBody>
+          <a:bodyPr/>
+          <a:lstStyle/>
+          <a:p>
+            <a:endParaRPr lang="en-US" dirty="0"/>
+          </a:p>
+        </p:txBody>
+      </p:sp>
+      <p:sp>
+        <p:nvSpPr>
+          <p:cNvPr id="4" name="Slide Number Placeholder 3">
+            <a:extLst>
+              <a:ext uri="{FF2B5EF4-FFF2-40B4-BE49-F238E27FC236}">
+                <a16:creationId xmlns:a16="http://schemas.microsoft.com/office/drawing/2014/main" id="{08B43273-1231-2BE1-7257-CD694687FE36}"/>
+              </a:ext>
+            </a:extLst>
+          </p:cNvPr>
+          <p:cNvSpPr>
+            <a:spLocks noGrp="1"/>
+          </p:cNvSpPr>
+          <p:nvPr>
+            <p:ph type="sldNum" sz="quarter" idx="5"/>
+          </p:nvPr>
+        </p:nvSpPr>
+        <p:spPr/>
+        <p:txBody>
+          <a:bodyPr/>
+          <a:lstStyle/>
+          <a:p>
+            <a:pPr>
+              <a:defRPr/>
+            </a:pPr>
+            <a:fld id="{6E074355-CE0D-4C68-A6CB-C364ED71B33B}" type="slidenum">
+              <a:rPr lang="en-US" smtClean="0"/>
+              <a:pPr>
+                <a:defRPr/>
+              </a:pPr>
+              <a:t>14</a:t>
+            </a:fld>
+            <a:endParaRPr lang="en-US"/>
+          </a:p>
+        </p:txBody>
+      </p:sp>
+    </p:spTree>
+    <p:extLst>
+      <p:ext uri="{BB962C8B-B14F-4D97-AF65-F5344CB8AC3E}">
+        <p14:creationId xmlns:p14="http://schemas.microsoft.com/office/powerpoint/2010/main" val="2385191180"/>
+      </p:ext>
+    </p:extLst>
+  </p:cSld>
+  <p:clrMapOvr>
+    <a:masterClrMapping/>
+  </p:clrMapOvr>
+</p:notes>
+</file>
+
+<file path=ppt/notesSlides/notesSlide14.xml><?xml version="1.0" encoding="utf-8"?>
+<p:notes xmlns:a="http://schemas.openxmlformats.org/drawingml/2006/main" xmlns:r="http://schemas.openxmlformats.org/officeDocument/2006/relationships" xmlns:p="http://schemas.openxmlformats.org/presentationml/2006/main">
+  <p:cSld>
+    <p:spTree>
+      <p:nvGrpSpPr>
+        <p:cNvPr id="1" name="">
+          <a:extLst>
+            <a:ext uri="{FF2B5EF4-FFF2-40B4-BE49-F238E27FC236}">
+              <a16:creationId xmlns:a16="http://schemas.microsoft.com/office/drawing/2014/main" id="{5700028F-F049-FDA4-16DB-41BD283C5A5B}"/>
+            </a:ext>
+          </a:extLst>
+        </p:cNvPr>
+        <p:cNvGrpSpPr/>
+        <p:nvPr/>
+      </p:nvGrpSpPr>
+      <p:grpSpPr>
+        <a:xfrm>
+          <a:off x="0" y="0"/>
+          <a:ext cx="0" cy="0"/>
+          <a:chOff x="0" y="0"/>
+          <a:chExt cx="0" cy="0"/>
+        </a:xfrm>
+      </p:grpSpPr>
+      <p:sp>
+        <p:nvSpPr>
+          <p:cNvPr id="2" name="Slide Image Placeholder 1">
+            <a:extLst>
+              <a:ext uri="{FF2B5EF4-FFF2-40B4-BE49-F238E27FC236}">
+                <a16:creationId xmlns:a16="http://schemas.microsoft.com/office/drawing/2014/main" id="{DF53092F-DABC-BAA4-E468-99C090366F5D}"/>
+              </a:ext>
+            </a:extLst>
+          </p:cNvPr>
+          <p:cNvSpPr>
+            <a:spLocks noGrp="1" noRot="1" noChangeAspect="1"/>
+          </p:cNvSpPr>
+          <p:nvPr>
+            <p:ph type="sldImg"/>
+          </p:nvPr>
+        </p:nvSpPr>
+        <p:spPr/>
+      </p:sp>
+      <p:sp>
+        <p:nvSpPr>
+          <p:cNvPr id="3" name="Notes Placeholder 2">
+            <a:extLst>
+              <a:ext uri="{FF2B5EF4-FFF2-40B4-BE49-F238E27FC236}">
+                <a16:creationId xmlns:a16="http://schemas.microsoft.com/office/drawing/2014/main" id="{B47C0647-0F22-BA25-7160-894BCFA95564}"/>
+              </a:ext>
+            </a:extLst>
+          </p:cNvPr>
+          <p:cNvSpPr>
+            <a:spLocks noGrp="1"/>
+          </p:cNvSpPr>
+          <p:nvPr>
+            <p:ph type="body" idx="1"/>
+          </p:nvPr>
+        </p:nvSpPr>
+        <p:spPr/>
+        <p:txBody>
+          <a:bodyPr/>
+          <a:lstStyle/>
+          <a:p>
+            <a:endParaRPr lang="en-US" dirty="0"/>
+          </a:p>
+        </p:txBody>
+      </p:sp>
+      <p:sp>
+        <p:nvSpPr>
+          <p:cNvPr id="4" name="Slide Number Placeholder 3">
+            <a:extLst>
+              <a:ext uri="{FF2B5EF4-FFF2-40B4-BE49-F238E27FC236}">
+                <a16:creationId xmlns:a16="http://schemas.microsoft.com/office/drawing/2014/main" id="{941361B4-E5B9-ED3C-7B83-10251F53DCA4}"/>
+              </a:ext>
+            </a:extLst>
+          </p:cNvPr>
+          <p:cNvSpPr>
+            <a:spLocks noGrp="1"/>
+          </p:cNvSpPr>
+          <p:nvPr>
+            <p:ph type="sldNum" sz="quarter" idx="5"/>
+          </p:nvPr>
+        </p:nvSpPr>
+        <p:spPr/>
+        <p:txBody>
+          <a:bodyPr/>
+          <a:lstStyle/>
+          <a:p>
+            <a:pPr>
+              <a:defRPr/>
+            </a:pPr>
+            <a:fld id="{6E074355-CE0D-4C68-A6CB-C364ED71B33B}" type="slidenum">
+              <a:rPr lang="en-US" smtClean="0"/>
+              <a:pPr>
+                <a:defRPr/>
+              </a:pPr>
+              <a:t>15</a:t>
+            </a:fld>
+            <a:endParaRPr lang="en-US"/>
+          </a:p>
+        </p:txBody>
+      </p:sp>
+    </p:spTree>
+    <p:extLst>
+      <p:ext uri="{BB962C8B-B14F-4D97-AF65-F5344CB8AC3E}">
+        <p14:creationId xmlns:p14="http://schemas.microsoft.com/office/powerpoint/2010/main" val="2959264895"/>
+      </p:ext>
+    </p:extLst>
+  </p:cSld>
+  <p:clrMapOvr>
+    <a:masterClrMapping/>
+  </p:clrMapOvr>
+</p:notes>
+</file>
+
+<file path=ppt/notesSlides/notesSlide15.xml><?xml version="1.0" encoding="utf-8"?>
+<p:notes xmlns:a="http://schemas.openxmlformats.org/drawingml/2006/main" xmlns:r="http://schemas.openxmlformats.org/officeDocument/2006/relationships" xmlns:p="http://schemas.openxmlformats.org/presentationml/2006/main">
+  <p:cSld>
+    <p:spTree>
+      <p:nvGrpSpPr>
+        <p:cNvPr id="1" name="">
+          <a:extLst>
+            <a:ext uri="{FF2B5EF4-FFF2-40B4-BE49-F238E27FC236}">
+              <a16:creationId xmlns:a16="http://schemas.microsoft.com/office/drawing/2014/main" id="{E163CEA9-FF62-DBFB-0039-BC5C5964E8E1}"/>
+            </a:ext>
+          </a:extLst>
+        </p:cNvPr>
+        <p:cNvGrpSpPr/>
+        <p:nvPr/>
+      </p:nvGrpSpPr>
+      <p:grpSpPr>
+        <a:xfrm>
+          <a:off x="0" y="0"/>
+          <a:ext cx="0" cy="0"/>
+          <a:chOff x="0" y="0"/>
+          <a:chExt cx="0" cy="0"/>
+        </a:xfrm>
+      </p:grpSpPr>
+      <p:sp>
+        <p:nvSpPr>
+          <p:cNvPr id="2" name="Slide Image Placeholder 1">
+            <a:extLst>
+              <a:ext uri="{FF2B5EF4-FFF2-40B4-BE49-F238E27FC236}">
+                <a16:creationId xmlns:a16="http://schemas.microsoft.com/office/drawing/2014/main" id="{547049B6-3031-83A4-EC76-9E3443AA2598}"/>
+              </a:ext>
+            </a:extLst>
+          </p:cNvPr>
+          <p:cNvSpPr>
+            <a:spLocks noGrp="1" noRot="1" noChangeAspect="1"/>
+          </p:cNvSpPr>
+          <p:nvPr>
+            <p:ph type="sldImg"/>
+          </p:nvPr>
+        </p:nvSpPr>
+        <p:spPr/>
+      </p:sp>
+      <p:sp>
+        <p:nvSpPr>
+          <p:cNvPr id="3" name="Notes Placeholder 2">
+            <a:extLst>
+              <a:ext uri="{FF2B5EF4-FFF2-40B4-BE49-F238E27FC236}">
+                <a16:creationId xmlns:a16="http://schemas.microsoft.com/office/drawing/2014/main" id="{111A0F9E-EFA9-956F-5545-8F95ABDF3B23}"/>
+              </a:ext>
+            </a:extLst>
+          </p:cNvPr>
+          <p:cNvSpPr>
+            <a:spLocks noGrp="1"/>
+          </p:cNvSpPr>
+          <p:nvPr>
+            <p:ph type="body" idx="1"/>
+          </p:nvPr>
+        </p:nvSpPr>
+        <p:spPr/>
+        <p:txBody>
+          <a:bodyPr/>
+          <a:lstStyle/>
+          <a:p>
+            <a:endParaRPr lang="en-US" dirty="0"/>
+          </a:p>
+        </p:txBody>
+      </p:sp>
+      <p:sp>
+        <p:nvSpPr>
+          <p:cNvPr id="4" name="Slide Number Placeholder 3">
+            <a:extLst>
+              <a:ext uri="{FF2B5EF4-FFF2-40B4-BE49-F238E27FC236}">
+                <a16:creationId xmlns:a16="http://schemas.microsoft.com/office/drawing/2014/main" id="{9D1D6C9B-C21E-835C-BEAB-4F5573CCD098}"/>
+              </a:ext>
+            </a:extLst>
+          </p:cNvPr>
+          <p:cNvSpPr>
+            <a:spLocks noGrp="1"/>
+          </p:cNvSpPr>
+          <p:nvPr>
+            <p:ph type="sldNum" sz="quarter" idx="5"/>
+          </p:nvPr>
+        </p:nvSpPr>
+        <p:spPr/>
+        <p:txBody>
+          <a:bodyPr/>
+          <a:lstStyle/>
+          <a:p>
+            <a:pPr>
+              <a:defRPr/>
+            </a:pPr>
+            <a:fld id="{6E074355-CE0D-4C68-A6CB-C364ED71B33B}" type="slidenum">
+              <a:rPr lang="en-US" smtClean="0"/>
+              <a:pPr>
+                <a:defRPr/>
+              </a:pPr>
+              <a:t>16</a:t>
+            </a:fld>
+            <a:endParaRPr lang="en-US"/>
+          </a:p>
+        </p:txBody>
+      </p:sp>
+    </p:spTree>
+    <p:extLst>
+      <p:ext uri="{BB962C8B-B14F-4D97-AF65-F5344CB8AC3E}">
+        <p14:creationId xmlns:p14="http://schemas.microsoft.com/office/powerpoint/2010/main" val="1620992686"/>
+      </p:ext>
+    </p:extLst>
+  </p:cSld>
+  <p:clrMapOvr>
+    <a:masterClrMapping/>
+  </p:clrMapOvr>
+</p:notes>
+</file>
+
+<file path=ppt/notesSlides/notesSlide16.xml><?xml version="1.0" encoding="utf-8"?>
+<p:notes xmlns:a="http://schemas.openxmlformats.org/drawingml/2006/main" xmlns:r="http://schemas.openxmlformats.org/officeDocument/2006/relationships" xmlns:p="http://schemas.openxmlformats.org/presentationml/2006/main">
+  <p:cSld>
+    <p:spTree>
+      <p:nvGrpSpPr>
+        <p:cNvPr id="1" name="">
+          <a:extLst>
+            <a:ext uri="{FF2B5EF4-FFF2-40B4-BE49-F238E27FC236}">
+              <a16:creationId xmlns:a16="http://schemas.microsoft.com/office/drawing/2014/main" id="{871E4F89-B93E-7A69-C7F6-E302AD3C6331}"/>
+            </a:ext>
+          </a:extLst>
+        </p:cNvPr>
+        <p:cNvGrpSpPr/>
+        <p:nvPr/>
+      </p:nvGrpSpPr>
+      <p:grpSpPr>
+        <a:xfrm>
+          <a:off x="0" y="0"/>
+          <a:ext cx="0" cy="0"/>
+          <a:chOff x="0" y="0"/>
+          <a:chExt cx="0" cy="0"/>
+        </a:xfrm>
+      </p:grpSpPr>
+      <p:sp>
+        <p:nvSpPr>
+          <p:cNvPr id="2" name="Slide Image Placeholder 1">
+            <a:extLst>
+              <a:ext uri="{FF2B5EF4-FFF2-40B4-BE49-F238E27FC236}">
+                <a16:creationId xmlns:a16="http://schemas.microsoft.com/office/drawing/2014/main" id="{82CE307E-46E6-85C9-4B0B-345A0AE983AE}"/>
+              </a:ext>
+            </a:extLst>
+          </p:cNvPr>
+          <p:cNvSpPr>
+            <a:spLocks noGrp="1" noRot="1" noChangeAspect="1"/>
+          </p:cNvSpPr>
+          <p:nvPr>
+            <p:ph type="sldImg"/>
+          </p:nvPr>
+        </p:nvSpPr>
+        <p:spPr/>
+      </p:sp>
+      <p:sp>
+        <p:nvSpPr>
+          <p:cNvPr id="3" name="Notes Placeholder 2">
+            <a:extLst>
+              <a:ext uri="{FF2B5EF4-FFF2-40B4-BE49-F238E27FC236}">
+                <a16:creationId xmlns:a16="http://schemas.microsoft.com/office/drawing/2014/main" id="{B9B8BFBE-D623-F03C-A431-8321E7DEBBFE}"/>
+              </a:ext>
+            </a:extLst>
+          </p:cNvPr>
+          <p:cNvSpPr>
+            <a:spLocks noGrp="1"/>
+          </p:cNvSpPr>
+          <p:nvPr>
+            <p:ph type="body" idx="1"/>
+          </p:nvPr>
+        </p:nvSpPr>
+        <p:spPr/>
+        <p:txBody>
+          <a:bodyPr/>
+          <a:lstStyle/>
+          <a:p>
+            <a:endParaRPr lang="en-US" dirty="0"/>
+          </a:p>
+        </p:txBody>
+      </p:sp>
+      <p:sp>
+        <p:nvSpPr>
+          <p:cNvPr id="4" name="Slide Number Placeholder 3">
+            <a:extLst>
+              <a:ext uri="{FF2B5EF4-FFF2-40B4-BE49-F238E27FC236}">
+                <a16:creationId xmlns:a16="http://schemas.microsoft.com/office/drawing/2014/main" id="{721B2CDC-517B-08FB-1C2E-AB1FD4042469}"/>
+              </a:ext>
+            </a:extLst>
+          </p:cNvPr>
+          <p:cNvSpPr>
+            <a:spLocks noGrp="1"/>
+          </p:cNvSpPr>
+          <p:nvPr>
+            <p:ph type="sldNum" sz="quarter" idx="5"/>
+          </p:nvPr>
+        </p:nvSpPr>
+        <p:spPr/>
+        <p:txBody>
+          <a:bodyPr/>
+          <a:lstStyle/>
+          <a:p>
+            <a:pPr>
+              <a:defRPr/>
+            </a:pPr>
+            <a:fld id="{6E074355-CE0D-4C68-A6CB-C364ED71B33B}" type="slidenum">
+              <a:rPr lang="en-US" smtClean="0"/>
+              <a:pPr>
+                <a:defRPr/>
+              </a:pPr>
+              <a:t>17</a:t>
+            </a:fld>
+            <a:endParaRPr lang="en-US"/>
+          </a:p>
+        </p:txBody>
+      </p:sp>
+    </p:spTree>
+    <p:extLst>
+      <p:ext uri="{BB962C8B-B14F-4D97-AF65-F5344CB8AC3E}">
+        <p14:creationId xmlns:p14="http://schemas.microsoft.com/office/powerpoint/2010/main" val="2366822155"/>
+      </p:ext>
+    </p:extLst>
+  </p:cSld>
+  <p:clrMapOvr>
+    <a:masterClrMapping/>
+  </p:clrMapOvr>
+</p:notes>
+</file>
+
+<file path=ppt/notesSlides/notesSlide17.xml><?xml version="1.0" encoding="utf-8"?>
+<p:notes xmlns:a="http://schemas.openxmlformats.org/drawingml/2006/main" xmlns:r="http://schemas.openxmlformats.org/officeDocument/2006/relationships" xmlns:p="http://schemas.openxmlformats.org/presentationml/2006/main">
+  <p:cSld>
+    <p:spTree>
+      <p:nvGrpSpPr>
+        <p:cNvPr id="1" name="">
+          <a:extLst>
+            <a:ext uri="{FF2B5EF4-FFF2-40B4-BE49-F238E27FC236}">
+              <a16:creationId xmlns:a16="http://schemas.microsoft.com/office/drawing/2014/main" id="{53E8E208-D746-665A-168A-9DA3302E70FA}"/>
+            </a:ext>
+          </a:extLst>
+        </p:cNvPr>
+        <p:cNvGrpSpPr/>
+        <p:nvPr/>
+      </p:nvGrpSpPr>
+      <p:grpSpPr>
+        <a:xfrm>
+          <a:off x="0" y="0"/>
+          <a:ext cx="0" cy="0"/>
+          <a:chOff x="0" y="0"/>
+          <a:chExt cx="0" cy="0"/>
+        </a:xfrm>
+      </p:grpSpPr>
+      <p:sp>
+        <p:nvSpPr>
+          <p:cNvPr id="2" name="Slide Image Placeholder 1">
+            <a:extLst>
+              <a:ext uri="{FF2B5EF4-FFF2-40B4-BE49-F238E27FC236}">
+                <a16:creationId xmlns:a16="http://schemas.microsoft.com/office/drawing/2014/main" id="{A1EA5C96-4100-8B15-E7CF-1E9C77E5E434}"/>
+              </a:ext>
+            </a:extLst>
+          </p:cNvPr>
+          <p:cNvSpPr>
+            <a:spLocks noGrp="1" noRot="1" noChangeAspect="1"/>
+          </p:cNvSpPr>
+          <p:nvPr>
+            <p:ph type="sldImg"/>
+          </p:nvPr>
+        </p:nvSpPr>
+        <p:spPr/>
+      </p:sp>
+      <p:sp>
+        <p:nvSpPr>
+          <p:cNvPr id="3" name="Notes Placeholder 2">
+            <a:extLst>
+              <a:ext uri="{FF2B5EF4-FFF2-40B4-BE49-F238E27FC236}">
+                <a16:creationId xmlns:a16="http://schemas.microsoft.com/office/drawing/2014/main" id="{C896F669-8A6D-E48D-93AA-47FE72C8D6BD}"/>
+              </a:ext>
+            </a:extLst>
+          </p:cNvPr>
+          <p:cNvSpPr>
+            <a:spLocks noGrp="1"/>
+          </p:cNvSpPr>
+          <p:nvPr>
+            <p:ph type="body" idx="1"/>
+          </p:nvPr>
+        </p:nvSpPr>
+        <p:spPr/>
+        <p:txBody>
+          <a:bodyPr/>
+          <a:lstStyle/>
+          <a:p>
+            <a:endParaRPr lang="en-US" dirty="0"/>
+          </a:p>
+        </p:txBody>
+      </p:sp>
+      <p:sp>
+        <p:nvSpPr>
+          <p:cNvPr id="4" name="Slide Number Placeholder 3">
+            <a:extLst>
+              <a:ext uri="{FF2B5EF4-FFF2-40B4-BE49-F238E27FC236}">
+                <a16:creationId xmlns:a16="http://schemas.microsoft.com/office/drawing/2014/main" id="{F5477171-4A1A-2049-93E0-24861D61A59A}"/>
+              </a:ext>
+            </a:extLst>
+          </p:cNvPr>
+          <p:cNvSpPr>
+            <a:spLocks noGrp="1"/>
+          </p:cNvSpPr>
+          <p:nvPr>
+            <p:ph type="sldNum" sz="quarter" idx="5"/>
+          </p:nvPr>
+        </p:nvSpPr>
+        <p:spPr/>
+        <p:txBody>
+          <a:bodyPr/>
+          <a:lstStyle/>
+          <a:p>
+            <a:pPr>
+              <a:defRPr/>
+            </a:pPr>
+            <a:fld id="{6E074355-CE0D-4C68-A6CB-C364ED71B33B}" type="slidenum">
+              <a:rPr lang="en-US" smtClean="0"/>
+              <a:pPr>
+                <a:defRPr/>
+              </a:pPr>
+              <a:t>18</a:t>
+            </a:fld>
+            <a:endParaRPr lang="en-US"/>
+          </a:p>
+        </p:txBody>
+      </p:sp>
+    </p:spTree>
+    <p:extLst>
+      <p:ext uri="{BB962C8B-B14F-4D97-AF65-F5344CB8AC3E}">
+        <p14:creationId xmlns:p14="http://schemas.microsoft.com/office/powerpoint/2010/main" val="3574007802"/>
       </p:ext>
     </p:extLst>
   </p:cSld>
@@ -791,7 +1723,7 @@
             <a:spLocks noGrp="1"/>
           </p:cNvSpPr>
           <p:nvPr>
-            <p:ph type="sldNum" sz="quarter" idx="10"/>
+            <p:ph type="sldNum" sz="quarter" idx="5"/>
           </p:nvPr>
         </p:nvSpPr>
         <p:spPr/>
@@ -807,7 +1739,7 @@
               <a:pPr>
                 <a:defRPr/>
               </a:pPr>
-              <a:t>2</a:t>
+              <a:t>3</a:t>
             </a:fld>
             <a:endParaRPr lang="en-US"/>
           </a:p>
@@ -816,7 +1748,7 @@
     </p:spTree>
     <p:extLst>
       <p:ext uri="{BB962C8B-B14F-4D97-AF65-F5344CB8AC3E}">
-        <p14:creationId xmlns:p14="http://schemas.microsoft.com/office/powerpoint/2010/main" val="945276965"/>
+        <p14:creationId xmlns:p14="http://schemas.microsoft.com/office/powerpoint/2010/main" val="3451553194"/>
       </p:ext>
     </p:extLst>
   </p:cSld>
@@ -831,7 +1763,13 @@
   <p:cSld>
     <p:spTree>
       <p:nvGrpSpPr>
-        <p:cNvPr id="1" name=""/>
+        <p:cNvPr id="1" name="">
+          <a:extLst>
+            <a:ext uri="{FF2B5EF4-FFF2-40B4-BE49-F238E27FC236}">
+              <a16:creationId xmlns:a16="http://schemas.microsoft.com/office/drawing/2014/main" id="{110D0D5D-8CB6-0ED0-9C4F-954BE2880481}"/>
+            </a:ext>
+          </a:extLst>
+        </p:cNvPr>
         <p:cNvGrpSpPr/>
         <p:nvPr/>
       </p:nvGrpSpPr>
@@ -845,7 +1783,13 @@
       </p:grpSpPr>
       <p:sp>
         <p:nvSpPr>
-          <p:cNvPr id="2" name="Slide Image Placeholder 1"/>
+          <p:cNvPr id="2" name="Slide Image Placeholder 1">
+            <a:extLst>
+              <a:ext uri="{FF2B5EF4-FFF2-40B4-BE49-F238E27FC236}">
+                <a16:creationId xmlns:a16="http://schemas.microsoft.com/office/drawing/2014/main" id="{9FB666D3-C62C-5F59-3A10-9D0E6825324E}"/>
+              </a:ext>
+            </a:extLst>
+          </p:cNvPr>
           <p:cNvSpPr>
             <a:spLocks noGrp="1" noRot="1" noChangeAspect="1"/>
           </p:cNvSpPr>
@@ -857,7 +1801,13 @@
       </p:sp>
       <p:sp>
         <p:nvSpPr>
-          <p:cNvPr id="3" name="Notes Placeholder 2"/>
+          <p:cNvPr id="3" name="Notes Placeholder 2">
+            <a:extLst>
+              <a:ext uri="{FF2B5EF4-FFF2-40B4-BE49-F238E27FC236}">
+                <a16:creationId xmlns:a16="http://schemas.microsoft.com/office/drawing/2014/main" id="{56E71EF1-69EF-712F-50EC-B7A723692D4C}"/>
+              </a:ext>
+            </a:extLst>
+          </p:cNvPr>
           <p:cNvSpPr>
             <a:spLocks noGrp="1"/>
           </p:cNvSpPr>
@@ -876,12 +1826,18 @@
       </p:sp>
       <p:sp>
         <p:nvSpPr>
-          <p:cNvPr id="4" name="Slide Number Placeholder 3"/>
+          <p:cNvPr id="4" name="Slide Number Placeholder 3">
+            <a:extLst>
+              <a:ext uri="{FF2B5EF4-FFF2-40B4-BE49-F238E27FC236}">
+                <a16:creationId xmlns:a16="http://schemas.microsoft.com/office/drawing/2014/main" id="{8285504F-0548-2057-A668-E0B7D9ACD5DA}"/>
+              </a:ext>
+            </a:extLst>
+          </p:cNvPr>
           <p:cNvSpPr>
             <a:spLocks noGrp="1"/>
           </p:cNvSpPr>
           <p:nvPr>
-            <p:ph type="sldNum" sz="quarter" idx="10"/>
+            <p:ph type="sldNum" sz="quarter" idx="5"/>
           </p:nvPr>
         </p:nvSpPr>
         <p:spPr/>
@@ -897,7 +1853,7 @@
               <a:pPr>
                 <a:defRPr/>
               </a:pPr>
-              <a:t>3</a:t>
+              <a:t>4</a:t>
             </a:fld>
             <a:endParaRPr lang="en-US"/>
           </a:p>
@@ -906,7 +1862,7 @@
     </p:spTree>
     <p:extLst>
       <p:ext uri="{BB962C8B-B14F-4D97-AF65-F5344CB8AC3E}">
-        <p14:creationId xmlns:p14="http://schemas.microsoft.com/office/powerpoint/2010/main" val="934451539"/>
+        <p14:creationId xmlns:p14="http://schemas.microsoft.com/office/powerpoint/2010/main" val="2298526476"/>
       </p:ext>
     </p:extLst>
   </p:cSld>
@@ -921,7 +1877,13 @@
   <p:cSld>
     <p:spTree>
       <p:nvGrpSpPr>
-        <p:cNvPr id="1" name=""/>
+        <p:cNvPr id="1" name="">
+          <a:extLst>
+            <a:ext uri="{FF2B5EF4-FFF2-40B4-BE49-F238E27FC236}">
+              <a16:creationId xmlns:a16="http://schemas.microsoft.com/office/drawing/2014/main" id="{D299FA86-0898-F8C1-52CC-720A4DD8F9B9}"/>
+            </a:ext>
+          </a:extLst>
+        </p:cNvPr>
         <p:cNvGrpSpPr/>
         <p:nvPr/>
       </p:nvGrpSpPr>
@@ -935,7 +1897,13 @@
       </p:grpSpPr>
       <p:sp>
         <p:nvSpPr>
-          <p:cNvPr id="2" name="Slide Image Placeholder 1"/>
+          <p:cNvPr id="2" name="Slide Image Placeholder 1">
+            <a:extLst>
+              <a:ext uri="{FF2B5EF4-FFF2-40B4-BE49-F238E27FC236}">
+                <a16:creationId xmlns:a16="http://schemas.microsoft.com/office/drawing/2014/main" id="{2F849BD1-D1E1-15AC-D8BF-1F6DAC466CD0}"/>
+              </a:ext>
+            </a:extLst>
+          </p:cNvPr>
           <p:cNvSpPr>
             <a:spLocks noGrp="1" noRot="1" noChangeAspect="1"/>
           </p:cNvSpPr>
@@ -947,7 +1915,13 @@
       </p:sp>
       <p:sp>
         <p:nvSpPr>
-          <p:cNvPr id="3" name="Notes Placeholder 2"/>
+          <p:cNvPr id="3" name="Notes Placeholder 2">
+            <a:extLst>
+              <a:ext uri="{FF2B5EF4-FFF2-40B4-BE49-F238E27FC236}">
+                <a16:creationId xmlns:a16="http://schemas.microsoft.com/office/drawing/2014/main" id="{549341DE-DCA4-9D75-E3EC-8B3E74D187BB}"/>
+              </a:ext>
+            </a:extLst>
+          </p:cNvPr>
           <p:cNvSpPr>
             <a:spLocks noGrp="1"/>
           </p:cNvSpPr>
@@ -966,12 +1940,18 @@
       </p:sp>
       <p:sp>
         <p:nvSpPr>
-          <p:cNvPr id="4" name="Slide Number Placeholder 3"/>
+          <p:cNvPr id="4" name="Slide Number Placeholder 3">
+            <a:extLst>
+              <a:ext uri="{FF2B5EF4-FFF2-40B4-BE49-F238E27FC236}">
+                <a16:creationId xmlns:a16="http://schemas.microsoft.com/office/drawing/2014/main" id="{9FDE0E60-4EB0-A477-84C6-AC11721B0722}"/>
+              </a:ext>
+            </a:extLst>
+          </p:cNvPr>
           <p:cNvSpPr>
             <a:spLocks noGrp="1"/>
           </p:cNvSpPr>
           <p:nvPr>
-            <p:ph type="sldNum" sz="quarter" idx="10"/>
+            <p:ph type="sldNum" sz="quarter" idx="5"/>
           </p:nvPr>
         </p:nvSpPr>
         <p:spPr/>
@@ -987,7 +1967,7 @@
               <a:pPr>
                 <a:defRPr/>
               </a:pPr>
-              <a:t>4</a:t>
+              <a:t>5</a:t>
             </a:fld>
             <a:endParaRPr lang="en-US"/>
           </a:p>
@@ -996,7 +1976,7 @@
     </p:spTree>
     <p:extLst>
       <p:ext uri="{BB962C8B-B14F-4D97-AF65-F5344CB8AC3E}">
-        <p14:creationId xmlns:p14="http://schemas.microsoft.com/office/powerpoint/2010/main" val="1217704075"/>
+        <p14:creationId xmlns:p14="http://schemas.microsoft.com/office/powerpoint/2010/main" val="499579818"/>
       </p:ext>
     </p:extLst>
   </p:cSld>
@@ -1011,7 +1991,13 @@
   <p:cSld>
     <p:spTree>
       <p:nvGrpSpPr>
-        <p:cNvPr id="1" name=""/>
+        <p:cNvPr id="1" name="">
+          <a:extLst>
+            <a:ext uri="{FF2B5EF4-FFF2-40B4-BE49-F238E27FC236}">
+              <a16:creationId xmlns:a16="http://schemas.microsoft.com/office/drawing/2014/main" id="{93250DA1-C535-6475-D371-2019044798B0}"/>
+            </a:ext>
+          </a:extLst>
+        </p:cNvPr>
         <p:cNvGrpSpPr/>
         <p:nvPr/>
       </p:nvGrpSpPr>
@@ -1025,7 +2011,13 @@
       </p:grpSpPr>
       <p:sp>
         <p:nvSpPr>
-          <p:cNvPr id="2" name="Slide Image Placeholder 1"/>
+          <p:cNvPr id="2" name="Slide Image Placeholder 1">
+            <a:extLst>
+              <a:ext uri="{FF2B5EF4-FFF2-40B4-BE49-F238E27FC236}">
+                <a16:creationId xmlns:a16="http://schemas.microsoft.com/office/drawing/2014/main" id="{3D4F35B9-823A-2F62-484F-A3CEB31BF1B2}"/>
+              </a:ext>
+            </a:extLst>
+          </p:cNvPr>
           <p:cNvSpPr>
             <a:spLocks noGrp="1" noRot="1" noChangeAspect="1"/>
           </p:cNvSpPr>
@@ -1037,7 +2029,13 @@
       </p:sp>
       <p:sp>
         <p:nvSpPr>
-          <p:cNvPr id="3" name="Notes Placeholder 2"/>
+          <p:cNvPr id="3" name="Notes Placeholder 2">
+            <a:extLst>
+              <a:ext uri="{FF2B5EF4-FFF2-40B4-BE49-F238E27FC236}">
+                <a16:creationId xmlns:a16="http://schemas.microsoft.com/office/drawing/2014/main" id="{2F689AF4-74FA-FDAF-34BC-044349D88FDD}"/>
+              </a:ext>
+            </a:extLst>
+          </p:cNvPr>
           <p:cNvSpPr>
             <a:spLocks noGrp="1"/>
           </p:cNvSpPr>
@@ -1056,12 +2054,18 @@
       </p:sp>
       <p:sp>
         <p:nvSpPr>
-          <p:cNvPr id="4" name="Slide Number Placeholder 3"/>
+          <p:cNvPr id="4" name="Slide Number Placeholder 3">
+            <a:extLst>
+              <a:ext uri="{FF2B5EF4-FFF2-40B4-BE49-F238E27FC236}">
+                <a16:creationId xmlns:a16="http://schemas.microsoft.com/office/drawing/2014/main" id="{8058AF81-7A43-A2C6-A0BE-37C8D34A45CD}"/>
+              </a:ext>
+            </a:extLst>
+          </p:cNvPr>
           <p:cNvSpPr>
             <a:spLocks noGrp="1"/>
           </p:cNvSpPr>
           <p:nvPr>
-            <p:ph type="sldNum" sz="quarter" idx="10"/>
+            <p:ph type="sldNum" sz="quarter" idx="5"/>
           </p:nvPr>
         </p:nvSpPr>
         <p:spPr/>
@@ -1077,7 +2081,7 @@
               <a:pPr>
                 <a:defRPr/>
               </a:pPr>
-              <a:t>5</a:t>
+              <a:t>6</a:t>
             </a:fld>
             <a:endParaRPr lang="en-US"/>
           </a:p>
@@ -1086,7 +2090,463 @@
     </p:spTree>
     <p:extLst>
       <p:ext uri="{BB962C8B-B14F-4D97-AF65-F5344CB8AC3E}">
-        <p14:creationId xmlns:p14="http://schemas.microsoft.com/office/powerpoint/2010/main" val="2045511024"/>
+        <p14:creationId xmlns:p14="http://schemas.microsoft.com/office/powerpoint/2010/main" val="2932569353"/>
+      </p:ext>
+    </p:extLst>
+  </p:cSld>
+  <p:clrMapOvr>
+    <a:masterClrMapping/>
+  </p:clrMapOvr>
+</p:notes>
+</file>
+
+<file path=ppt/notesSlides/notesSlide6.xml><?xml version="1.0" encoding="utf-8"?>
+<p:notes xmlns:a="http://schemas.openxmlformats.org/drawingml/2006/main" xmlns:r="http://schemas.openxmlformats.org/officeDocument/2006/relationships" xmlns:p="http://schemas.openxmlformats.org/presentationml/2006/main">
+  <p:cSld>
+    <p:spTree>
+      <p:nvGrpSpPr>
+        <p:cNvPr id="1" name="">
+          <a:extLst>
+            <a:ext uri="{FF2B5EF4-FFF2-40B4-BE49-F238E27FC236}">
+              <a16:creationId xmlns:a16="http://schemas.microsoft.com/office/drawing/2014/main" id="{D3D3FA6A-ABE0-8446-3A5A-AB7CA99BCD7F}"/>
+            </a:ext>
+          </a:extLst>
+        </p:cNvPr>
+        <p:cNvGrpSpPr/>
+        <p:nvPr/>
+      </p:nvGrpSpPr>
+      <p:grpSpPr>
+        <a:xfrm>
+          <a:off x="0" y="0"/>
+          <a:ext cx="0" cy="0"/>
+          <a:chOff x="0" y="0"/>
+          <a:chExt cx="0" cy="0"/>
+        </a:xfrm>
+      </p:grpSpPr>
+      <p:sp>
+        <p:nvSpPr>
+          <p:cNvPr id="2" name="Slide Image Placeholder 1">
+            <a:extLst>
+              <a:ext uri="{FF2B5EF4-FFF2-40B4-BE49-F238E27FC236}">
+                <a16:creationId xmlns:a16="http://schemas.microsoft.com/office/drawing/2014/main" id="{D81014DE-98F8-062C-ECB1-4E8AADBCE282}"/>
+              </a:ext>
+            </a:extLst>
+          </p:cNvPr>
+          <p:cNvSpPr>
+            <a:spLocks noGrp="1" noRot="1" noChangeAspect="1"/>
+          </p:cNvSpPr>
+          <p:nvPr>
+            <p:ph type="sldImg"/>
+          </p:nvPr>
+        </p:nvSpPr>
+        <p:spPr/>
+      </p:sp>
+      <p:sp>
+        <p:nvSpPr>
+          <p:cNvPr id="3" name="Notes Placeholder 2">
+            <a:extLst>
+              <a:ext uri="{FF2B5EF4-FFF2-40B4-BE49-F238E27FC236}">
+                <a16:creationId xmlns:a16="http://schemas.microsoft.com/office/drawing/2014/main" id="{096A2045-0333-11BA-4490-E20BD44FC6B4}"/>
+              </a:ext>
+            </a:extLst>
+          </p:cNvPr>
+          <p:cNvSpPr>
+            <a:spLocks noGrp="1"/>
+          </p:cNvSpPr>
+          <p:nvPr>
+            <p:ph type="body" idx="1"/>
+          </p:nvPr>
+        </p:nvSpPr>
+        <p:spPr/>
+        <p:txBody>
+          <a:bodyPr/>
+          <a:lstStyle/>
+          <a:p>
+            <a:endParaRPr lang="en-US" dirty="0"/>
+          </a:p>
+        </p:txBody>
+      </p:sp>
+      <p:sp>
+        <p:nvSpPr>
+          <p:cNvPr id="4" name="Slide Number Placeholder 3">
+            <a:extLst>
+              <a:ext uri="{FF2B5EF4-FFF2-40B4-BE49-F238E27FC236}">
+                <a16:creationId xmlns:a16="http://schemas.microsoft.com/office/drawing/2014/main" id="{CC33CE43-AB12-5E70-5A43-E74A2866E94D}"/>
+              </a:ext>
+            </a:extLst>
+          </p:cNvPr>
+          <p:cNvSpPr>
+            <a:spLocks noGrp="1"/>
+          </p:cNvSpPr>
+          <p:nvPr>
+            <p:ph type="sldNum" sz="quarter" idx="5"/>
+          </p:nvPr>
+        </p:nvSpPr>
+        <p:spPr/>
+        <p:txBody>
+          <a:bodyPr/>
+          <a:lstStyle/>
+          <a:p>
+            <a:pPr>
+              <a:defRPr/>
+            </a:pPr>
+            <a:fld id="{6E074355-CE0D-4C68-A6CB-C364ED71B33B}" type="slidenum">
+              <a:rPr lang="en-US" smtClean="0"/>
+              <a:pPr>
+                <a:defRPr/>
+              </a:pPr>
+              <a:t>7</a:t>
+            </a:fld>
+            <a:endParaRPr lang="en-US"/>
+          </a:p>
+        </p:txBody>
+      </p:sp>
+    </p:spTree>
+    <p:extLst>
+      <p:ext uri="{BB962C8B-B14F-4D97-AF65-F5344CB8AC3E}">
+        <p14:creationId xmlns:p14="http://schemas.microsoft.com/office/powerpoint/2010/main" val="429834120"/>
+      </p:ext>
+    </p:extLst>
+  </p:cSld>
+  <p:clrMapOvr>
+    <a:masterClrMapping/>
+  </p:clrMapOvr>
+</p:notes>
+</file>
+
+<file path=ppt/notesSlides/notesSlide7.xml><?xml version="1.0" encoding="utf-8"?>
+<p:notes xmlns:a="http://schemas.openxmlformats.org/drawingml/2006/main" xmlns:r="http://schemas.openxmlformats.org/officeDocument/2006/relationships" xmlns:p="http://schemas.openxmlformats.org/presentationml/2006/main">
+  <p:cSld>
+    <p:spTree>
+      <p:nvGrpSpPr>
+        <p:cNvPr id="1" name="">
+          <a:extLst>
+            <a:ext uri="{FF2B5EF4-FFF2-40B4-BE49-F238E27FC236}">
+              <a16:creationId xmlns:a16="http://schemas.microsoft.com/office/drawing/2014/main" id="{25A70678-2344-3E1E-949A-B75D4BDF4B91}"/>
+            </a:ext>
+          </a:extLst>
+        </p:cNvPr>
+        <p:cNvGrpSpPr/>
+        <p:nvPr/>
+      </p:nvGrpSpPr>
+      <p:grpSpPr>
+        <a:xfrm>
+          <a:off x="0" y="0"/>
+          <a:ext cx="0" cy="0"/>
+          <a:chOff x="0" y="0"/>
+          <a:chExt cx="0" cy="0"/>
+        </a:xfrm>
+      </p:grpSpPr>
+      <p:sp>
+        <p:nvSpPr>
+          <p:cNvPr id="2" name="Slide Image Placeholder 1">
+            <a:extLst>
+              <a:ext uri="{FF2B5EF4-FFF2-40B4-BE49-F238E27FC236}">
+                <a16:creationId xmlns:a16="http://schemas.microsoft.com/office/drawing/2014/main" id="{D447D651-E5C5-EEA0-9E09-11BC439844A8}"/>
+              </a:ext>
+            </a:extLst>
+          </p:cNvPr>
+          <p:cNvSpPr>
+            <a:spLocks noGrp="1" noRot="1" noChangeAspect="1"/>
+          </p:cNvSpPr>
+          <p:nvPr>
+            <p:ph type="sldImg"/>
+          </p:nvPr>
+        </p:nvSpPr>
+        <p:spPr/>
+      </p:sp>
+      <p:sp>
+        <p:nvSpPr>
+          <p:cNvPr id="3" name="Notes Placeholder 2">
+            <a:extLst>
+              <a:ext uri="{FF2B5EF4-FFF2-40B4-BE49-F238E27FC236}">
+                <a16:creationId xmlns:a16="http://schemas.microsoft.com/office/drawing/2014/main" id="{25865F82-53F2-5259-9421-E14B34FD415E}"/>
+              </a:ext>
+            </a:extLst>
+          </p:cNvPr>
+          <p:cNvSpPr>
+            <a:spLocks noGrp="1"/>
+          </p:cNvSpPr>
+          <p:nvPr>
+            <p:ph type="body" idx="1"/>
+          </p:nvPr>
+        </p:nvSpPr>
+        <p:spPr/>
+        <p:txBody>
+          <a:bodyPr/>
+          <a:lstStyle/>
+          <a:p>
+            <a:endParaRPr lang="en-US" dirty="0"/>
+          </a:p>
+        </p:txBody>
+      </p:sp>
+      <p:sp>
+        <p:nvSpPr>
+          <p:cNvPr id="4" name="Slide Number Placeholder 3">
+            <a:extLst>
+              <a:ext uri="{FF2B5EF4-FFF2-40B4-BE49-F238E27FC236}">
+                <a16:creationId xmlns:a16="http://schemas.microsoft.com/office/drawing/2014/main" id="{A6698B45-F3A8-7C6C-E4A8-9829D99C4CC3}"/>
+              </a:ext>
+            </a:extLst>
+          </p:cNvPr>
+          <p:cNvSpPr>
+            <a:spLocks noGrp="1"/>
+          </p:cNvSpPr>
+          <p:nvPr>
+            <p:ph type="sldNum" sz="quarter" idx="5"/>
+          </p:nvPr>
+        </p:nvSpPr>
+        <p:spPr/>
+        <p:txBody>
+          <a:bodyPr/>
+          <a:lstStyle/>
+          <a:p>
+            <a:pPr>
+              <a:defRPr/>
+            </a:pPr>
+            <a:fld id="{6E074355-CE0D-4C68-A6CB-C364ED71B33B}" type="slidenum">
+              <a:rPr lang="en-US" smtClean="0"/>
+              <a:pPr>
+                <a:defRPr/>
+              </a:pPr>
+              <a:t>8</a:t>
+            </a:fld>
+            <a:endParaRPr lang="en-US"/>
+          </a:p>
+        </p:txBody>
+      </p:sp>
+    </p:spTree>
+    <p:extLst>
+      <p:ext uri="{BB962C8B-B14F-4D97-AF65-F5344CB8AC3E}">
+        <p14:creationId xmlns:p14="http://schemas.microsoft.com/office/powerpoint/2010/main" val="3143551882"/>
+      </p:ext>
+    </p:extLst>
+  </p:cSld>
+  <p:clrMapOvr>
+    <a:masterClrMapping/>
+  </p:clrMapOvr>
+</p:notes>
+</file>
+
+<file path=ppt/notesSlides/notesSlide8.xml><?xml version="1.0" encoding="utf-8"?>
+<p:notes xmlns:a="http://schemas.openxmlformats.org/drawingml/2006/main" xmlns:r="http://schemas.openxmlformats.org/officeDocument/2006/relationships" xmlns:p="http://schemas.openxmlformats.org/presentationml/2006/main">
+  <p:cSld>
+    <p:spTree>
+      <p:nvGrpSpPr>
+        <p:cNvPr id="1" name="">
+          <a:extLst>
+            <a:ext uri="{FF2B5EF4-FFF2-40B4-BE49-F238E27FC236}">
+              <a16:creationId xmlns:a16="http://schemas.microsoft.com/office/drawing/2014/main" id="{BC6F1DA8-A495-20CD-86F4-A6B227392EA0}"/>
+            </a:ext>
+          </a:extLst>
+        </p:cNvPr>
+        <p:cNvGrpSpPr/>
+        <p:nvPr/>
+      </p:nvGrpSpPr>
+      <p:grpSpPr>
+        <a:xfrm>
+          <a:off x="0" y="0"/>
+          <a:ext cx="0" cy="0"/>
+          <a:chOff x="0" y="0"/>
+          <a:chExt cx="0" cy="0"/>
+        </a:xfrm>
+      </p:grpSpPr>
+      <p:sp>
+        <p:nvSpPr>
+          <p:cNvPr id="2" name="Slide Image Placeholder 1">
+            <a:extLst>
+              <a:ext uri="{FF2B5EF4-FFF2-40B4-BE49-F238E27FC236}">
+                <a16:creationId xmlns:a16="http://schemas.microsoft.com/office/drawing/2014/main" id="{06FCE806-C73F-F7B0-B4FA-1AF68EC40F1B}"/>
+              </a:ext>
+            </a:extLst>
+          </p:cNvPr>
+          <p:cNvSpPr>
+            <a:spLocks noGrp="1" noRot="1" noChangeAspect="1"/>
+          </p:cNvSpPr>
+          <p:nvPr>
+            <p:ph type="sldImg"/>
+          </p:nvPr>
+        </p:nvSpPr>
+        <p:spPr/>
+      </p:sp>
+      <p:sp>
+        <p:nvSpPr>
+          <p:cNvPr id="3" name="Notes Placeholder 2">
+            <a:extLst>
+              <a:ext uri="{FF2B5EF4-FFF2-40B4-BE49-F238E27FC236}">
+                <a16:creationId xmlns:a16="http://schemas.microsoft.com/office/drawing/2014/main" id="{E1697CE0-0B4C-C754-9675-AC47394DD3EE}"/>
+              </a:ext>
+            </a:extLst>
+          </p:cNvPr>
+          <p:cNvSpPr>
+            <a:spLocks noGrp="1"/>
+          </p:cNvSpPr>
+          <p:nvPr>
+            <p:ph type="body" idx="1"/>
+          </p:nvPr>
+        </p:nvSpPr>
+        <p:spPr/>
+        <p:txBody>
+          <a:bodyPr/>
+          <a:lstStyle/>
+          <a:p>
+            <a:endParaRPr lang="en-US" dirty="0"/>
+          </a:p>
+        </p:txBody>
+      </p:sp>
+      <p:sp>
+        <p:nvSpPr>
+          <p:cNvPr id="4" name="Slide Number Placeholder 3">
+            <a:extLst>
+              <a:ext uri="{FF2B5EF4-FFF2-40B4-BE49-F238E27FC236}">
+                <a16:creationId xmlns:a16="http://schemas.microsoft.com/office/drawing/2014/main" id="{F9188EF6-AE87-667F-510F-3BB620B6A410}"/>
+              </a:ext>
+            </a:extLst>
+          </p:cNvPr>
+          <p:cNvSpPr>
+            <a:spLocks noGrp="1"/>
+          </p:cNvSpPr>
+          <p:nvPr>
+            <p:ph type="sldNum" sz="quarter" idx="5"/>
+          </p:nvPr>
+        </p:nvSpPr>
+        <p:spPr/>
+        <p:txBody>
+          <a:bodyPr/>
+          <a:lstStyle/>
+          <a:p>
+            <a:pPr>
+              <a:defRPr/>
+            </a:pPr>
+            <a:fld id="{6E074355-CE0D-4C68-A6CB-C364ED71B33B}" type="slidenum">
+              <a:rPr lang="en-US" smtClean="0"/>
+              <a:pPr>
+                <a:defRPr/>
+              </a:pPr>
+              <a:t>9</a:t>
+            </a:fld>
+            <a:endParaRPr lang="en-US"/>
+          </a:p>
+        </p:txBody>
+      </p:sp>
+    </p:spTree>
+    <p:extLst>
+      <p:ext uri="{BB962C8B-B14F-4D97-AF65-F5344CB8AC3E}">
+        <p14:creationId xmlns:p14="http://schemas.microsoft.com/office/powerpoint/2010/main" val="2863990025"/>
+      </p:ext>
+    </p:extLst>
+  </p:cSld>
+  <p:clrMapOvr>
+    <a:masterClrMapping/>
+  </p:clrMapOvr>
+</p:notes>
+</file>
+
+<file path=ppt/notesSlides/notesSlide9.xml><?xml version="1.0" encoding="utf-8"?>
+<p:notes xmlns:a="http://schemas.openxmlformats.org/drawingml/2006/main" xmlns:r="http://schemas.openxmlformats.org/officeDocument/2006/relationships" xmlns:p="http://schemas.openxmlformats.org/presentationml/2006/main">
+  <p:cSld>
+    <p:spTree>
+      <p:nvGrpSpPr>
+        <p:cNvPr id="1" name="">
+          <a:extLst>
+            <a:ext uri="{FF2B5EF4-FFF2-40B4-BE49-F238E27FC236}">
+              <a16:creationId xmlns:a16="http://schemas.microsoft.com/office/drawing/2014/main" id="{E0985820-AC4F-29FD-1723-3B6D3864FF7D}"/>
+            </a:ext>
+          </a:extLst>
+        </p:cNvPr>
+        <p:cNvGrpSpPr/>
+        <p:nvPr/>
+      </p:nvGrpSpPr>
+      <p:grpSpPr>
+        <a:xfrm>
+          <a:off x="0" y="0"/>
+          <a:ext cx="0" cy="0"/>
+          <a:chOff x="0" y="0"/>
+          <a:chExt cx="0" cy="0"/>
+        </a:xfrm>
+      </p:grpSpPr>
+      <p:sp>
+        <p:nvSpPr>
+          <p:cNvPr id="2" name="Slide Image Placeholder 1">
+            <a:extLst>
+              <a:ext uri="{FF2B5EF4-FFF2-40B4-BE49-F238E27FC236}">
+                <a16:creationId xmlns:a16="http://schemas.microsoft.com/office/drawing/2014/main" id="{27DFD3AD-D905-0600-D0FF-ADDA71516243}"/>
+              </a:ext>
+            </a:extLst>
+          </p:cNvPr>
+          <p:cNvSpPr>
+            <a:spLocks noGrp="1" noRot="1" noChangeAspect="1"/>
+          </p:cNvSpPr>
+          <p:nvPr>
+            <p:ph type="sldImg"/>
+          </p:nvPr>
+        </p:nvSpPr>
+        <p:spPr/>
+      </p:sp>
+      <p:sp>
+        <p:nvSpPr>
+          <p:cNvPr id="3" name="Notes Placeholder 2">
+            <a:extLst>
+              <a:ext uri="{FF2B5EF4-FFF2-40B4-BE49-F238E27FC236}">
+                <a16:creationId xmlns:a16="http://schemas.microsoft.com/office/drawing/2014/main" id="{047EC234-82E0-93EB-E390-71ED84B18441}"/>
+              </a:ext>
+            </a:extLst>
+          </p:cNvPr>
+          <p:cNvSpPr>
+            <a:spLocks noGrp="1"/>
+          </p:cNvSpPr>
+          <p:nvPr>
+            <p:ph type="body" idx="1"/>
+          </p:nvPr>
+        </p:nvSpPr>
+        <p:spPr/>
+        <p:txBody>
+          <a:bodyPr/>
+          <a:lstStyle/>
+          <a:p>
+            <a:endParaRPr lang="en-US" dirty="0"/>
+          </a:p>
+        </p:txBody>
+      </p:sp>
+      <p:sp>
+        <p:nvSpPr>
+          <p:cNvPr id="4" name="Slide Number Placeholder 3">
+            <a:extLst>
+              <a:ext uri="{FF2B5EF4-FFF2-40B4-BE49-F238E27FC236}">
+                <a16:creationId xmlns:a16="http://schemas.microsoft.com/office/drawing/2014/main" id="{F648FAA2-0A25-D769-EFA1-45AF44296D2D}"/>
+              </a:ext>
+            </a:extLst>
+          </p:cNvPr>
+          <p:cNvSpPr>
+            <a:spLocks noGrp="1"/>
+          </p:cNvSpPr>
+          <p:nvPr>
+            <p:ph type="sldNum" sz="quarter" idx="5"/>
+          </p:nvPr>
+        </p:nvSpPr>
+        <p:spPr/>
+        <p:txBody>
+          <a:bodyPr/>
+          <a:lstStyle/>
+          <a:p>
+            <a:pPr>
+              <a:defRPr/>
+            </a:pPr>
+            <a:fld id="{6E074355-CE0D-4C68-A6CB-C364ED71B33B}" type="slidenum">
+              <a:rPr lang="en-US" smtClean="0"/>
+              <a:pPr>
+                <a:defRPr/>
+              </a:pPr>
+              <a:t>10</a:t>
+            </a:fld>
+            <a:endParaRPr lang="en-US"/>
+          </a:p>
+        </p:txBody>
+      </p:sp>
+    </p:spTree>
+    <p:extLst>
+      <p:ext uri="{BB962C8B-B14F-4D97-AF65-F5344CB8AC3E}">
+        <p14:creationId xmlns:p14="http://schemas.microsoft.com/office/powerpoint/2010/main" val="1996060524"/>
       </p:ext>
     </p:extLst>
   </p:cSld>
@@ -6407,15 +7867,9 @@
   <p:cSld>
     <p:bg>
       <p:bgPr>
-        <a:blipFill dpi="0" rotWithShape="1">
-          <a:blip r:embed="rId3">
-            <a:lum/>
-          </a:blip>
-          <a:srcRect/>
-          <a:stretch>
-            <a:fillRect/>
-          </a:stretch>
-        </a:blipFill>
+        <a:solidFill>
+          <a:srgbClr val="BF5700"/>
+        </a:solidFill>
         <a:effectLst/>
       </p:bgPr>
     </p:bg>
@@ -6470,7 +7924,7 @@
       </p:cxnSp>
       <p:sp>
         <p:nvSpPr>
-          <p:cNvPr id="11" name="Text Placeholder 9"/>
+          <p:cNvPr id="12" name="Text Placeholder 9"/>
           <p:cNvSpPr txBox="1">
             <a:spLocks/>
           </p:cNvSpPr>
@@ -6478,15 +7932,15 @@
         </p:nvSpPr>
         <p:spPr>
           <a:xfrm>
-            <a:off x="548640" y="4114800"/>
-            <a:ext cx="7886700" cy="457201"/>
+            <a:off x="548640" y="457200"/>
+            <a:ext cx="7828444" cy="389296"/>
           </a:xfrm>
           <a:prstGeom prst="rect">
             <a:avLst/>
           </a:prstGeom>
         </p:spPr>
         <p:txBody>
-          <a:bodyPr vert="horz" lIns="91440" tIns="45720" rIns="91440" bIns="45720" rtlCol="0" anchor="b">
+          <a:bodyPr vert="horz" lIns="91440" tIns="45720" rIns="91440" bIns="45720" rtlCol="0" anchor="ctr">
             <a:noAutofit/>
           </a:bodyPr>
           <a:lstStyle>
@@ -6655,243 +8109,15 @@
           </a:lstStyle>
           <a:p>
             <a:pPr fontAlgn="auto">
-              <a:lnSpc>
-                <a:spcPct val="50000"/>
-              </a:lnSpc>
               <a:spcAft>
                 <a:spcPts val="0"/>
               </a:spcAft>
             </a:pPr>
             <a:r>
-              <a:rPr lang="en-US" sz="1050" b="0" i="0" cap="all" baseline="0" dirty="0">
+              <a:rPr lang="en-US" sz="1200" b="0" i="0" cap="all" baseline="0" dirty="0">
                 <a:latin typeface="Arial Black" charset="0"/>
               </a:rPr>
-              <a:t>Presenter or speaker name</a:t>
-            </a:r>
-          </a:p>
-          <a:p>
-            <a:pPr fontAlgn="auto">
-              <a:lnSpc>
-                <a:spcPct val="30000"/>
-              </a:lnSpc>
-              <a:spcAft>
-                <a:spcPts val="0"/>
-              </a:spcAft>
-            </a:pPr>
-            <a:r>
-              <a:rPr lang="en-US" sz="1050" dirty="0"/>
-              <a:t>Position/Role,</a:t>
-            </a:r>
-            <a:r>
-              <a:rPr lang="en-US" sz="1050" baseline="0" dirty="0"/>
-              <a:t> The University of Texas at Austin</a:t>
-            </a:r>
-            <a:endParaRPr lang="en-US" sz="1050" dirty="0"/>
-          </a:p>
-        </p:txBody>
-      </p:sp>
-      <p:sp>
-        <p:nvSpPr>
-          <p:cNvPr id="12" name="Text Placeholder 9"/>
-          <p:cNvSpPr txBox="1">
-            <a:spLocks/>
-          </p:cNvSpPr>
-          <p:nvPr/>
-        </p:nvSpPr>
-        <p:spPr>
-          <a:xfrm>
-            <a:off x="548640" y="457200"/>
-            <a:ext cx="7828444" cy="389296"/>
-          </a:xfrm>
-          <a:prstGeom prst="rect">
-            <a:avLst/>
-          </a:prstGeom>
-        </p:spPr>
-        <p:txBody>
-          <a:bodyPr vert="horz" lIns="91440" tIns="45720" rIns="91440" bIns="45720" rtlCol="0" anchor="ctr">
-            <a:noAutofit/>
-          </a:bodyPr>
-          <a:lstStyle>
-            <a:lvl1pPr marL="0" indent="0" algn="l" defTabSz="914400" rtl="0" eaLnBrk="1" latinLnBrk="0" hangingPunct="1">
-              <a:lnSpc>
-                <a:spcPct val="90000"/>
-              </a:lnSpc>
-              <a:spcBef>
-                <a:spcPts val="1000"/>
-              </a:spcBef>
-              <a:buFont typeface="Arial"/>
-              <a:buNone/>
-              <a:defRPr sz="1600" b="0" i="0" kern="1200" baseline="0">
-                <a:solidFill>
-                  <a:schemeClr val="bg1"/>
-                </a:solidFill>
-                <a:latin typeface="Arial" charset="0"/>
-                <a:ea typeface="Arial" charset="0"/>
-                <a:cs typeface="Arial" charset="0"/>
-              </a:defRPr>
-            </a:lvl1pPr>
-            <a:lvl2pPr marL="685800" indent="-228600" algn="l" defTabSz="914400" rtl="0" eaLnBrk="1" latinLnBrk="0" hangingPunct="1">
-              <a:lnSpc>
-                <a:spcPct val="90000"/>
-              </a:lnSpc>
-              <a:spcBef>
-                <a:spcPts val="500"/>
-              </a:spcBef>
-              <a:buFont typeface="Arial"/>
-              <a:buChar char="•"/>
-              <a:defRPr sz="2400" b="0" i="0" kern="1200">
-                <a:solidFill>
-                  <a:schemeClr val="bg1"/>
-                </a:solidFill>
-                <a:latin typeface="Arial" charset="0"/>
-                <a:ea typeface="Arial" charset="0"/>
-                <a:cs typeface="Arial" charset="0"/>
-              </a:defRPr>
-            </a:lvl2pPr>
-            <a:lvl3pPr marL="1143000" indent="-228600" algn="l" defTabSz="914400" rtl="0" eaLnBrk="1" latinLnBrk="0" hangingPunct="1">
-              <a:lnSpc>
-                <a:spcPct val="90000"/>
-              </a:lnSpc>
-              <a:spcBef>
-                <a:spcPts val="500"/>
-              </a:spcBef>
-              <a:buFont typeface="Arial"/>
-              <a:buChar char="•"/>
-              <a:defRPr sz="2000" b="0" i="0" kern="1200">
-                <a:solidFill>
-                  <a:schemeClr val="bg1"/>
-                </a:solidFill>
-                <a:latin typeface="Arial" charset="0"/>
-                <a:ea typeface="Arial" charset="0"/>
-                <a:cs typeface="Arial" charset="0"/>
-              </a:defRPr>
-            </a:lvl3pPr>
-            <a:lvl4pPr marL="1600200" indent="-228600" algn="l" defTabSz="914400" rtl="0" eaLnBrk="1" latinLnBrk="0" hangingPunct="1">
-              <a:lnSpc>
-                <a:spcPct val="90000"/>
-              </a:lnSpc>
-              <a:spcBef>
-                <a:spcPts val="500"/>
-              </a:spcBef>
-              <a:buFont typeface="Arial"/>
-              <a:buChar char="•"/>
-              <a:defRPr sz="1800" b="0" i="0" kern="1200">
-                <a:solidFill>
-                  <a:schemeClr val="bg1"/>
-                </a:solidFill>
-                <a:latin typeface="Arial" charset="0"/>
-                <a:ea typeface="Arial" charset="0"/>
-                <a:cs typeface="Arial" charset="0"/>
-              </a:defRPr>
-            </a:lvl4pPr>
-            <a:lvl5pPr marL="2057400" indent="-228600" algn="l" defTabSz="914400" rtl="0" eaLnBrk="1" latinLnBrk="0" hangingPunct="1">
-              <a:lnSpc>
-                <a:spcPct val="90000"/>
-              </a:lnSpc>
-              <a:spcBef>
-                <a:spcPts val="500"/>
-              </a:spcBef>
-              <a:buFont typeface="Arial"/>
-              <a:buChar char="•"/>
-              <a:defRPr sz="1800" b="0" i="0" kern="1200">
-                <a:solidFill>
-                  <a:schemeClr val="bg1"/>
-                </a:solidFill>
-                <a:latin typeface="Arial" charset="0"/>
-                <a:ea typeface="Arial" charset="0"/>
-                <a:cs typeface="Arial" charset="0"/>
-              </a:defRPr>
-            </a:lvl5pPr>
-            <a:lvl6pPr marL="2514600" indent="-228600" algn="l" defTabSz="914400" rtl="0" eaLnBrk="1" latinLnBrk="0" hangingPunct="1">
-              <a:lnSpc>
-                <a:spcPct val="90000"/>
-              </a:lnSpc>
-              <a:spcBef>
-                <a:spcPts val="500"/>
-              </a:spcBef>
-              <a:buFont typeface="Arial"/>
-              <a:buChar char="•"/>
-              <a:defRPr sz="1800" kern="1200">
-                <a:solidFill>
-                  <a:schemeClr val="tx1"/>
-                </a:solidFill>
-                <a:latin typeface="+mn-lt"/>
-                <a:ea typeface="+mn-ea"/>
-                <a:cs typeface="+mn-cs"/>
-              </a:defRPr>
-            </a:lvl6pPr>
-            <a:lvl7pPr marL="2971800" indent="-228600" algn="l" defTabSz="914400" rtl="0" eaLnBrk="1" latinLnBrk="0" hangingPunct="1">
-              <a:lnSpc>
-                <a:spcPct val="90000"/>
-              </a:lnSpc>
-              <a:spcBef>
-                <a:spcPts val="500"/>
-              </a:spcBef>
-              <a:buFont typeface="Arial"/>
-              <a:buChar char="•"/>
-              <a:defRPr sz="1800" kern="1200">
-                <a:solidFill>
-                  <a:schemeClr val="tx1"/>
-                </a:solidFill>
-                <a:latin typeface="+mn-lt"/>
-                <a:ea typeface="+mn-ea"/>
-                <a:cs typeface="+mn-cs"/>
-              </a:defRPr>
-            </a:lvl7pPr>
-            <a:lvl8pPr marL="3429000" indent="-228600" algn="l" defTabSz="914400" rtl="0" eaLnBrk="1" latinLnBrk="0" hangingPunct="1">
-              <a:lnSpc>
-                <a:spcPct val="90000"/>
-              </a:lnSpc>
-              <a:spcBef>
-                <a:spcPts val="500"/>
-              </a:spcBef>
-              <a:buFont typeface="Arial"/>
-              <a:buChar char="•"/>
-              <a:defRPr sz="1800" kern="1200">
-                <a:solidFill>
-                  <a:schemeClr val="tx1"/>
-                </a:solidFill>
-                <a:latin typeface="+mn-lt"/>
-                <a:ea typeface="+mn-ea"/>
-                <a:cs typeface="+mn-cs"/>
-              </a:defRPr>
-            </a:lvl8pPr>
-            <a:lvl9pPr marL="3886200" indent="-228600" algn="l" defTabSz="914400" rtl="0" eaLnBrk="1" latinLnBrk="0" hangingPunct="1">
-              <a:lnSpc>
-                <a:spcPct val="90000"/>
-              </a:lnSpc>
-              <a:spcBef>
-                <a:spcPts val="500"/>
-              </a:spcBef>
-              <a:buFont typeface="Arial"/>
-              <a:buChar char="•"/>
-              <a:defRPr sz="1800" kern="1200">
-                <a:solidFill>
-                  <a:schemeClr val="tx1"/>
-                </a:solidFill>
-                <a:latin typeface="+mn-lt"/>
-                <a:ea typeface="+mn-ea"/>
-                <a:cs typeface="+mn-cs"/>
-              </a:defRPr>
-            </a:lvl9pPr>
-          </a:lstStyle>
-          <a:p>
-            <a:pPr fontAlgn="auto">
-              <a:spcAft>
-                <a:spcPts val="0"/>
-              </a:spcAft>
-            </a:pPr>
-            <a:r>
-              <a:rPr lang="en-US" sz="1200" b="0" i="0" cap="all" baseline="0">
-                <a:latin typeface="Arial Black" charset="0"/>
-              </a:rPr>
-              <a:t>Month </a:t>
-            </a:r>
-            <a:r>
-              <a:rPr lang="en-US" sz="1200" cap="all">
-                <a:latin typeface="Arial Black" charset="0"/>
-              </a:rPr>
-              <a:t>20XX</a:t>
+              <a:t>FEBRUARY 2026</a:t>
             </a:r>
             <a:endParaRPr lang="en-US" sz="1200" b="0" dirty="0"/>
           </a:p>
@@ -6908,7 +8134,7 @@
         <p:spPr>
           <a:xfrm>
             <a:off x="502920" y="1200150"/>
-            <a:ext cx="7886700" cy="1752600"/>
+            <a:ext cx="8107680" cy="1752600"/>
           </a:xfrm>
           <a:prstGeom prst="rect">
             <a:avLst/>
@@ -6944,22 +8170,8 @@
               </a:spcAft>
             </a:pPr>
             <a:r>
-              <a:rPr lang="en-US" dirty="0"/>
-              <a:t>Insert your</a:t>
-            </a:r>
-            <a:br>
-              <a:rPr lang="en-US" dirty="0"/>
-            </a:br>
-            <a:r>
-              <a:rPr lang="en-US" dirty="0"/>
-              <a:t>headline here</a:t>
-            </a:r>
-            <a:br>
-              <a:rPr lang="en-US" dirty="0"/>
-            </a:br>
-            <a:r>
-              <a:rPr lang="en-US" dirty="0"/>
-              <a:t>up to 3 lines</a:t>
+              <a:rPr lang="en-US" sz="4000" dirty="0"/>
+              <a:t>Midterm Review</a:t>
             </a:r>
           </a:p>
         </p:txBody>
@@ -7157,2420 +8369,7 @@
             </a:pPr>
             <a:r>
               <a:rPr lang="en-US" dirty="0"/>
-              <a:t>Insert your subtitle or any additional description text here up to</a:t>
-            </a:r>
-            <a:br>
-              <a:rPr lang="en-US" dirty="0"/>
-            </a:br>
-            <a:r>
-              <a:rPr lang="en-US" dirty="0"/>
-              <a:t>two lines of text or you can delete this text box</a:t>
-            </a:r>
-          </a:p>
-        </p:txBody>
-      </p:sp>
-      <p:pic>
-        <p:nvPicPr>
-          <p:cNvPr id="16" name="Picture 15"/>
-          <p:cNvPicPr>
-            <a:picLocks noChangeAspect="1"/>
-          </p:cNvPicPr>
-          <p:nvPr/>
-        </p:nvPicPr>
-        <p:blipFill>
-          <a:blip r:embed="rId4" cstate="print">
-            <a:extLst>
-              <a:ext uri="{28A0092B-C50C-407E-A947-70E740481C1C}">
-                <a14:useLocalDpi xmlns:a14="http://schemas.microsoft.com/office/drawing/2010/main" val="0"/>
-              </a:ext>
-            </a:extLst>
-          </a:blip>
-          <a:stretch>
-            <a:fillRect/>
-          </a:stretch>
-        </p:blipFill>
-        <p:spPr>
-          <a:xfrm>
-            <a:off x="6978699" y="320040"/>
-            <a:ext cx="1877397" cy="914400"/>
-          </a:xfrm>
-          <a:prstGeom prst="rect">
-            <a:avLst/>
-          </a:prstGeom>
-        </p:spPr>
-      </p:pic>
-    </p:spTree>
-    <p:extLst>
-      <p:ext uri="{BB962C8B-B14F-4D97-AF65-F5344CB8AC3E}">
-        <p14:creationId xmlns:p14="http://schemas.microsoft.com/office/powerpoint/2010/main" val="247584020"/>
-      </p:ext>
-    </p:extLst>
-  </p:cSld>
-  <p:clrMapOvr>
-    <a:masterClrMapping/>
-  </p:clrMapOvr>
-</p:sld>
-</file>
-
-<file path=ppt/slides/slide2.xml><?xml version="1.0" encoding="utf-8"?>
-<p:sld xmlns:a="http://schemas.openxmlformats.org/drawingml/2006/main" xmlns:r="http://schemas.openxmlformats.org/officeDocument/2006/relationships" xmlns:p="http://schemas.openxmlformats.org/presentationml/2006/main">
-  <p:cSld>
-    <p:bg>
-      <p:bgPr>
-        <a:blipFill dpi="0" rotWithShape="1">
-          <a:blip r:embed="rId3">
-            <a:lum/>
-          </a:blip>
-          <a:srcRect/>
-          <a:stretch>
-            <a:fillRect/>
-          </a:stretch>
-        </a:blipFill>
-        <a:effectLst/>
-      </p:bgPr>
-    </p:bg>
-    <p:spTree>
-      <p:nvGrpSpPr>
-        <p:cNvPr id="1" name=""/>
-        <p:cNvGrpSpPr/>
-        <p:nvPr/>
-      </p:nvGrpSpPr>
-      <p:grpSpPr>
-        <a:xfrm>
-          <a:off x="0" y="0"/>
-          <a:ext cx="0" cy="0"/>
-          <a:chOff x="0" y="0"/>
-          <a:chExt cx="0" cy="0"/>
-        </a:xfrm>
-      </p:grpSpPr>
-      <p:cxnSp>
-        <p:nvCxnSpPr>
-          <p:cNvPr id="10" name="Straight Connector 9"/>
-          <p:cNvCxnSpPr/>
-          <p:nvPr/>
-        </p:nvCxnSpPr>
-        <p:spPr>
-          <a:xfrm>
-            <a:off x="628650" y="3105150"/>
-            <a:ext cx="5619750" cy="0"/>
-          </a:xfrm>
-          <a:prstGeom prst="line">
-            <a:avLst/>
-          </a:prstGeom>
-          <a:ln w="19050">
-            <a:solidFill>
-              <a:schemeClr val="bg1"/>
-            </a:solidFill>
-          </a:ln>
-        </p:spPr>
-        <p:style>
-          <a:lnRef idx="1">
-            <a:schemeClr val="accent1"/>
-          </a:lnRef>
-          <a:fillRef idx="0">
-            <a:schemeClr val="accent1"/>
-          </a:fillRef>
-          <a:effectRef idx="0">
-            <a:schemeClr val="accent1"/>
-          </a:effectRef>
-          <a:fontRef idx="minor">
-            <a:schemeClr val="tx1"/>
-          </a:fontRef>
-        </p:style>
-      </p:cxnSp>
-      <p:sp>
-        <p:nvSpPr>
-          <p:cNvPr id="11" name="Text Placeholder 9"/>
-          <p:cNvSpPr txBox="1">
-            <a:spLocks/>
-          </p:cNvSpPr>
-          <p:nvPr/>
-        </p:nvSpPr>
-        <p:spPr>
-          <a:xfrm>
-            <a:off x="548640" y="4114800"/>
-            <a:ext cx="7886700" cy="457201"/>
-          </a:xfrm>
-          <a:prstGeom prst="rect">
-            <a:avLst/>
-          </a:prstGeom>
-        </p:spPr>
-        <p:txBody>
-          <a:bodyPr vert="horz" lIns="91440" tIns="45720" rIns="91440" bIns="45720" rtlCol="0" anchor="b">
-            <a:noAutofit/>
-          </a:bodyPr>
-          <a:lstStyle>
-            <a:lvl1pPr marL="0" indent="0" algn="l" defTabSz="914400" rtl="0" eaLnBrk="1" latinLnBrk="0" hangingPunct="1">
-              <a:lnSpc>
-                <a:spcPct val="90000"/>
-              </a:lnSpc>
-              <a:spcBef>
-                <a:spcPts val="1000"/>
-              </a:spcBef>
-              <a:buFont typeface="Arial"/>
-              <a:buNone/>
-              <a:defRPr sz="1600" b="0" i="0" kern="1200" baseline="0">
-                <a:solidFill>
-                  <a:schemeClr val="bg1"/>
-                </a:solidFill>
-                <a:latin typeface="Arial" charset="0"/>
-                <a:ea typeface="Arial" charset="0"/>
-                <a:cs typeface="Arial" charset="0"/>
-              </a:defRPr>
-            </a:lvl1pPr>
-            <a:lvl2pPr marL="685800" indent="-228600" algn="l" defTabSz="914400" rtl="0" eaLnBrk="1" latinLnBrk="0" hangingPunct="1">
-              <a:lnSpc>
-                <a:spcPct val="90000"/>
-              </a:lnSpc>
-              <a:spcBef>
-                <a:spcPts val="500"/>
-              </a:spcBef>
-              <a:buFont typeface="Arial"/>
-              <a:buChar char="•"/>
-              <a:defRPr sz="2400" b="0" i="0" kern="1200">
-                <a:solidFill>
-                  <a:schemeClr val="bg1"/>
-                </a:solidFill>
-                <a:latin typeface="Arial" charset="0"/>
-                <a:ea typeface="Arial" charset="0"/>
-                <a:cs typeface="Arial" charset="0"/>
-              </a:defRPr>
-            </a:lvl2pPr>
-            <a:lvl3pPr marL="1143000" indent="-228600" algn="l" defTabSz="914400" rtl="0" eaLnBrk="1" latinLnBrk="0" hangingPunct="1">
-              <a:lnSpc>
-                <a:spcPct val="90000"/>
-              </a:lnSpc>
-              <a:spcBef>
-                <a:spcPts val="500"/>
-              </a:spcBef>
-              <a:buFont typeface="Arial"/>
-              <a:buChar char="•"/>
-              <a:defRPr sz="2000" b="0" i="0" kern="1200">
-                <a:solidFill>
-                  <a:schemeClr val="bg1"/>
-                </a:solidFill>
-                <a:latin typeface="Arial" charset="0"/>
-                <a:ea typeface="Arial" charset="0"/>
-                <a:cs typeface="Arial" charset="0"/>
-              </a:defRPr>
-            </a:lvl3pPr>
-            <a:lvl4pPr marL="1600200" indent="-228600" algn="l" defTabSz="914400" rtl="0" eaLnBrk="1" latinLnBrk="0" hangingPunct="1">
-              <a:lnSpc>
-                <a:spcPct val="90000"/>
-              </a:lnSpc>
-              <a:spcBef>
-                <a:spcPts val="500"/>
-              </a:spcBef>
-              <a:buFont typeface="Arial"/>
-              <a:buChar char="•"/>
-              <a:defRPr sz="1800" b="0" i="0" kern="1200">
-                <a:solidFill>
-                  <a:schemeClr val="bg1"/>
-                </a:solidFill>
-                <a:latin typeface="Arial" charset="0"/>
-                <a:ea typeface="Arial" charset="0"/>
-                <a:cs typeface="Arial" charset="0"/>
-              </a:defRPr>
-            </a:lvl4pPr>
-            <a:lvl5pPr marL="2057400" indent="-228600" algn="l" defTabSz="914400" rtl="0" eaLnBrk="1" latinLnBrk="0" hangingPunct="1">
-              <a:lnSpc>
-                <a:spcPct val="90000"/>
-              </a:lnSpc>
-              <a:spcBef>
-                <a:spcPts val="500"/>
-              </a:spcBef>
-              <a:buFont typeface="Arial"/>
-              <a:buChar char="•"/>
-              <a:defRPr sz="1800" b="0" i="0" kern="1200">
-                <a:solidFill>
-                  <a:schemeClr val="bg1"/>
-                </a:solidFill>
-                <a:latin typeface="Arial" charset="0"/>
-                <a:ea typeface="Arial" charset="0"/>
-                <a:cs typeface="Arial" charset="0"/>
-              </a:defRPr>
-            </a:lvl5pPr>
-            <a:lvl6pPr marL="2514600" indent="-228600" algn="l" defTabSz="914400" rtl="0" eaLnBrk="1" latinLnBrk="0" hangingPunct="1">
-              <a:lnSpc>
-                <a:spcPct val="90000"/>
-              </a:lnSpc>
-              <a:spcBef>
-                <a:spcPts val="500"/>
-              </a:spcBef>
-              <a:buFont typeface="Arial"/>
-              <a:buChar char="•"/>
-              <a:defRPr sz="1800" kern="1200">
-                <a:solidFill>
-                  <a:schemeClr val="tx1"/>
-                </a:solidFill>
-                <a:latin typeface="+mn-lt"/>
-                <a:ea typeface="+mn-ea"/>
-                <a:cs typeface="+mn-cs"/>
-              </a:defRPr>
-            </a:lvl6pPr>
-            <a:lvl7pPr marL="2971800" indent="-228600" algn="l" defTabSz="914400" rtl="0" eaLnBrk="1" latinLnBrk="0" hangingPunct="1">
-              <a:lnSpc>
-                <a:spcPct val="90000"/>
-              </a:lnSpc>
-              <a:spcBef>
-                <a:spcPts val="500"/>
-              </a:spcBef>
-              <a:buFont typeface="Arial"/>
-              <a:buChar char="•"/>
-              <a:defRPr sz="1800" kern="1200">
-                <a:solidFill>
-                  <a:schemeClr val="tx1"/>
-                </a:solidFill>
-                <a:latin typeface="+mn-lt"/>
-                <a:ea typeface="+mn-ea"/>
-                <a:cs typeface="+mn-cs"/>
-              </a:defRPr>
-            </a:lvl7pPr>
-            <a:lvl8pPr marL="3429000" indent="-228600" algn="l" defTabSz="914400" rtl="0" eaLnBrk="1" latinLnBrk="0" hangingPunct="1">
-              <a:lnSpc>
-                <a:spcPct val="90000"/>
-              </a:lnSpc>
-              <a:spcBef>
-                <a:spcPts val="500"/>
-              </a:spcBef>
-              <a:buFont typeface="Arial"/>
-              <a:buChar char="•"/>
-              <a:defRPr sz="1800" kern="1200">
-                <a:solidFill>
-                  <a:schemeClr val="tx1"/>
-                </a:solidFill>
-                <a:latin typeface="+mn-lt"/>
-                <a:ea typeface="+mn-ea"/>
-                <a:cs typeface="+mn-cs"/>
-              </a:defRPr>
-            </a:lvl8pPr>
-            <a:lvl9pPr marL="3886200" indent="-228600" algn="l" defTabSz="914400" rtl="0" eaLnBrk="1" latinLnBrk="0" hangingPunct="1">
-              <a:lnSpc>
-                <a:spcPct val="90000"/>
-              </a:lnSpc>
-              <a:spcBef>
-                <a:spcPts val="500"/>
-              </a:spcBef>
-              <a:buFont typeface="Arial"/>
-              <a:buChar char="•"/>
-              <a:defRPr sz="1800" kern="1200">
-                <a:solidFill>
-                  <a:schemeClr val="tx1"/>
-                </a:solidFill>
-                <a:latin typeface="+mn-lt"/>
-                <a:ea typeface="+mn-ea"/>
-                <a:cs typeface="+mn-cs"/>
-              </a:defRPr>
-            </a:lvl9pPr>
-          </a:lstStyle>
-          <a:p>
-            <a:pPr fontAlgn="auto">
-              <a:lnSpc>
-                <a:spcPct val="50000"/>
-              </a:lnSpc>
-              <a:spcAft>
-                <a:spcPts val="0"/>
-              </a:spcAft>
-            </a:pPr>
-            <a:r>
-              <a:rPr lang="en-US" sz="1050" b="0" i="0" cap="all" baseline="0" dirty="0">
-                <a:latin typeface="Arial Black" charset="0"/>
-              </a:rPr>
-              <a:t>Presenter or speaker name</a:t>
-            </a:r>
-          </a:p>
-          <a:p>
-            <a:pPr fontAlgn="auto">
-              <a:lnSpc>
-                <a:spcPct val="30000"/>
-              </a:lnSpc>
-              <a:spcAft>
-                <a:spcPts val="0"/>
-              </a:spcAft>
-            </a:pPr>
-            <a:r>
-              <a:rPr lang="en-US" sz="1050" dirty="0"/>
-              <a:t>Position/Role,</a:t>
-            </a:r>
-            <a:r>
-              <a:rPr lang="en-US" sz="1050" baseline="0" dirty="0"/>
-              <a:t> The University of Texas at Austin</a:t>
-            </a:r>
-            <a:endParaRPr lang="en-US" sz="1050" dirty="0"/>
-          </a:p>
-        </p:txBody>
-      </p:sp>
-      <p:sp>
-        <p:nvSpPr>
-          <p:cNvPr id="12" name="Text Placeholder 9"/>
-          <p:cNvSpPr txBox="1">
-            <a:spLocks/>
-          </p:cNvSpPr>
-          <p:nvPr/>
-        </p:nvSpPr>
-        <p:spPr>
-          <a:xfrm>
-            <a:off x="548640" y="457200"/>
-            <a:ext cx="7828444" cy="389296"/>
-          </a:xfrm>
-          <a:prstGeom prst="rect">
-            <a:avLst/>
-          </a:prstGeom>
-        </p:spPr>
-        <p:txBody>
-          <a:bodyPr vert="horz" lIns="91440" tIns="45720" rIns="91440" bIns="45720" rtlCol="0" anchor="ctr">
-            <a:noAutofit/>
-          </a:bodyPr>
-          <a:lstStyle>
-            <a:lvl1pPr marL="0" indent="0" algn="l" defTabSz="914400" rtl="0" eaLnBrk="1" latinLnBrk="0" hangingPunct="1">
-              <a:lnSpc>
-                <a:spcPct val="90000"/>
-              </a:lnSpc>
-              <a:spcBef>
-                <a:spcPts val="1000"/>
-              </a:spcBef>
-              <a:buFont typeface="Arial"/>
-              <a:buNone/>
-              <a:defRPr sz="1600" b="0" i="0" kern="1200" baseline="0">
-                <a:solidFill>
-                  <a:schemeClr val="bg1"/>
-                </a:solidFill>
-                <a:latin typeface="Arial" charset="0"/>
-                <a:ea typeface="Arial" charset="0"/>
-                <a:cs typeface="Arial" charset="0"/>
-              </a:defRPr>
-            </a:lvl1pPr>
-            <a:lvl2pPr marL="685800" indent="-228600" algn="l" defTabSz="914400" rtl="0" eaLnBrk="1" latinLnBrk="0" hangingPunct="1">
-              <a:lnSpc>
-                <a:spcPct val="90000"/>
-              </a:lnSpc>
-              <a:spcBef>
-                <a:spcPts val="500"/>
-              </a:spcBef>
-              <a:buFont typeface="Arial"/>
-              <a:buChar char="•"/>
-              <a:defRPr sz="2400" b="0" i="0" kern="1200">
-                <a:solidFill>
-                  <a:schemeClr val="bg1"/>
-                </a:solidFill>
-                <a:latin typeface="Arial" charset="0"/>
-                <a:ea typeface="Arial" charset="0"/>
-                <a:cs typeface="Arial" charset="0"/>
-              </a:defRPr>
-            </a:lvl2pPr>
-            <a:lvl3pPr marL="1143000" indent="-228600" algn="l" defTabSz="914400" rtl="0" eaLnBrk="1" latinLnBrk="0" hangingPunct="1">
-              <a:lnSpc>
-                <a:spcPct val="90000"/>
-              </a:lnSpc>
-              <a:spcBef>
-                <a:spcPts val="500"/>
-              </a:spcBef>
-              <a:buFont typeface="Arial"/>
-              <a:buChar char="•"/>
-              <a:defRPr sz="2000" b="0" i="0" kern="1200">
-                <a:solidFill>
-                  <a:schemeClr val="bg1"/>
-                </a:solidFill>
-                <a:latin typeface="Arial" charset="0"/>
-                <a:ea typeface="Arial" charset="0"/>
-                <a:cs typeface="Arial" charset="0"/>
-              </a:defRPr>
-            </a:lvl3pPr>
-            <a:lvl4pPr marL="1600200" indent="-228600" algn="l" defTabSz="914400" rtl="0" eaLnBrk="1" latinLnBrk="0" hangingPunct="1">
-              <a:lnSpc>
-                <a:spcPct val="90000"/>
-              </a:lnSpc>
-              <a:spcBef>
-                <a:spcPts val="500"/>
-              </a:spcBef>
-              <a:buFont typeface="Arial"/>
-              <a:buChar char="•"/>
-              <a:defRPr sz="1800" b="0" i="0" kern="1200">
-                <a:solidFill>
-                  <a:schemeClr val="bg1"/>
-                </a:solidFill>
-                <a:latin typeface="Arial" charset="0"/>
-                <a:ea typeface="Arial" charset="0"/>
-                <a:cs typeface="Arial" charset="0"/>
-              </a:defRPr>
-            </a:lvl4pPr>
-            <a:lvl5pPr marL="2057400" indent="-228600" algn="l" defTabSz="914400" rtl="0" eaLnBrk="1" latinLnBrk="0" hangingPunct="1">
-              <a:lnSpc>
-                <a:spcPct val="90000"/>
-              </a:lnSpc>
-              <a:spcBef>
-                <a:spcPts val="500"/>
-              </a:spcBef>
-              <a:buFont typeface="Arial"/>
-              <a:buChar char="•"/>
-              <a:defRPr sz="1800" b="0" i="0" kern="1200">
-                <a:solidFill>
-                  <a:schemeClr val="bg1"/>
-                </a:solidFill>
-                <a:latin typeface="Arial" charset="0"/>
-                <a:ea typeface="Arial" charset="0"/>
-                <a:cs typeface="Arial" charset="0"/>
-              </a:defRPr>
-            </a:lvl5pPr>
-            <a:lvl6pPr marL="2514600" indent="-228600" algn="l" defTabSz="914400" rtl="0" eaLnBrk="1" latinLnBrk="0" hangingPunct="1">
-              <a:lnSpc>
-                <a:spcPct val="90000"/>
-              </a:lnSpc>
-              <a:spcBef>
-                <a:spcPts val="500"/>
-              </a:spcBef>
-              <a:buFont typeface="Arial"/>
-              <a:buChar char="•"/>
-              <a:defRPr sz="1800" kern="1200">
-                <a:solidFill>
-                  <a:schemeClr val="tx1"/>
-                </a:solidFill>
-                <a:latin typeface="+mn-lt"/>
-                <a:ea typeface="+mn-ea"/>
-                <a:cs typeface="+mn-cs"/>
-              </a:defRPr>
-            </a:lvl6pPr>
-            <a:lvl7pPr marL="2971800" indent="-228600" algn="l" defTabSz="914400" rtl="0" eaLnBrk="1" latinLnBrk="0" hangingPunct="1">
-              <a:lnSpc>
-                <a:spcPct val="90000"/>
-              </a:lnSpc>
-              <a:spcBef>
-                <a:spcPts val="500"/>
-              </a:spcBef>
-              <a:buFont typeface="Arial"/>
-              <a:buChar char="•"/>
-              <a:defRPr sz="1800" kern="1200">
-                <a:solidFill>
-                  <a:schemeClr val="tx1"/>
-                </a:solidFill>
-                <a:latin typeface="+mn-lt"/>
-                <a:ea typeface="+mn-ea"/>
-                <a:cs typeface="+mn-cs"/>
-              </a:defRPr>
-            </a:lvl7pPr>
-            <a:lvl8pPr marL="3429000" indent="-228600" algn="l" defTabSz="914400" rtl="0" eaLnBrk="1" latinLnBrk="0" hangingPunct="1">
-              <a:lnSpc>
-                <a:spcPct val="90000"/>
-              </a:lnSpc>
-              <a:spcBef>
-                <a:spcPts val="500"/>
-              </a:spcBef>
-              <a:buFont typeface="Arial"/>
-              <a:buChar char="•"/>
-              <a:defRPr sz="1800" kern="1200">
-                <a:solidFill>
-                  <a:schemeClr val="tx1"/>
-                </a:solidFill>
-                <a:latin typeface="+mn-lt"/>
-                <a:ea typeface="+mn-ea"/>
-                <a:cs typeface="+mn-cs"/>
-              </a:defRPr>
-            </a:lvl8pPr>
-            <a:lvl9pPr marL="3886200" indent="-228600" algn="l" defTabSz="914400" rtl="0" eaLnBrk="1" latinLnBrk="0" hangingPunct="1">
-              <a:lnSpc>
-                <a:spcPct val="90000"/>
-              </a:lnSpc>
-              <a:spcBef>
-                <a:spcPts val="500"/>
-              </a:spcBef>
-              <a:buFont typeface="Arial"/>
-              <a:buChar char="•"/>
-              <a:defRPr sz="1800" kern="1200">
-                <a:solidFill>
-                  <a:schemeClr val="tx1"/>
-                </a:solidFill>
-                <a:latin typeface="+mn-lt"/>
-                <a:ea typeface="+mn-ea"/>
-                <a:cs typeface="+mn-cs"/>
-              </a:defRPr>
-            </a:lvl9pPr>
-          </a:lstStyle>
-          <a:p>
-            <a:pPr fontAlgn="auto">
-              <a:spcAft>
-                <a:spcPts val="0"/>
-              </a:spcAft>
-            </a:pPr>
-            <a:r>
-              <a:rPr lang="en-US" sz="1200" b="0" i="0" cap="all" baseline="0" dirty="0">
-                <a:latin typeface="Arial Black" charset="0"/>
-              </a:rPr>
-              <a:t>Month 20xx</a:t>
-            </a:r>
-            <a:endParaRPr lang="en-US" sz="1200" b="0" dirty="0"/>
-          </a:p>
-        </p:txBody>
-      </p:sp>
-      <p:sp>
-        <p:nvSpPr>
-          <p:cNvPr id="13" name="Title Placeholder 7"/>
-          <p:cNvSpPr txBox="1">
-            <a:spLocks/>
-          </p:cNvSpPr>
-          <p:nvPr/>
-        </p:nvSpPr>
-        <p:spPr>
-          <a:xfrm>
-            <a:off x="502920" y="1200150"/>
-            <a:ext cx="7886700" cy="1752600"/>
-          </a:xfrm>
-          <a:prstGeom prst="rect">
-            <a:avLst/>
-          </a:prstGeom>
-        </p:spPr>
-        <p:txBody>
-          <a:bodyPr vert="horz" wrap="square" lIns="91440" tIns="45720" rIns="91440" bIns="45720" rtlCol="0" anchor="b">
-            <a:noAutofit/>
-          </a:bodyPr>
-          <a:lstStyle>
-            <a:lvl1pPr algn="l" defTabSz="914400" rtl="0" eaLnBrk="1" latinLnBrk="0" hangingPunct="1">
-              <a:lnSpc>
-                <a:spcPts val="4000"/>
-              </a:lnSpc>
-              <a:spcBef>
-                <a:spcPct val="0"/>
-              </a:spcBef>
-              <a:buNone/>
-              <a:defRPr sz="4800" b="1" i="0" kern="800" cap="all" normalizeH="0" baseline="0">
-                <a:solidFill>
-                  <a:schemeClr val="bg1"/>
-                </a:solidFill>
-                <a:latin typeface="Arial Black" charset="0"/>
-                <a:ea typeface="Arial Black" charset="0"/>
-                <a:cs typeface="Arial Black" charset="0"/>
-              </a:defRPr>
-            </a:lvl1pPr>
-          </a:lstStyle>
-          <a:p>
-            <a:pPr fontAlgn="auto">
-              <a:spcAft>
-                <a:spcPts val="0"/>
-              </a:spcAft>
-            </a:pPr>
-            <a:r>
-              <a:rPr lang="en-US" dirty="0"/>
-              <a:t>Insert your</a:t>
-            </a:r>
-            <a:br>
-              <a:rPr lang="en-US" dirty="0"/>
-            </a:br>
-            <a:r>
-              <a:rPr lang="en-US" dirty="0"/>
-              <a:t>headline here</a:t>
-            </a:r>
-            <a:br>
-              <a:rPr lang="en-US" dirty="0"/>
-            </a:br>
-            <a:r>
-              <a:rPr lang="en-US" dirty="0"/>
-              <a:t>up to 3 lines</a:t>
-            </a:r>
-          </a:p>
-        </p:txBody>
-      </p:sp>
-      <p:sp>
-        <p:nvSpPr>
-          <p:cNvPr id="15" name="Text Placeholder 9"/>
-          <p:cNvSpPr txBox="1">
-            <a:spLocks/>
-          </p:cNvSpPr>
-          <p:nvPr/>
-        </p:nvSpPr>
-        <p:spPr>
-          <a:xfrm>
-            <a:off x="548640" y="3333749"/>
-            <a:ext cx="7886700" cy="457201"/>
-          </a:xfrm>
-          <a:prstGeom prst="rect">
-            <a:avLst/>
-          </a:prstGeom>
-        </p:spPr>
-        <p:txBody>
-          <a:bodyPr vert="horz" lIns="91440" tIns="45720" rIns="91440" bIns="45720" rtlCol="0">
-            <a:noAutofit/>
-          </a:bodyPr>
-          <a:lstStyle>
-            <a:lvl1pPr marL="0" indent="0" algn="l" defTabSz="914400" rtl="0" eaLnBrk="1" latinLnBrk="0" hangingPunct="1">
-              <a:lnSpc>
-                <a:spcPct val="90000"/>
-              </a:lnSpc>
-              <a:spcBef>
-                <a:spcPts val="1000"/>
-              </a:spcBef>
-              <a:buFont typeface="Arial"/>
-              <a:buNone/>
-              <a:defRPr sz="1400" b="0" i="0" kern="1200" baseline="0">
-                <a:solidFill>
-                  <a:schemeClr val="bg1"/>
-                </a:solidFill>
-                <a:latin typeface="Arial" charset="0"/>
-                <a:ea typeface="Arial" charset="0"/>
-                <a:cs typeface="Arial" charset="0"/>
-              </a:defRPr>
-            </a:lvl1pPr>
-            <a:lvl2pPr marL="685800" indent="-228600" algn="l" defTabSz="914400" rtl="0" eaLnBrk="1" latinLnBrk="0" hangingPunct="1">
-              <a:lnSpc>
-                <a:spcPct val="90000"/>
-              </a:lnSpc>
-              <a:spcBef>
-                <a:spcPts val="500"/>
-              </a:spcBef>
-              <a:buFont typeface="Arial"/>
-              <a:buChar char="•"/>
-              <a:defRPr sz="2400" b="0" i="0" kern="1200">
-                <a:solidFill>
-                  <a:schemeClr val="bg1"/>
-                </a:solidFill>
-                <a:latin typeface="Arial" charset="0"/>
-                <a:ea typeface="Arial" charset="0"/>
-                <a:cs typeface="Arial" charset="0"/>
-              </a:defRPr>
-            </a:lvl2pPr>
-            <a:lvl3pPr marL="1143000" indent="-228600" algn="l" defTabSz="914400" rtl="0" eaLnBrk="1" latinLnBrk="0" hangingPunct="1">
-              <a:lnSpc>
-                <a:spcPct val="90000"/>
-              </a:lnSpc>
-              <a:spcBef>
-                <a:spcPts val="500"/>
-              </a:spcBef>
-              <a:buFont typeface="Arial"/>
-              <a:buChar char="•"/>
-              <a:defRPr sz="2000" b="0" i="0" kern="1200">
-                <a:solidFill>
-                  <a:schemeClr val="bg1"/>
-                </a:solidFill>
-                <a:latin typeface="Arial" charset="0"/>
-                <a:ea typeface="Arial" charset="0"/>
-                <a:cs typeface="Arial" charset="0"/>
-              </a:defRPr>
-            </a:lvl3pPr>
-            <a:lvl4pPr marL="1600200" indent="-228600" algn="l" defTabSz="914400" rtl="0" eaLnBrk="1" latinLnBrk="0" hangingPunct="1">
-              <a:lnSpc>
-                <a:spcPct val="90000"/>
-              </a:lnSpc>
-              <a:spcBef>
-                <a:spcPts val="500"/>
-              </a:spcBef>
-              <a:buFont typeface="Arial"/>
-              <a:buChar char="•"/>
-              <a:defRPr sz="1800" b="0" i="0" kern="1200">
-                <a:solidFill>
-                  <a:schemeClr val="bg1"/>
-                </a:solidFill>
-                <a:latin typeface="Arial" charset="0"/>
-                <a:ea typeface="Arial" charset="0"/>
-                <a:cs typeface="Arial" charset="0"/>
-              </a:defRPr>
-            </a:lvl4pPr>
-            <a:lvl5pPr marL="2057400" indent="-228600" algn="l" defTabSz="914400" rtl="0" eaLnBrk="1" latinLnBrk="0" hangingPunct="1">
-              <a:lnSpc>
-                <a:spcPct val="90000"/>
-              </a:lnSpc>
-              <a:spcBef>
-                <a:spcPts val="500"/>
-              </a:spcBef>
-              <a:buFont typeface="Arial"/>
-              <a:buChar char="•"/>
-              <a:defRPr sz="1800" b="0" i="0" kern="1200">
-                <a:solidFill>
-                  <a:schemeClr val="bg1"/>
-                </a:solidFill>
-                <a:latin typeface="Arial" charset="0"/>
-                <a:ea typeface="Arial" charset="0"/>
-                <a:cs typeface="Arial" charset="0"/>
-              </a:defRPr>
-            </a:lvl5pPr>
-            <a:lvl6pPr marL="2514600" indent="-228600" algn="l" defTabSz="914400" rtl="0" eaLnBrk="1" latinLnBrk="0" hangingPunct="1">
-              <a:lnSpc>
-                <a:spcPct val="90000"/>
-              </a:lnSpc>
-              <a:spcBef>
-                <a:spcPts val="500"/>
-              </a:spcBef>
-              <a:buFont typeface="Arial"/>
-              <a:buChar char="•"/>
-              <a:defRPr sz="1800" kern="1200">
-                <a:solidFill>
-                  <a:schemeClr val="tx1"/>
-                </a:solidFill>
-                <a:latin typeface="+mn-lt"/>
-                <a:ea typeface="+mn-ea"/>
-                <a:cs typeface="+mn-cs"/>
-              </a:defRPr>
-            </a:lvl6pPr>
-            <a:lvl7pPr marL="2971800" indent="-228600" algn="l" defTabSz="914400" rtl="0" eaLnBrk="1" latinLnBrk="0" hangingPunct="1">
-              <a:lnSpc>
-                <a:spcPct val="90000"/>
-              </a:lnSpc>
-              <a:spcBef>
-                <a:spcPts val="500"/>
-              </a:spcBef>
-              <a:buFont typeface="Arial"/>
-              <a:buChar char="•"/>
-              <a:defRPr sz="1800" kern="1200">
-                <a:solidFill>
-                  <a:schemeClr val="tx1"/>
-                </a:solidFill>
-                <a:latin typeface="+mn-lt"/>
-                <a:ea typeface="+mn-ea"/>
-                <a:cs typeface="+mn-cs"/>
-              </a:defRPr>
-            </a:lvl7pPr>
-            <a:lvl8pPr marL="3429000" indent="-228600" algn="l" defTabSz="914400" rtl="0" eaLnBrk="1" latinLnBrk="0" hangingPunct="1">
-              <a:lnSpc>
-                <a:spcPct val="90000"/>
-              </a:lnSpc>
-              <a:spcBef>
-                <a:spcPts val="500"/>
-              </a:spcBef>
-              <a:buFont typeface="Arial"/>
-              <a:buChar char="•"/>
-              <a:defRPr sz="1800" kern="1200">
-                <a:solidFill>
-                  <a:schemeClr val="tx1"/>
-                </a:solidFill>
-                <a:latin typeface="+mn-lt"/>
-                <a:ea typeface="+mn-ea"/>
-                <a:cs typeface="+mn-cs"/>
-              </a:defRPr>
-            </a:lvl8pPr>
-            <a:lvl9pPr marL="3886200" indent="-228600" algn="l" defTabSz="914400" rtl="0" eaLnBrk="1" latinLnBrk="0" hangingPunct="1">
-              <a:lnSpc>
-                <a:spcPct val="90000"/>
-              </a:lnSpc>
-              <a:spcBef>
-                <a:spcPts val="500"/>
-              </a:spcBef>
-              <a:buFont typeface="Arial"/>
-              <a:buChar char="•"/>
-              <a:defRPr sz="1800" kern="1200">
-                <a:solidFill>
-                  <a:schemeClr val="tx1"/>
-                </a:solidFill>
-                <a:latin typeface="+mn-lt"/>
-                <a:ea typeface="+mn-ea"/>
-                <a:cs typeface="+mn-cs"/>
-              </a:defRPr>
-            </a:lvl9pPr>
-          </a:lstStyle>
-          <a:p>
-            <a:pPr fontAlgn="auto">
-              <a:spcAft>
-                <a:spcPts val="0"/>
-              </a:spcAft>
-            </a:pPr>
-            <a:r>
-              <a:rPr lang="en-US" dirty="0"/>
-              <a:t>Insert your subtitle or any additional description text here up to</a:t>
-            </a:r>
-            <a:br>
-              <a:rPr lang="en-US" dirty="0"/>
-            </a:br>
-            <a:r>
-              <a:rPr lang="en-US" dirty="0"/>
-              <a:t>two lines of text or you can delete this text box</a:t>
-            </a:r>
-          </a:p>
-        </p:txBody>
-      </p:sp>
-      <p:pic>
-        <p:nvPicPr>
-          <p:cNvPr id="16" name="Picture 15"/>
-          <p:cNvPicPr>
-            <a:picLocks noChangeAspect="1"/>
-          </p:cNvPicPr>
-          <p:nvPr/>
-        </p:nvPicPr>
-        <p:blipFill>
-          <a:blip r:embed="rId4" cstate="print">
-            <a:extLst>
-              <a:ext uri="{28A0092B-C50C-407E-A947-70E740481C1C}">
-                <a14:useLocalDpi xmlns:a14="http://schemas.microsoft.com/office/drawing/2010/main" val="0"/>
-              </a:ext>
-            </a:extLst>
-          </a:blip>
-          <a:stretch>
-            <a:fillRect/>
-          </a:stretch>
-        </p:blipFill>
-        <p:spPr>
-          <a:xfrm>
-            <a:off x="6978699" y="320040"/>
-            <a:ext cx="1877397" cy="914400"/>
-          </a:xfrm>
-          <a:prstGeom prst="rect">
-            <a:avLst/>
-          </a:prstGeom>
-        </p:spPr>
-      </p:pic>
-    </p:spTree>
-    <p:extLst>
-      <p:ext uri="{BB962C8B-B14F-4D97-AF65-F5344CB8AC3E}">
-        <p14:creationId xmlns:p14="http://schemas.microsoft.com/office/powerpoint/2010/main" val="757240041"/>
-      </p:ext>
-    </p:extLst>
-  </p:cSld>
-  <p:clrMapOvr>
-    <a:masterClrMapping/>
-  </p:clrMapOvr>
-</p:sld>
-</file>
-
-<file path=ppt/slides/slide3.xml><?xml version="1.0" encoding="utf-8"?>
-<p:sld xmlns:a="http://schemas.openxmlformats.org/drawingml/2006/main" xmlns:r="http://schemas.openxmlformats.org/officeDocument/2006/relationships" xmlns:p="http://schemas.openxmlformats.org/presentationml/2006/main">
-  <p:cSld>
-    <p:bg>
-      <p:bgPr>
-        <a:blipFill dpi="0" rotWithShape="1">
-          <a:blip r:embed="rId3">
-            <a:lum/>
-          </a:blip>
-          <a:srcRect/>
-          <a:stretch>
-            <a:fillRect/>
-          </a:stretch>
-        </a:blipFill>
-        <a:effectLst/>
-      </p:bgPr>
-    </p:bg>
-    <p:spTree>
-      <p:nvGrpSpPr>
-        <p:cNvPr id="1" name=""/>
-        <p:cNvGrpSpPr/>
-        <p:nvPr/>
-      </p:nvGrpSpPr>
-      <p:grpSpPr>
-        <a:xfrm>
-          <a:off x="0" y="0"/>
-          <a:ext cx="0" cy="0"/>
-          <a:chOff x="0" y="0"/>
-          <a:chExt cx="0" cy="0"/>
-        </a:xfrm>
-      </p:grpSpPr>
-      <p:cxnSp>
-        <p:nvCxnSpPr>
-          <p:cNvPr id="10" name="Straight Connector 9"/>
-          <p:cNvCxnSpPr/>
-          <p:nvPr/>
-        </p:nvCxnSpPr>
-        <p:spPr>
-          <a:xfrm>
-            <a:off x="628650" y="3105150"/>
-            <a:ext cx="5619750" cy="0"/>
-          </a:xfrm>
-          <a:prstGeom prst="line">
-            <a:avLst/>
-          </a:prstGeom>
-          <a:ln w="19050">
-            <a:solidFill>
-              <a:schemeClr val="bg1"/>
-            </a:solidFill>
-          </a:ln>
-        </p:spPr>
-        <p:style>
-          <a:lnRef idx="1">
-            <a:schemeClr val="accent1"/>
-          </a:lnRef>
-          <a:fillRef idx="0">
-            <a:schemeClr val="accent1"/>
-          </a:fillRef>
-          <a:effectRef idx="0">
-            <a:schemeClr val="accent1"/>
-          </a:effectRef>
-          <a:fontRef idx="minor">
-            <a:schemeClr val="tx1"/>
-          </a:fontRef>
-        </p:style>
-      </p:cxnSp>
-      <p:sp>
-        <p:nvSpPr>
-          <p:cNvPr id="11" name="Text Placeholder 9"/>
-          <p:cNvSpPr txBox="1">
-            <a:spLocks/>
-          </p:cNvSpPr>
-          <p:nvPr/>
-        </p:nvSpPr>
-        <p:spPr>
-          <a:xfrm>
-            <a:off x="548640" y="4114800"/>
-            <a:ext cx="7886700" cy="457201"/>
-          </a:xfrm>
-          <a:prstGeom prst="rect">
-            <a:avLst/>
-          </a:prstGeom>
-        </p:spPr>
-        <p:txBody>
-          <a:bodyPr vert="horz" lIns="91440" tIns="45720" rIns="91440" bIns="45720" rtlCol="0" anchor="b">
-            <a:noAutofit/>
-          </a:bodyPr>
-          <a:lstStyle>
-            <a:lvl1pPr marL="0" indent="0" algn="l" defTabSz="914400" rtl="0" eaLnBrk="1" latinLnBrk="0" hangingPunct="1">
-              <a:lnSpc>
-                <a:spcPct val="90000"/>
-              </a:lnSpc>
-              <a:spcBef>
-                <a:spcPts val="1000"/>
-              </a:spcBef>
-              <a:buFont typeface="Arial"/>
-              <a:buNone/>
-              <a:defRPr sz="1600" b="0" i="0" kern="1200" baseline="0">
-                <a:solidFill>
-                  <a:schemeClr val="bg1"/>
-                </a:solidFill>
-                <a:latin typeface="Arial" charset="0"/>
-                <a:ea typeface="Arial" charset="0"/>
-                <a:cs typeface="Arial" charset="0"/>
-              </a:defRPr>
-            </a:lvl1pPr>
-            <a:lvl2pPr marL="685800" indent="-228600" algn="l" defTabSz="914400" rtl="0" eaLnBrk="1" latinLnBrk="0" hangingPunct="1">
-              <a:lnSpc>
-                <a:spcPct val="90000"/>
-              </a:lnSpc>
-              <a:spcBef>
-                <a:spcPts val="500"/>
-              </a:spcBef>
-              <a:buFont typeface="Arial"/>
-              <a:buChar char="•"/>
-              <a:defRPr sz="2400" b="0" i="0" kern="1200">
-                <a:solidFill>
-                  <a:schemeClr val="bg1"/>
-                </a:solidFill>
-                <a:latin typeface="Arial" charset="0"/>
-                <a:ea typeface="Arial" charset="0"/>
-                <a:cs typeface="Arial" charset="0"/>
-              </a:defRPr>
-            </a:lvl2pPr>
-            <a:lvl3pPr marL="1143000" indent="-228600" algn="l" defTabSz="914400" rtl="0" eaLnBrk="1" latinLnBrk="0" hangingPunct="1">
-              <a:lnSpc>
-                <a:spcPct val="90000"/>
-              </a:lnSpc>
-              <a:spcBef>
-                <a:spcPts val="500"/>
-              </a:spcBef>
-              <a:buFont typeface="Arial"/>
-              <a:buChar char="•"/>
-              <a:defRPr sz="2000" b="0" i="0" kern="1200">
-                <a:solidFill>
-                  <a:schemeClr val="bg1"/>
-                </a:solidFill>
-                <a:latin typeface="Arial" charset="0"/>
-                <a:ea typeface="Arial" charset="0"/>
-                <a:cs typeface="Arial" charset="0"/>
-              </a:defRPr>
-            </a:lvl3pPr>
-            <a:lvl4pPr marL="1600200" indent="-228600" algn="l" defTabSz="914400" rtl="0" eaLnBrk="1" latinLnBrk="0" hangingPunct="1">
-              <a:lnSpc>
-                <a:spcPct val="90000"/>
-              </a:lnSpc>
-              <a:spcBef>
-                <a:spcPts val="500"/>
-              </a:spcBef>
-              <a:buFont typeface="Arial"/>
-              <a:buChar char="•"/>
-              <a:defRPr sz="1800" b="0" i="0" kern="1200">
-                <a:solidFill>
-                  <a:schemeClr val="bg1"/>
-                </a:solidFill>
-                <a:latin typeface="Arial" charset="0"/>
-                <a:ea typeface="Arial" charset="0"/>
-                <a:cs typeface="Arial" charset="0"/>
-              </a:defRPr>
-            </a:lvl4pPr>
-            <a:lvl5pPr marL="2057400" indent="-228600" algn="l" defTabSz="914400" rtl="0" eaLnBrk="1" latinLnBrk="0" hangingPunct="1">
-              <a:lnSpc>
-                <a:spcPct val="90000"/>
-              </a:lnSpc>
-              <a:spcBef>
-                <a:spcPts val="500"/>
-              </a:spcBef>
-              <a:buFont typeface="Arial"/>
-              <a:buChar char="•"/>
-              <a:defRPr sz="1800" b="0" i="0" kern="1200">
-                <a:solidFill>
-                  <a:schemeClr val="bg1"/>
-                </a:solidFill>
-                <a:latin typeface="Arial" charset="0"/>
-                <a:ea typeface="Arial" charset="0"/>
-                <a:cs typeface="Arial" charset="0"/>
-              </a:defRPr>
-            </a:lvl5pPr>
-            <a:lvl6pPr marL="2514600" indent="-228600" algn="l" defTabSz="914400" rtl="0" eaLnBrk="1" latinLnBrk="0" hangingPunct="1">
-              <a:lnSpc>
-                <a:spcPct val="90000"/>
-              </a:lnSpc>
-              <a:spcBef>
-                <a:spcPts val="500"/>
-              </a:spcBef>
-              <a:buFont typeface="Arial"/>
-              <a:buChar char="•"/>
-              <a:defRPr sz="1800" kern="1200">
-                <a:solidFill>
-                  <a:schemeClr val="tx1"/>
-                </a:solidFill>
-                <a:latin typeface="+mn-lt"/>
-                <a:ea typeface="+mn-ea"/>
-                <a:cs typeface="+mn-cs"/>
-              </a:defRPr>
-            </a:lvl6pPr>
-            <a:lvl7pPr marL="2971800" indent="-228600" algn="l" defTabSz="914400" rtl="0" eaLnBrk="1" latinLnBrk="0" hangingPunct="1">
-              <a:lnSpc>
-                <a:spcPct val="90000"/>
-              </a:lnSpc>
-              <a:spcBef>
-                <a:spcPts val="500"/>
-              </a:spcBef>
-              <a:buFont typeface="Arial"/>
-              <a:buChar char="•"/>
-              <a:defRPr sz="1800" kern="1200">
-                <a:solidFill>
-                  <a:schemeClr val="tx1"/>
-                </a:solidFill>
-                <a:latin typeface="+mn-lt"/>
-                <a:ea typeface="+mn-ea"/>
-                <a:cs typeface="+mn-cs"/>
-              </a:defRPr>
-            </a:lvl7pPr>
-            <a:lvl8pPr marL="3429000" indent="-228600" algn="l" defTabSz="914400" rtl="0" eaLnBrk="1" latinLnBrk="0" hangingPunct="1">
-              <a:lnSpc>
-                <a:spcPct val="90000"/>
-              </a:lnSpc>
-              <a:spcBef>
-                <a:spcPts val="500"/>
-              </a:spcBef>
-              <a:buFont typeface="Arial"/>
-              <a:buChar char="•"/>
-              <a:defRPr sz="1800" kern="1200">
-                <a:solidFill>
-                  <a:schemeClr val="tx1"/>
-                </a:solidFill>
-                <a:latin typeface="+mn-lt"/>
-                <a:ea typeface="+mn-ea"/>
-                <a:cs typeface="+mn-cs"/>
-              </a:defRPr>
-            </a:lvl8pPr>
-            <a:lvl9pPr marL="3886200" indent="-228600" algn="l" defTabSz="914400" rtl="0" eaLnBrk="1" latinLnBrk="0" hangingPunct="1">
-              <a:lnSpc>
-                <a:spcPct val="90000"/>
-              </a:lnSpc>
-              <a:spcBef>
-                <a:spcPts val="500"/>
-              </a:spcBef>
-              <a:buFont typeface="Arial"/>
-              <a:buChar char="•"/>
-              <a:defRPr sz="1800" kern="1200">
-                <a:solidFill>
-                  <a:schemeClr val="tx1"/>
-                </a:solidFill>
-                <a:latin typeface="+mn-lt"/>
-                <a:ea typeface="+mn-ea"/>
-                <a:cs typeface="+mn-cs"/>
-              </a:defRPr>
-            </a:lvl9pPr>
-          </a:lstStyle>
-          <a:p>
-            <a:pPr fontAlgn="auto">
-              <a:lnSpc>
-                <a:spcPct val="50000"/>
-              </a:lnSpc>
-              <a:spcAft>
-                <a:spcPts val="0"/>
-              </a:spcAft>
-            </a:pPr>
-            <a:r>
-              <a:rPr lang="en-US" sz="1050" b="0" i="0" cap="all" baseline="0" dirty="0">
-                <a:latin typeface="Arial Black" charset="0"/>
-              </a:rPr>
-              <a:t>Presenter or speaker name</a:t>
-            </a:r>
-          </a:p>
-          <a:p>
-            <a:pPr fontAlgn="auto">
-              <a:lnSpc>
-                <a:spcPct val="30000"/>
-              </a:lnSpc>
-              <a:spcAft>
-                <a:spcPts val="0"/>
-              </a:spcAft>
-            </a:pPr>
-            <a:r>
-              <a:rPr lang="en-US" sz="1050" dirty="0"/>
-              <a:t>Position/Role,</a:t>
-            </a:r>
-            <a:r>
-              <a:rPr lang="en-US" sz="1050" baseline="0" dirty="0"/>
-              <a:t> The University of Texas at Austin</a:t>
-            </a:r>
-            <a:endParaRPr lang="en-US" sz="1050" dirty="0"/>
-          </a:p>
-        </p:txBody>
-      </p:sp>
-      <p:sp>
-        <p:nvSpPr>
-          <p:cNvPr id="12" name="Text Placeholder 9"/>
-          <p:cNvSpPr txBox="1">
-            <a:spLocks/>
-          </p:cNvSpPr>
-          <p:nvPr/>
-        </p:nvSpPr>
-        <p:spPr>
-          <a:xfrm>
-            <a:off x="548640" y="457200"/>
-            <a:ext cx="7828444" cy="389296"/>
-          </a:xfrm>
-          <a:prstGeom prst="rect">
-            <a:avLst/>
-          </a:prstGeom>
-        </p:spPr>
-        <p:txBody>
-          <a:bodyPr vert="horz" lIns="91440" tIns="45720" rIns="91440" bIns="45720" rtlCol="0" anchor="ctr">
-            <a:noAutofit/>
-          </a:bodyPr>
-          <a:lstStyle>
-            <a:lvl1pPr marL="0" indent="0" algn="l" defTabSz="914400" rtl="0" eaLnBrk="1" latinLnBrk="0" hangingPunct="1">
-              <a:lnSpc>
-                <a:spcPct val="90000"/>
-              </a:lnSpc>
-              <a:spcBef>
-                <a:spcPts val="1000"/>
-              </a:spcBef>
-              <a:buFont typeface="Arial"/>
-              <a:buNone/>
-              <a:defRPr sz="1600" b="0" i="0" kern="1200" baseline="0">
-                <a:solidFill>
-                  <a:schemeClr val="bg1"/>
-                </a:solidFill>
-                <a:latin typeface="Arial" charset="0"/>
-                <a:ea typeface="Arial" charset="0"/>
-                <a:cs typeface="Arial" charset="0"/>
-              </a:defRPr>
-            </a:lvl1pPr>
-            <a:lvl2pPr marL="685800" indent="-228600" algn="l" defTabSz="914400" rtl="0" eaLnBrk="1" latinLnBrk="0" hangingPunct="1">
-              <a:lnSpc>
-                <a:spcPct val="90000"/>
-              </a:lnSpc>
-              <a:spcBef>
-                <a:spcPts val="500"/>
-              </a:spcBef>
-              <a:buFont typeface="Arial"/>
-              <a:buChar char="•"/>
-              <a:defRPr sz="2400" b="0" i="0" kern="1200">
-                <a:solidFill>
-                  <a:schemeClr val="bg1"/>
-                </a:solidFill>
-                <a:latin typeface="Arial" charset="0"/>
-                <a:ea typeface="Arial" charset="0"/>
-                <a:cs typeface="Arial" charset="0"/>
-              </a:defRPr>
-            </a:lvl2pPr>
-            <a:lvl3pPr marL="1143000" indent="-228600" algn="l" defTabSz="914400" rtl="0" eaLnBrk="1" latinLnBrk="0" hangingPunct="1">
-              <a:lnSpc>
-                <a:spcPct val="90000"/>
-              </a:lnSpc>
-              <a:spcBef>
-                <a:spcPts val="500"/>
-              </a:spcBef>
-              <a:buFont typeface="Arial"/>
-              <a:buChar char="•"/>
-              <a:defRPr sz="2000" b="0" i="0" kern="1200">
-                <a:solidFill>
-                  <a:schemeClr val="bg1"/>
-                </a:solidFill>
-                <a:latin typeface="Arial" charset="0"/>
-                <a:ea typeface="Arial" charset="0"/>
-                <a:cs typeface="Arial" charset="0"/>
-              </a:defRPr>
-            </a:lvl3pPr>
-            <a:lvl4pPr marL="1600200" indent="-228600" algn="l" defTabSz="914400" rtl="0" eaLnBrk="1" latinLnBrk="0" hangingPunct="1">
-              <a:lnSpc>
-                <a:spcPct val="90000"/>
-              </a:lnSpc>
-              <a:spcBef>
-                <a:spcPts val="500"/>
-              </a:spcBef>
-              <a:buFont typeface="Arial"/>
-              <a:buChar char="•"/>
-              <a:defRPr sz="1800" b="0" i="0" kern="1200">
-                <a:solidFill>
-                  <a:schemeClr val="bg1"/>
-                </a:solidFill>
-                <a:latin typeface="Arial" charset="0"/>
-                <a:ea typeface="Arial" charset="0"/>
-                <a:cs typeface="Arial" charset="0"/>
-              </a:defRPr>
-            </a:lvl4pPr>
-            <a:lvl5pPr marL="2057400" indent="-228600" algn="l" defTabSz="914400" rtl="0" eaLnBrk="1" latinLnBrk="0" hangingPunct="1">
-              <a:lnSpc>
-                <a:spcPct val="90000"/>
-              </a:lnSpc>
-              <a:spcBef>
-                <a:spcPts val="500"/>
-              </a:spcBef>
-              <a:buFont typeface="Arial"/>
-              <a:buChar char="•"/>
-              <a:defRPr sz="1800" b="0" i="0" kern="1200">
-                <a:solidFill>
-                  <a:schemeClr val="bg1"/>
-                </a:solidFill>
-                <a:latin typeface="Arial" charset="0"/>
-                <a:ea typeface="Arial" charset="0"/>
-                <a:cs typeface="Arial" charset="0"/>
-              </a:defRPr>
-            </a:lvl5pPr>
-            <a:lvl6pPr marL="2514600" indent="-228600" algn="l" defTabSz="914400" rtl="0" eaLnBrk="1" latinLnBrk="0" hangingPunct="1">
-              <a:lnSpc>
-                <a:spcPct val="90000"/>
-              </a:lnSpc>
-              <a:spcBef>
-                <a:spcPts val="500"/>
-              </a:spcBef>
-              <a:buFont typeface="Arial"/>
-              <a:buChar char="•"/>
-              <a:defRPr sz="1800" kern="1200">
-                <a:solidFill>
-                  <a:schemeClr val="tx1"/>
-                </a:solidFill>
-                <a:latin typeface="+mn-lt"/>
-                <a:ea typeface="+mn-ea"/>
-                <a:cs typeface="+mn-cs"/>
-              </a:defRPr>
-            </a:lvl6pPr>
-            <a:lvl7pPr marL="2971800" indent="-228600" algn="l" defTabSz="914400" rtl="0" eaLnBrk="1" latinLnBrk="0" hangingPunct="1">
-              <a:lnSpc>
-                <a:spcPct val="90000"/>
-              </a:lnSpc>
-              <a:spcBef>
-                <a:spcPts val="500"/>
-              </a:spcBef>
-              <a:buFont typeface="Arial"/>
-              <a:buChar char="•"/>
-              <a:defRPr sz="1800" kern="1200">
-                <a:solidFill>
-                  <a:schemeClr val="tx1"/>
-                </a:solidFill>
-                <a:latin typeface="+mn-lt"/>
-                <a:ea typeface="+mn-ea"/>
-                <a:cs typeface="+mn-cs"/>
-              </a:defRPr>
-            </a:lvl7pPr>
-            <a:lvl8pPr marL="3429000" indent="-228600" algn="l" defTabSz="914400" rtl="0" eaLnBrk="1" latinLnBrk="0" hangingPunct="1">
-              <a:lnSpc>
-                <a:spcPct val="90000"/>
-              </a:lnSpc>
-              <a:spcBef>
-                <a:spcPts val="500"/>
-              </a:spcBef>
-              <a:buFont typeface="Arial"/>
-              <a:buChar char="•"/>
-              <a:defRPr sz="1800" kern="1200">
-                <a:solidFill>
-                  <a:schemeClr val="tx1"/>
-                </a:solidFill>
-                <a:latin typeface="+mn-lt"/>
-                <a:ea typeface="+mn-ea"/>
-                <a:cs typeface="+mn-cs"/>
-              </a:defRPr>
-            </a:lvl8pPr>
-            <a:lvl9pPr marL="3886200" indent="-228600" algn="l" defTabSz="914400" rtl="0" eaLnBrk="1" latinLnBrk="0" hangingPunct="1">
-              <a:lnSpc>
-                <a:spcPct val="90000"/>
-              </a:lnSpc>
-              <a:spcBef>
-                <a:spcPts val="500"/>
-              </a:spcBef>
-              <a:buFont typeface="Arial"/>
-              <a:buChar char="•"/>
-              <a:defRPr sz="1800" kern="1200">
-                <a:solidFill>
-                  <a:schemeClr val="tx1"/>
-                </a:solidFill>
-                <a:latin typeface="+mn-lt"/>
-                <a:ea typeface="+mn-ea"/>
-                <a:cs typeface="+mn-cs"/>
-              </a:defRPr>
-            </a:lvl9pPr>
-          </a:lstStyle>
-          <a:p>
-            <a:pPr fontAlgn="auto">
-              <a:spcAft>
-                <a:spcPts val="0"/>
-              </a:spcAft>
-            </a:pPr>
-            <a:r>
-              <a:rPr lang="en-US" sz="1200" b="0" i="0" cap="all" baseline="0" dirty="0">
-                <a:latin typeface="Arial Black" charset="0"/>
-              </a:rPr>
-              <a:t>Month 20xx</a:t>
-            </a:r>
-            <a:endParaRPr lang="en-US" sz="1200" b="0" dirty="0"/>
-          </a:p>
-        </p:txBody>
-      </p:sp>
-      <p:sp>
-        <p:nvSpPr>
-          <p:cNvPr id="13" name="Title Placeholder 7"/>
-          <p:cNvSpPr txBox="1">
-            <a:spLocks/>
-          </p:cNvSpPr>
-          <p:nvPr/>
-        </p:nvSpPr>
-        <p:spPr>
-          <a:xfrm>
-            <a:off x="502920" y="1200150"/>
-            <a:ext cx="7886700" cy="1752600"/>
-          </a:xfrm>
-          <a:prstGeom prst="rect">
-            <a:avLst/>
-          </a:prstGeom>
-        </p:spPr>
-        <p:txBody>
-          <a:bodyPr vert="horz" wrap="square" lIns="91440" tIns="45720" rIns="91440" bIns="45720" rtlCol="0" anchor="b">
-            <a:noAutofit/>
-          </a:bodyPr>
-          <a:lstStyle>
-            <a:lvl1pPr algn="l" defTabSz="914400" rtl="0" eaLnBrk="1" latinLnBrk="0" hangingPunct="1">
-              <a:lnSpc>
-                <a:spcPts val="4000"/>
-              </a:lnSpc>
-              <a:spcBef>
-                <a:spcPct val="0"/>
-              </a:spcBef>
-              <a:buNone/>
-              <a:defRPr sz="4800" b="1" i="0" kern="800" cap="all" normalizeH="0" baseline="0">
-                <a:solidFill>
-                  <a:schemeClr val="bg1"/>
-                </a:solidFill>
-                <a:latin typeface="Arial Black" charset="0"/>
-                <a:ea typeface="Arial Black" charset="0"/>
-                <a:cs typeface="Arial Black" charset="0"/>
-              </a:defRPr>
-            </a:lvl1pPr>
-          </a:lstStyle>
-          <a:p>
-            <a:pPr fontAlgn="auto">
-              <a:spcAft>
-                <a:spcPts val="0"/>
-              </a:spcAft>
-            </a:pPr>
-            <a:r>
-              <a:rPr lang="en-US" dirty="0"/>
-              <a:t>Insert your</a:t>
-            </a:r>
-            <a:br>
-              <a:rPr lang="en-US" dirty="0"/>
-            </a:br>
-            <a:r>
-              <a:rPr lang="en-US" dirty="0"/>
-              <a:t>headline here</a:t>
-            </a:r>
-            <a:br>
-              <a:rPr lang="en-US" dirty="0"/>
-            </a:br>
-            <a:r>
-              <a:rPr lang="en-US" dirty="0"/>
-              <a:t>up to 3 lines</a:t>
-            </a:r>
-          </a:p>
-        </p:txBody>
-      </p:sp>
-      <p:sp>
-        <p:nvSpPr>
-          <p:cNvPr id="15" name="Text Placeholder 9"/>
-          <p:cNvSpPr txBox="1">
-            <a:spLocks/>
-          </p:cNvSpPr>
-          <p:nvPr/>
-        </p:nvSpPr>
-        <p:spPr>
-          <a:xfrm>
-            <a:off x="548640" y="3333749"/>
-            <a:ext cx="7886700" cy="457201"/>
-          </a:xfrm>
-          <a:prstGeom prst="rect">
-            <a:avLst/>
-          </a:prstGeom>
-        </p:spPr>
-        <p:txBody>
-          <a:bodyPr vert="horz" lIns="91440" tIns="45720" rIns="91440" bIns="45720" rtlCol="0">
-            <a:noAutofit/>
-          </a:bodyPr>
-          <a:lstStyle>
-            <a:lvl1pPr marL="0" indent="0" algn="l" defTabSz="914400" rtl="0" eaLnBrk="1" latinLnBrk="0" hangingPunct="1">
-              <a:lnSpc>
-                <a:spcPct val="90000"/>
-              </a:lnSpc>
-              <a:spcBef>
-                <a:spcPts val="1000"/>
-              </a:spcBef>
-              <a:buFont typeface="Arial"/>
-              <a:buNone/>
-              <a:defRPr sz="1400" b="0" i="0" kern="1200" baseline="0">
-                <a:solidFill>
-                  <a:schemeClr val="bg1"/>
-                </a:solidFill>
-                <a:latin typeface="Arial" charset="0"/>
-                <a:ea typeface="Arial" charset="0"/>
-                <a:cs typeface="Arial" charset="0"/>
-              </a:defRPr>
-            </a:lvl1pPr>
-            <a:lvl2pPr marL="685800" indent="-228600" algn="l" defTabSz="914400" rtl="0" eaLnBrk="1" latinLnBrk="0" hangingPunct="1">
-              <a:lnSpc>
-                <a:spcPct val="90000"/>
-              </a:lnSpc>
-              <a:spcBef>
-                <a:spcPts val="500"/>
-              </a:spcBef>
-              <a:buFont typeface="Arial"/>
-              <a:buChar char="•"/>
-              <a:defRPr sz="2400" b="0" i="0" kern="1200">
-                <a:solidFill>
-                  <a:schemeClr val="bg1"/>
-                </a:solidFill>
-                <a:latin typeface="Arial" charset="0"/>
-                <a:ea typeface="Arial" charset="0"/>
-                <a:cs typeface="Arial" charset="0"/>
-              </a:defRPr>
-            </a:lvl2pPr>
-            <a:lvl3pPr marL="1143000" indent="-228600" algn="l" defTabSz="914400" rtl="0" eaLnBrk="1" latinLnBrk="0" hangingPunct="1">
-              <a:lnSpc>
-                <a:spcPct val="90000"/>
-              </a:lnSpc>
-              <a:spcBef>
-                <a:spcPts val="500"/>
-              </a:spcBef>
-              <a:buFont typeface="Arial"/>
-              <a:buChar char="•"/>
-              <a:defRPr sz="2000" b="0" i="0" kern="1200">
-                <a:solidFill>
-                  <a:schemeClr val="bg1"/>
-                </a:solidFill>
-                <a:latin typeface="Arial" charset="0"/>
-                <a:ea typeface="Arial" charset="0"/>
-                <a:cs typeface="Arial" charset="0"/>
-              </a:defRPr>
-            </a:lvl3pPr>
-            <a:lvl4pPr marL="1600200" indent="-228600" algn="l" defTabSz="914400" rtl="0" eaLnBrk="1" latinLnBrk="0" hangingPunct="1">
-              <a:lnSpc>
-                <a:spcPct val="90000"/>
-              </a:lnSpc>
-              <a:spcBef>
-                <a:spcPts val="500"/>
-              </a:spcBef>
-              <a:buFont typeface="Arial"/>
-              <a:buChar char="•"/>
-              <a:defRPr sz="1800" b="0" i="0" kern="1200">
-                <a:solidFill>
-                  <a:schemeClr val="bg1"/>
-                </a:solidFill>
-                <a:latin typeface="Arial" charset="0"/>
-                <a:ea typeface="Arial" charset="0"/>
-                <a:cs typeface="Arial" charset="0"/>
-              </a:defRPr>
-            </a:lvl4pPr>
-            <a:lvl5pPr marL="2057400" indent="-228600" algn="l" defTabSz="914400" rtl="0" eaLnBrk="1" latinLnBrk="0" hangingPunct="1">
-              <a:lnSpc>
-                <a:spcPct val="90000"/>
-              </a:lnSpc>
-              <a:spcBef>
-                <a:spcPts val="500"/>
-              </a:spcBef>
-              <a:buFont typeface="Arial"/>
-              <a:buChar char="•"/>
-              <a:defRPr sz="1800" b="0" i="0" kern="1200">
-                <a:solidFill>
-                  <a:schemeClr val="bg1"/>
-                </a:solidFill>
-                <a:latin typeface="Arial" charset="0"/>
-                <a:ea typeface="Arial" charset="0"/>
-                <a:cs typeface="Arial" charset="0"/>
-              </a:defRPr>
-            </a:lvl5pPr>
-            <a:lvl6pPr marL="2514600" indent="-228600" algn="l" defTabSz="914400" rtl="0" eaLnBrk="1" latinLnBrk="0" hangingPunct="1">
-              <a:lnSpc>
-                <a:spcPct val="90000"/>
-              </a:lnSpc>
-              <a:spcBef>
-                <a:spcPts val="500"/>
-              </a:spcBef>
-              <a:buFont typeface="Arial"/>
-              <a:buChar char="•"/>
-              <a:defRPr sz="1800" kern="1200">
-                <a:solidFill>
-                  <a:schemeClr val="tx1"/>
-                </a:solidFill>
-                <a:latin typeface="+mn-lt"/>
-                <a:ea typeface="+mn-ea"/>
-                <a:cs typeface="+mn-cs"/>
-              </a:defRPr>
-            </a:lvl6pPr>
-            <a:lvl7pPr marL="2971800" indent="-228600" algn="l" defTabSz="914400" rtl="0" eaLnBrk="1" latinLnBrk="0" hangingPunct="1">
-              <a:lnSpc>
-                <a:spcPct val="90000"/>
-              </a:lnSpc>
-              <a:spcBef>
-                <a:spcPts val="500"/>
-              </a:spcBef>
-              <a:buFont typeface="Arial"/>
-              <a:buChar char="•"/>
-              <a:defRPr sz="1800" kern="1200">
-                <a:solidFill>
-                  <a:schemeClr val="tx1"/>
-                </a:solidFill>
-                <a:latin typeface="+mn-lt"/>
-                <a:ea typeface="+mn-ea"/>
-                <a:cs typeface="+mn-cs"/>
-              </a:defRPr>
-            </a:lvl7pPr>
-            <a:lvl8pPr marL="3429000" indent="-228600" algn="l" defTabSz="914400" rtl="0" eaLnBrk="1" latinLnBrk="0" hangingPunct="1">
-              <a:lnSpc>
-                <a:spcPct val="90000"/>
-              </a:lnSpc>
-              <a:spcBef>
-                <a:spcPts val="500"/>
-              </a:spcBef>
-              <a:buFont typeface="Arial"/>
-              <a:buChar char="•"/>
-              <a:defRPr sz="1800" kern="1200">
-                <a:solidFill>
-                  <a:schemeClr val="tx1"/>
-                </a:solidFill>
-                <a:latin typeface="+mn-lt"/>
-                <a:ea typeface="+mn-ea"/>
-                <a:cs typeface="+mn-cs"/>
-              </a:defRPr>
-            </a:lvl8pPr>
-            <a:lvl9pPr marL="3886200" indent="-228600" algn="l" defTabSz="914400" rtl="0" eaLnBrk="1" latinLnBrk="0" hangingPunct="1">
-              <a:lnSpc>
-                <a:spcPct val="90000"/>
-              </a:lnSpc>
-              <a:spcBef>
-                <a:spcPts val="500"/>
-              </a:spcBef>
-              <a:buFont typeface="Arial"/>
-              <a:buChar char="•"/>
-              <a:defRPr sz="1800" kern="1200">
-                <a:solidFill>
-                  <a:schemeClr val="tx1"/>
-                </a:solidFill>
-                <a:latin typeface="+mn-lt"/>
-                <a:ea typeface="+mn-ea"/>
-                <a:cs typeface="+mn-cs"/>
-              </a:defRPr>
-            </a:lvl9pPr>
-          </a:lstStyle>
-          <a:p>
-            <a:pPr fontAlgn="auto">
-              <a:spcAft>
-                <a:spcPts val="0"/>
-              </a:spcAft>
-            </a:pPr>
-            <a:r>
-              <a:rPr lang="en-US" dirty="0"/>
-              <a:t>Insert your subtitle or any additional description text here up to</a:t>
-            </a:r>
-            <a:br>
-              <a:rPr lang="en-US" dirty="0"/>
-            </a:br>
-            <a:r>
-              <a:rPr lang="en-US" dirty="0"/>
-              <a:t>two lines of text or you can delete this text box</a:t>
-            </a:r>
-          </a:p>
-        </p:txBody>
-      </p:sp>
-      <p:pic>
-        <p:nvPicPr>
-          <p:cNvPr id="16" name="Picture 15"/>
-          <p:cNvPicPr>
-            <a:picLocks noChangeAspect="1"/>
-          </p:cNvPicPr>
-          <p:nvPr/>
-        </p:nvPicPr>
-        <p:blipFill>
-          <a:blip r:embed="rId4" cstate="print">
-            <a:extLst>
-              <a:ext uri="{28A0092B-C50C-407E-A947-70E740481C1C}">
-                <a14:useLocalDpi xmlns:a14="http://schemas.microsoft.com/office/drawing/2010/main" val="0"/>
-              </a:ext>
-            </a:extLst>
-          </a:blip>
-          <a:stretch>
-            <a:fillRect/>
-          </a:stretch>
-        </p:blipFill>
-        <p:spPr>
-          <a:xfrm>
-            <a:off x="6978699" y="320040"/>
-            <a:ext cx="1877397" cy="914400"/>
-          </a:xfrm>
-          <a:prstGeom prst="rect">
-            <a:avLst/>
-          </a:prstGeom>
-        </p:spPr>
-      </p:pic>
-    </p:spTree>
-    <p:extLst>
-      <p:ext uri="{BB962C8B-B14F-4D97-AF65-F5344CB8AC3E}">
-        <p14:creationId xmlns:p14="http://schemas.microsoft.com/office/powerpoint/2010/main" val="434739919"/>
-      </p:ext>
-    </p:extLst>
-  </p:cSld>
-  <p:clrMapOvr>
-    <a:masterClrMapping/>
-  </p:clrMapOvr>
-</p:sld>
-</file>
-
-<file path=ppt/slides/slide4.xml><?xml version="1.0" encoding="utf-8"?>
-<p:sld xmlns:a="http://schemas.openxmlformats.org/drawingml/2006/main" xmlns:r="http://schemas.openxmlformats.org/officeDocument/2006/relationships" xmlns:p="http://schemas.openxmlformats.org/presentationml/2006/main">
-  <p:cSld>
-    <p:bg>
-      <p:bgPr>
-        <a:solidFill>
-          <a:srgbClr val="BF5700"/>
-        </a:solidFill>
-        <a:effectLst/>
-      </p:bgPr>
-    </p:bg>
-    <p:spTree>
-      <p:nvGrpSpPr>
-        <p:cNvPr id="1" name=""/>
-        <p:cNvGrpSpPr/>
-        <p:nvPr/>
-      </p:nvGrpSpPr>
-      <p:grpSpPr>
-        <a:xfrm>
-          <a:off x="0" y="0"/>
-          <a:ext cx="0" cy="0"/>
-          <a:chOff x="0" y="0"/>
-          <a:chExt cx="0" cy="0"/>
-        </a:xfrm>
-      </p:grpSpPr>
-      <p:cxnSp>
-        <p:nvCxnSpPr>
-          <p:cNvPr id="10" name="Straight Connector 9"/>
-          <p:cNvCxnSpPr/>
-          <p:nvPr/>
-        </p:nvCxnSpPr>
-        <p:spPr>
-          <a:xfrm>
-            <a:off x="628650" y="3105150"/>
-            <a:ext cx="5619750" cy="0"/>
-          </a:xfrm>
-          <a:prstGeom prst="line">
-            <a:avLst/>
-          </a:prstGeom>
-          <a:ln w="19050">
-            <a:solidFill>
-              <a:schemeClr val="bg1"/>
-            </a:solidFill>
-          </a:ln>
-        </p:spPr>
-        <p:style>
-          <a:lnRef idx="1">
-            <a:schemeClr val="accent1"/>
-          </a:lnRef>
-          <a:fillRef idx="0">
-            <a:schemeClr val="accent1"/>
-          </a:fillRef>
-          <a:effectRef idx="0">
-            <a:schemeClr val="accent1"/>
-          </a:effectRef>
-          <a:fontRef idx="minor">
-            <a:schemeClr val="tx1"/>
-          </a:fontRef>
-        </p:style>
-      </p:cxnSp>
-      <p:sp>
-        <p:nvSpPr>
-          <p:cNvPr id="11" name="Text Placeholder 9"/>
-          <p:cNvSpPr txBox="1">
-            <a:spLocks/>
-          </p:cNvSpPr>
-          <p:nvPr/>
-        </p:nvSpPr>
-        <p:spPr>
-          <a:xfrm>
-            <a:off x="548640" y="4114800"/>
-            <a:ext cx="7886700" cy="457201"/>
-          </a:xfrm>
-          <a:prstGeom prst="rect">
-            <a:avLst/>
-          </a:prstGeom>
-        </p:spPr>
-        <p:txBody>
-          <a:bodyPr vert="horz" lIns="91440" tIns="45720" rIns="91440" bIns="45720" rtlCol="0" anchor="b">
-            <a:noAutofit/>
-          </a:bodyPr>
-          <a:lstStyle>
-            <a:lvl1pPr marL="0" indent="0" algn="l" defTabSz="914400" rtl="0" eaLnBrk="1" latinLnBrk="0" hangingPunct="1">
-              <a:lnSpc>
-                <a:spcPct val="90000"/>
-              </a:lnSpc>
-              <a:spcBef>
-                <a:spcPts val="1000"/>
-              </a:spcBef>
-              <a:buFont typeface="Arial"/>
-              <a:buNone/>
-              <a:defRPr sz="1600" b="0" i="0" kern="1200" baseline="0">
-                <a:solidFill>
-                  <a:schemeClr val="bg1"/>
-                </a:solidFill>
-                <a:latin typeface="Arial" charset="0"/>
-                <a:ea typeface="Arial" charset="0"/>
-                <a:cs typeface="Arial" charset="0"/>
-              </a:defRPr>
-            </a:lvl1pPr>
-            <a:lvl2pPr marL="685800" indent="-228600" algn="l" defTabSz="914400" rtl="0" eaLnBrk="1" latinLnBrk="0" hangingPunct="1">
-              <a:lnSpc>
-                <a:spcPct val="90000"/>
-              </a:lnSpc>
-              <a:spcBef>
-                <a:spcPts val="500"/>
-              </a:spcBef>
-              <a:buFont typeface="Arial"/>
-              <a:buChar char="•"/>
-              <a:defRPr sz="2400" b="0" i="0" kern="1200">
-                <a:solidFill>
-                  <a:schemeClr val="bg1"/>
-                </a:solidFill>
-                <a:latin typeface="Arial" charset="0"/>
-                <a:ea typeface="Arial" charset="0"/>
-                <a:cs typeface="Arial" charset="0"/>
-              </a:defRPr>
-            </a:lvl2pPr>
-            <a:lvl3pPr marL="1143000" indent="-228600" algn="l" defTabSz="914400" rtl="0" eaLnBrk="1" latinLnBrk="0" hangingPunct="1">
-              <a:lnSpc>
-                <a:spcPct val="90000"/>
-              </a:lnSpc>
-              <a:spcBef>
-                <a:spcPts val="500"/>
-              </a:spcBef>
-              <a:buFont typeface="Arial"/>
-              <a:buChar char="•"/>
-              <a:defRPr sz="2000" b="0" i="0" kern="1200">
-                <a:solidFill>
-                  <a:schemeClr val="bg1"/>
-                </a:solidFill>
-                <a:latin typeface="Arial" charset="0"/>
-                <a:ea typeface="Arial" charset="0"/>
-                <a:cs typeface="Arial" charset="0"/>
-              </a:defRPr>
-            </a:lvl3pPr>
-            <a:lvl4pPr marL="1600200" indent="-228600" algn="l" defTabSz="914400" rtl="0" eaLnBrk="1" latinLnBrk="0" hangingPunct="1">
-              <a:lnSpc>
-                <a:spcPct val="90000"/>
-              </a:lnSpc>
-              <a:spcBef>
-                <a:spcPts val="500"/>
-              </a:spcBef>
-              <a:buFont typeface="Arial"/>
-              <a:buChar char="•"/>
-              <a:defRPr sz="1800" b="0" i="0" kern="1200">
-                <a:solidFill>
-                  <a:schemeClr val="bg1"/>
-                </a:solidFill>
-                <a:latin typeface="Arial" charset="0"/>
-                <a:ea typeface="Arial" charset="0"/>
-                <a:cs typeface="Arial" charset="0"/>
-              </a:defRPr>
-            </a:lvl4pPr>
-            <a:lvl5pPr marL="2057400" indent="-228600" algn="l" defTabSz="914400" rtl="0" eaLnBrk="1" latinLnBrk="0" hangingPunct="1">
-              <a:lnSpc>
-                <a:spcPct val="90000"/>
-              </a:lnSpc>
-              <a:spcBef>
-                <a:spcPts val="500"/>
-              </a:spcBef>
-              <a:buFont typeface="Arial"/>
-              <a:buChar char="•"/>
-              <a:defRPr sz="1800" b="0" i="0" kern="1200">
-                <a:solidFill>
-                  <a:schemeClr val="bg1"/>
-                </a:solidFill>
-                <a:latin typeface="Arial" charset="0"/>
-                <a:ea typeface="Arial" charset="0"/>
-                <a:cs typeface="Arial" charset="0"/>
-              </a:defRPr>
-            </a:lvl5pPr>
-            <a:lvl6pPr marL="2514600" indent="-228600" algn="l" defTabSz="914400" rtl="0" eaLnBrk="1" latinLnBrk="0" hangingPunct="1">
-              <a:lnSpc>
-                <a:spcPct val="90000"/>
-              </a:lnSpc>
-              <a:spcBef>
-                <a:spcPts val="500"/>
-              </a:spcBef>
-              <a:buFont typeface="Arial"/>
-              <a:buChar char="•"/>
-              <a:defRPr sz="1800" kern="1200">
-                <a:solidFill>
-                  <a:schemeClr val="tx1"/>
-                </a:solidFill>
-                <a:latin typeface="+mn-lt"/>
-                <a:ea typeface="+mn-ea"/>
-                <a:cs typeface="+mn-cs"/>
-              </a:defRPr>
-            </a:lvl6pPr>
-            <a:lvl7pPr marL="2971800" indent="-228600" algn="l" defTabSz="914400" rtl="0" eaLnBrk="1" latinLnBrk="0" hangingPunct="1">
-              <a:lnSpc>
-                <a:spcPct val="90000"/>
-              </a:lnSpc>
-              <a:spcBef>
-                <a:spcPts val="500"/>
-              </a:spcBef>
-              <a:buFont typeface="Arial"/>
-              <a:buChar char="•"/>
-              <a:defRPr sz="1800" kern="1200">
-                <a:solidFill>
-                  <a:schemeClr val="tx1"/>
-                </a:solidFill>
-                <a:latin typeface="+mn-lt"/>
-                <a:ea typeface="+mn-ea"/>
-                <a:cs typeface="+mn-cs"/>
-              </a:defRPr>
-            </a:lvl7pPr>
-            <a:lvl8pPr marL="3429000" indent="-228600" algn="l" defTabSz="914400" rtl="0" eaLnBrk="1" latinLnBrk="0" hangingPunct="1">
-              <a:lnSpc>
-                <a:spcPct val="90000"/>
-              </a:lnSpc>
-              <a:spcBef>
-                <a:spcPts val="500"/>
-              </a:spcBef>
-              <a:buFont typeface="Arial"/>
-              <a:buChar char="•"/>
-              <a:defRPr sz="1800" kern="1200">
-                <a:solidFill>
-                  <a:schemeClr val="tx1"/>
-                </a:solidFill>
-                <a:latin typeface="+mn-lt"/>
-                <a:ea typeface="+mn-ea"/>
-                <a:cs typeface="+mn-cs"/>
-              </a:defRPr>
-            </a:lvl8pPr>
-            <a:lvl9pPr marL="3886200" indent="-228600" algn="l" defTabSz="914400" rtl="0" eaLnBrk="1" latinLnBrk="0" hangingPunct="1">
-              <a:lnSpc>
-                <a:spcPct val="90000"/>
-              </a:lnSpc>
-              <a:spcBef>
-                <a:spcPts val="500"/>
-              </a:spcBef>
-              <a:buFont typeface="Arial"/>
-              <a:buChar char="•"/>
-              <a:defRPr sz="1800" kern="1200">
-                <a:solidFill>
-                  <a:schemeClr val="tx1"/>
-                </a:solidFill>
-                <a:latin typeface="+mn-lt"/>
-                <a:ea typeface="+mn-ea"/>
-                <a:cs typeface="+mn-cs"/>
-              </a:defRPr>
-            </a:lvl9pPr>
-          </a:lstStyle>
-          <a:p>
-            <a:pPr fontAlgn="auto">
-              <a:lnSpc>
-                <a:spcPct val="50000"/>
-              </a:lnSpc>
-              <a:spcAft>
-                <a:spcPts val="0"/>
-              </a:spcAft>
-            </a:pPr>
-            <a:r>
-              <a:rPr lang="en-US" sz="1050" b="0" i="0" cap="all" baseline="0" dirty="0">
-                <a:latin typeface="Arial Black" charset="0"/>
-              </a:rPr>
-              <a:t>Presenter or speaker name</a:t>
-            </a:r>
-          </a:p>
-          <a:p>
-            <a:pPr fontAlgn="auto">
-              <a:lnSpc>
-                <a:spcPct val="30000"/>
-              </a:lnSpc>
-              <a:spcAft>
-                <a:spcPts val="0"/>
-              </a:spcAft>
-            </a:pPr>
-            <a:r>
-              <a:rPr lang="en-US" sz="1050" dirty="0"/>
-              <a:t>Position/Role,</a:t>
-            </a:r>
-            <a:r>
-              <a:rPr lang="en-US" sz="1050" baseline="0" dirty="0"/>
-              <a:t> The University of Texas at Austin</a:t>
-            </a:r>
-            <a:endParaRPr lang="en-US" sz="1050" dirty="0"/>
-          </a:p>
-        </p:txBody>
-      </p:sp>
-      <p:sp>
-        <p:nvSpPr>
-          <p:cNvPr id="12" name="Text Placeholder 9"/>
-          <p:cNvSpPr txBox="1">
-            <a:spLocks/>
-          </p:cNvSpPr>
-          <p:nvPr/>
-        </p:nvSpPr>
-        <p:spPr>
-          <a:xfrm>
-            <a:off x="548640" y="457200"/>
-            <a:ext cx="7828444" cy="389296"/>
-          </a:xfrm>
-          <a:prstGeom prst="rect">
-            <a:avLst/>
-          </a:prstGeom>
-        </p:spPr>
-        <p:txBody>
-          <a:bodyPr vert="horz" lIns="91440" tIns="45720" rIns="91440" bIns="45720" rtlCol="0" anchor="ctr">
-            <a:noAutofit/>
-          </a:bodyPr>
-          <a:lstStyle>
-            <a:lvl1pPr marL="0" indent="0" algn="l" defTabSz="914400" rtl="0" eaLnBrk="1" latinLnBrk="0" hangingPunct="1">
-              <a:lnSpc>
-                <a:spcPct val="90000"/>
-              </a:lnSpc>
-              <a:spcBef>
-                <a:spcPts val="1000"/>
-              </a:spcBef>
-              <a:buFont typeface="Arial"/>
-              <a:buNone/>
-              <a:defRPr sz="1600" b="0" i="0" kern="1200" baseline="0">
-                <a:solidFill>
-                  <a:schemeClr val="bg1"/>
-                </a:solidFill>
-                <a:latin typeface="Arial" charset="0"/>
-                <a:ea typeface="Arial" charset="0"/>
-                <a:cs typeface="Arial" charset="0"/>
-              </a:defRPr>
-            </a:lvl1pPr>
-            <a:lvl2pPr marL="685800" indent="-228600" algn="l" defTabSz="914400" rtl="0" eaLnBrk="1" latinLnBrk="0" hangingPunct="1">
-              <a:lnSpc>
-                <a:spcPct val="90000"/>
-              </a:lnSpc>
-              <a:spcBef>
-                <a:spcPts val="500"/>
-              </a:spcBef>
-              <a:buFont typeface="Arial"/>
-              <a:buChar char="•"/>
-              <a:defRPr sz="2400" b="0" i="0" kern="1200">
-                <a:solidFill>
-                  <a:schemeClr val="bg1"/>
-                </a:solidFill>
-                <a:latin typeface="Arial" charset="0"/>
-                <a:ea typeface="Arial" charset="0"/>
-                <a:cs typeface="Arial" charset="0"/>
-              </a:defRPr>
-            </a:lvl2pPr>
-            <a:lvl3pPr marL="1143000" indent="-228600" algn="l" defTabSz="914400" rtl="0" eaLnBrk="1" latinLnBrk="0" hangingPunct="1">
-              <a:lnSpc>
-                <a:spcPct val="90000"/>
-              </a:lnSpc>
-              <a:spcBef>
-                <a:spcPts val="500"/>
-              </a:spcBef>
-              <a:buFont typeface="Arial"/>
-              <a:buChar char="•"/>
-              <a:defRPr sz="2000" b="0" i="0" kern="1200">
-                <a:solidFill>
-                  <a:schemeClr val="bg1"/>
-                </a:solidFill>
-                <a:latin typeface="Arial" charset="0"/>
-                <a:ea typeface="Arial" charset="0"/>
-                <a:cs typeface="Arial" charset="0"/>
-              </a:defRPr>
-            </a:lvl3pPr>
-            <a:lvl4pPr marL="1600200" indent="-228600" algn="l" defTabSz="914400" rtl="0" eaLnBrk="1" latinLnBrk="0" hangingPunct="1">
-              <a:lnSpc>
-                <a:spcPct val="90000"/>
-              </a:lnSpc>
-              <a:spcBef>
-                <a:spcPts val="500"/>
-              </a:spcBef>
-              <a:buFont typeface="Arial"/>
-              <a:buChar char="•"/>
-              <a:defRPr sz="1800" b="0" i="0" kern="1200">
-                <a:solidFill>
-                  <a:schemeClr val="bg1"/>
-                </a:solidFill>
-                <a:latin typeface="Arial" charset="0"/>
-                <a:ea typeface="Arial" charset="0"/>
-                <a:cs typeface="Arial" charset="0"/>
-              </a:defRPr>
-            </a:lvl4pPr>
-            <a:lvl5pPr marL="2057400" indent="-228600" algn="l" defTabSz="914400" rtl="0" eaLnBrk="1" latinLnBrk="0" hangingPunct="1">
-              <a:lnSpc>
-                <a:spcPct val="90000"/>
-              </a:lnSpc>
-              <a:spcBef>
-                <a:spcPts val="500"/>
-              </a:spcBef>
-              <a:buFont typeface="Arial"/>
-              <a:buChar char="•"/>
-              <a:defRPr sz="1800" b="0" i="0" kern="1200">
-                <a:solidFill>
-                  <a:schemeClr val="bg1"/>
-                </a:solidFill>
-                <a:latin typeface="Arial" charset="0"/>
-                <a:ea typeface="Arial" charset="0"/>
-                <a:cs typeface="Arial" charset="0"/>
-              </a:defRPr>
-            </a:lvl5pPr>
-            <a:lvl6pPr marL="2514600" indent="-228600" algn="l" defTabSz="914400" rtl="0" eaLnBrk="1" latinLnBrk="0" hangingPunct="1">
-              <a:lnSpc>
-                <a:spcPct val="90000"/>
-              </a:lnSpc>
-              <a:spcBef>
-                <a:spcPts val="500"/>
-              </a:spcBef>
-              <a:buFont typeface="Arial"/>
-              <a:buChar char="•"/>
-              <a:defRPr sz="1800" kern="1200">
-                <a:solidFill>
-                  <a:schemeClr val="tx1"/>
-                </a:solidFill>
-                <a:latin typeface="+mn-lt"/>
-                <a:ea typeface="+mn-ea"/>
-                <a:cs typeface="+mn-cs"/>
-              </a:defRPr>
-            </a:lvl6pPr>
-            <a:lvl7pPr marL="2971800" indent="-228600" algn="l" defTabSz="914400" rtl="0" eaLnBrk="1" latinLnBrk="0" hangingPunct="1">
-              <a:lnSpc>
-                <a:spcPct val="90000"/>
-              </a:lnSpc>
-              <a:spcBef>
-                <a:spcPts val="500"/>
-              </a:spcBef>
-              <a:buFont typeface="Arial"/>
-              <a:buChar char="•"/>
-              <a:defRPr sz="1800" kern="1200">
-                <a:solidFill>
-                  <a:schemeClr val="tx1"/>
-                </a:solidFill>
-                <a:latin typeface="+mn-lt"/>
-                <a:ea typeface="+mn-ea"/>
-                <a:cs typeface="+mn-cs"/>
-              </a:defRPr>
-            </a:lvl7pPr>
-            <a:lvl8pPr marL="3429000" indent="-228600" algn="l" defTabSz="914400" rtl="0" eaLnBrk="1" latinLnBrk="0" hangingPunct="1">
-              <a:lnSpc>
-                <a:spcPct val="90000"/>
-              </a:lnSpc>
-              <a:spcBef>
-                <a:spcPts val="500"/>
-              </a:spcBef>
-              <a:buFont typeface="Arial"/>
-              <a:buChar char="•"/>
-              <a:defRPr sz="1800" kern="1200">
-                <a:solidFill>
-                  <a:schemeClr val="tx1"/>
-                </a:solidFill>
-                <a:latin typeface="+mn-lt"/>
-                <a:ea typeface="+mn-ea"/>
-                <a:cs typeface="+mn-cs"/>
-              </a:defRPr>
-            </a:lvl8pPr>
-            <a:lvl9pPr marL="3886200" indent="-228600" algn="l" defTabSz="914400" rtl="0" eaLnBrk="1" latinLnBrk="0" hangingPunct="1">
-              <a:lnSpc>
-                <a:spcPct val="90000"/>
-              </a:lnSpc>
-              <a:spcBef>
-                <a:spcPts val="500"/>
-              </a:spcBef>
-              <a:buFont typeface="Arial"/>
-              <a:buChar char="•"/>
-              <a:defRPr sz="1800" kern="1200">
-                <a:solidFill>
-                  <a:schemeClr val="tx1"/>
-                </a:solidFill>
-                <a:latin typeface="+mn-lt"/>
-                <a:ea typeface="+mn-ea"/>
-                <a:cs typeface="+mn-cs"/>
-              </a:defRPr>
-            </a:lvl9pPr>
-          </a:lstStyle>
-          <a:p>
-            <a:pPr fontAlgn="auto">
-              <a:spcAft>
-                <a:spcPts val="0"/>
-              </a:spcAft>
-            </a:pPr>
-            <a:r>
-              <a:rPr lang="en-US" sz="1200" b="0" i="0" cap="all" baseline="0" dirty="0">
-                <a:latin typeface="Arial Black" charset="0"/>
-              </a:rPr>
-              <a:t>Month 20xx</a:t>
-            </a:r>
-            <a:endParaRPr lang="en-US" sz="1200" b="0" dirty="0"/>
-          </a:p>
-        </p:txBody>
-      </p:sp>
-      <p:sp>
-        <p:nvSpPr>
-          <p:cNvPr id="13" name="Title Placeholder 7"/>
-          <p:cNvSpPr txBox="1">
-            <a:spLocks/>
-          </p:cNvSpPr>
-          <p:nvPr/>
-        </p:nvSpPr>
-        <p:spPr>
-          <a:xfrm>
-            <a:off x="502920" y="1200150"/>
-            <a:ext cx="7886700" cy="1752600"/>
-          </a:xfrm>
-          <a:prstGeom prst="rect">
-            <a:avLst/>
-          </a:prstGeom>
-        </p:spPr>
-        <p:txBody>
-          <a:bodyPr vert="horz" wrap="square" lIns="91440" tIns="45720" rIns="91440" bIns="45720" rtlCol="0" anchor="b">
-            <a:noAutofit/>
-          </a:bodyPr>
-          <a:lstStyle>
-            <a:lvl1pPr algn="l" defTabSz="914400" rtl="0" eaLnBrk="1" latinLnBrk="0" hangingPunct="1">
-              <a:lnSpc>
-                <a:spcPts val="4000"/>
-              </a:lnSpc>
-              <a:spcBef>
-                <a:spcPct val="0"/>
-              </a:spcBef>
-              <a:buNone/>
-              <a:defRPr sz="4800" b="1" i="0" kern="800" cap="all" normalizeH="0" baseline="0">
-                <a:solidFill>
-                  <a:schemeClr val="bg1"/>
-                </a:solidFill>
-                <a:latin typeface="Arial Black" charset="0"/>
-                <a:ea typeface="Arial Black" charset="0"/>
-                <a:cs typeface="Arial Black" charset="0"/>
-              </a:defRPr>
-            </a:lvl1pPr>
-          </a:lstStyle>
-          <a:p>
-            <a:pPr fontAlgn="auto">
-              <a:spcAft>
-                <a:spcPts val="0"/>
-              </a:spcAft>
-            </a:pPr>
-            <a:r>
-              <a:rPr lang="en-US" dirty="0"/>
-              <a:t>Insert your</a:t>
-            </a:r>
-            <a:br>
-              <a:rPr lang="en-US" dirty="0"/>
-            </a:br>
-            <a:r>
-              <a:rPr lang="en-US" dirty="0"/>
-              <a:t>headline here</a:t>
-            </a:r>
-            <a:br>
-              <a:rPr lang="en-US" dirty="0"/>
-            </a:br>
-            <a:r>
-              <a:rPr lang="en-US" dirty="0"/>
-              <a:t>up to 3 lines</a:t>
-            </a:r>
-          </a:p>
-        </p:txBody>
-      </p:sp>
-      <p:sp>
-        <p:nvSpPr>
-          <p:cNvPr id="15" name="Text Placeholder 9"/>
-          <p:cNvSpPr txBox="1">
-            <a:spLocks/>
-          </p:cNvSpPr>
-          <p:nvPr/>
-        </p:nvSpPr>
-        <p:spPr>
-          <a:xfrm>
-            <a:off x="548640" y="3333749"/>
-            <a:ext cx="7886700" cy="457201"/>
-          </a:xfrm>
-          <a:prstGeom prst="rect">
-            <a:avLst/>
-          </a:prstGeom>
-        </p:spPr>
-        <p:txBody>
-          <a:bodyPr vert="horz" lIns="91440" tIns="45720" rIns="91440" bIns="45720" rtlCol="0">
-            <a:noAutofit/>
-          </a:bodyPr>
-          <a:lstStyle>
-            <a:lvl1pPr marL="0" indent="0" algn="l" defTabSz="914400" rtl="0" eaLnBrk="1" latinLnBrk="0" hangingPunct="1">
-              <a:lnSpc>
-                <a:spcPct val="90000"/>
-              </a:lnSpc>
-              <a:spcBef>
-                <a:spcPts val="1000"/>
-              </a:spcBef>
-              <a:buFont typeface="Arial"/>
-              <a:buNone/>
-              <a:defRPr sz="1400" b="0" i="0" kern="1200" baseline="0">
-                <a:solidFill>
-                  <a:schemeClr val="bg1"/>
-                </a:solidFill>
-                <a:latin typeface="Arial" charset="0"/>
-                <a:ea typeface="Arial" charset="0"/>
-                <a:cs typeface="Arial" charset="0"/>
-              </a:defRPr>
-            </a:lvl1pPr>
-            <a:lvl2pPr marL="685800" indent="-228600" algn="l" defTabSz="914400" rtl="0" eaLnBrk="1" latinLnBrk="0" hangingPunct="1">
-              <a:lnSpc>
-                <a:spcPct val="90000"/>
-              </a:lnSpc>
-              <a:spcBef>
-                <a:spcPts val="500"/>
-              </a:spcBef>
-              <a:buFont typeface="Arial"/>
-              <a:buChar char="•"/>
-              <a:defRPr sz="2400" b="0" i="0" kern="1200">
-                <a:solidFill>
-                  <a:schemeClr val="bg1"/>
-                </a:solidFill>
-                <a:latin typeface="Arial" charset="0"/>
-                <a:ea typeface="Arial" charset="0"/>
-                <a:cs typeface="Arial" charset="0"/>
-              </a:defRPr>
-            </a:lvl2pPr>
-            <a:lvl3pPr marL="1143000" indent="-228600" algn="l" defTabSz="914400" rtl="0" eaLnBrk="1" latinLnBrk="0" hangingPunct="1">
-              <a:lnSpc>
-                <a:spcPct val="90000"/>
-              </a:lnSpc>
-              <a:spcBef>
-                <a:spcPts val="500"/>
-              </a:spcBef>
-              <a:buFont typeface="Arial"/>
-              <a:buChar char="•"/>
-              <a:defRPr sz="2000" b="0" i="0" kern="1200">
-                <a:solidFill>
-                  <a:schemeClr val="bg1"/>
-                </a:solidFill>
-                <a:latin typeface="Arial" charset="0"/>
-                <a:ea typeface="Arial" charset="0"/>
-                <a:cs typeface="Arial" charset="0"/>
-              </a:defRPr>
-            </a:lvl3pPr>
-            <a:lvl4pPr marL="1600200" indent="-228600" algn="l" defTabSz="914400" rtl="0" eaLnBrk="1" latinLnBrk="0" hangingPunct="1">
-              <a:lnSpc>
-                <a:spcPct val="90000"/>
-              </a:lnSpc>
-              <a:spcBef>
-                <a:spcPts val="500"/>
-              </a:spcBef>
-              <a:buFont typeface="Arial"/>
-              <a:buChar char="•"/>
-              <a:defRPr sz="1800" b="0" i="0" kern="1200">
-                <a:solidFill>
-                  <a:schemeClr val="bg1"/>
-                </a:solidFill>
-                <a:latin typeface="Arial" charset="0"/>
-                <a:ea typeface="Arial" charset="0"/>
-                <a:cs typeface="Arial" charset="0"/>
-              </a:defRPr>
-            </a:lvl4pPr>
-            <a:lvl5pPr marL="2057400" indent="-228600" algn="l" defTabSz="914400" rtl="0" eaLnBrk="1" latinLnBrk="0" hangingPunct="1">
-              <a:lnSpc>
-                <a:spcPct val="90000"/>
-              </a:lnSpc>
-              <a:spcBef>
-                <a:spcPts val="500"/>
-              </a:spcBef>
-              <a:buFont typeface="Arial"/>
-              <a:buChar char="•"/>
-              <a:defRPr sz="1800" b="0" i="0" kern="1200">
-                <a:solidFill>
-                  <a:schemeClr val="bg1"/>
-                </a:solidFill>
-                <a:latin typeface="Arial" charset="0"/>
-                <a:ea typeface="Arial" charset="0"/>
-                <a:cs typeface="Arial" charset="0"/>
-              </a:defRPr>
-            </a:lvl5pPr>
-            <a:lvl6pPr marL="2514600" indent="-228600" algn="l" defTabSz="914400" rtl="0" eaLnBrk="1" latinLnBrk="0" hangingPunct="1">
-              <a:lnSpc>
-                <a:spcPct val="90000"/>
-              </a:lnSpc>
-              <a:spcBef>
-                <a:spcPts val="500"/>
-              </a:spcBef>
-              <a:buFont typeface="Arial"/>
-              <a:buChar char="•"/>
-              <a:defRPr sz="1800" kern="1200">
-                <a:solidFill>
-                  <a:schemeClr val="tx1"/>
-                </a:solidFill>
-                <a:latin typeface="+mn-lt"/>
-                <a:ea typeface="+mn-ea"/>
-                <a:cs typeface="+mn-cs"/>
-              </a:defRPr>
-            </a:lvl6pPr>
-            <a:lvl7pPr marL="2971800" indent="-228600" algn="l" defTabSz="914400" rtl="0" eaLnBrk="1" latinLnBrk="0" hangingPunct="1">
-              <a:lnSpc>
-                <a:spcPct val="90000"/>
-              </a:lnSpc>
-              <a:spcBef>
-                <a:spcPts val="500"/>
-              </a:spcBef>
-              <a:buFont typeface="Arial"/>
-              <a:buChar char="•"/>
-              <a:defRPr sz="1800" kern="1200">
-                <a:solidFill>
-                  <a:schemeClr val="tx1"/>
-                </a:solidFill>
-                <a:latin typeface="+mn-lt"/>
-                <a:ea typeface="+mn-ea"/>
-                <a:cs typeface="+mn-cs"/>
-              </a:defRPr>
-            </a:lvl7pPr>
-            <a:lvl8pPr marL="3429000" indent="-228600" algn="l" defTabSz="914400" rtl="0" eaLnBrk="1" latinLnBrk="0" hangingPunct="1">
-              <a:lnSpc>
-                <a:spcPct val="90000"/>
-              </a:lnSpc>
-              <a:spcBef>
-                <a:spcPts val="500"/>
-              </a:spcBef>
-              <a:buFont typeface="Arial"/>
-              <a:buChar char="•"/>
-              <a:defRPr sz="1800" kern="1200">
-                <a:solidFill>
-                  <a:schemeClr val="tx1"/>
-                </a:solidFill>
-                <a:latin typeface="+mn-lt"/>
-                <a:ea typeface="+mn-ea"/>
-                <a:cs typeface="+mn-cs"/>
-              </a:defRPr>
-            </a:lvl8pPr>
-            <a:lvl9pPr marL="3886200" indent="-228600" algn="l" defTabSz="914400" rtl="0" eaLnBrk="1" latinLnBrk="0" hangingPunct="1">
-              <a:lnSpc>
-                <a:spcPct val="90000"/>
-              </a:lnSpc>
-              <a:spcBef>
-                <a:spcPts val="500"/>
-              </a:spcBef>
-              <a:buFont typeface="Arial"/>
-              <a:buChar char="•"/>
-              <a:defRPr sz="1800" kern="1200">
-                <a:solidFill>
-                  <a:schemeClr val="tx1"/>
-                </a:solidFill>
-                <a:latin typeface="+mn-lt"/>
-                <a:ea typeface="+mn-ea"/>
-                <a:cs typeface="+mn-cs"/>
-              </a:defRPr>
-            </a:lvl9pPr>
-          </a:lstStyle>
-          <a:p>
-            <a:pPr fontAlgn="auto">
-              <a:spcAft>
-                <a:spcPts val="0"/>
-              </a:spcAft>
-            </a:pPr>
-            <a:r>
-              <a:rPr lang="en-US" dirty="0"/>
-              <a:t>Insert your subtitle or any additional description text here up to</a:t>
-            </a:r>
-            <a:br>
-              <a:rPr lang="en-US" dirty="0"/>
-            </a:br>
-            <a:r>
-              <a:rPr lang="en-US" dirty="0"/>
-              <a:t>two lines of text or you can delete this text box</a:t>
+              <a:t>ECE312</a:t>
             </a:r>
           </a:p>
         </p:txBody>
@@ -9618,20 +8417,18 @@
 </p:sld>
 </file>
 
-<file path=ppt/slides/slide5.xml><?xml version="1.0" encoding="utf-8"?>
+<file path=ppt/slides/slide10.xml><?xml version="1.0" encoding="utf-8"?>
 <p:sld xmlns:a="http://schemas.openxmlformats.org/drawingml/2006/main" xmlns:r="http://schemas.openxmlformats.org/officeDocument/2006/relationships" xmlns:p="http://schemas.openxmlformats.org/presentationml/2006/main">
   <p:cSld>
-    <p:bg>
-      <p:bgPr>
-        <a:solidFill>
-          <a:schemeClr val="bg1"/>
-        </a:solidFill>
-        <a:effectLst/>
-      </p:bgPr>
-    </p:bg>
     <p:spTree>
       <p:nvGrpSpPr>
-        <p:cNvPr id="1" name=""/>
+        <p:cNvPr id="1" name="">
+          <a:extLst>
+            <a:ext uri="{FF2B5EF4-FFF2-40B4-BE49-F238E27FC236}">
+              <a16:creationId xmlns:a16="http://schemas.microsoft.com/office/drawing/2014/main" id="{77E60BDF-075A-EB2A-597E-472EA8C525F5}"/>
+            </a:ext>
+          </a:extLst>
+        </p:cNvPr>
         <p:cNvGrpSpPr/>
         <p:nvPr/>
       </p:nvGrpSpPr>
@@ -9643,800 +8440,95 @@
           <a:chExt cx="0" cy="0"/>
         </a:xfrm>
       </p:grpSpPr>
-      <p:cxnSp>
-        <p:nvCxnSpPr>
-          <p:cNvPr id="10" name="Straight Connector 9"/>
-          <p:cNvCxnSpPr/>
-          <p:nvPr/>
-        </p:nvCxnSpPr>
+      <p:sp>
+        <p:nvSpPr>
+          <p:cNvPr id="4" name="Title 3">
+            <a:extLst>
+              <a:ext uri="{FF2B5EF4-FFF2-40B4-BE49-F238E27FC236}">
+                <a16:creationId xmlns:a16="http://schemas.microsoft.com/office/drawing/2014/main" id="{0715A6DF-F4CB-354D-6CC5-1A6A5E5604E5}"/>
+              </a:ext>
+            </a:extLst>
+          </p:cNvPr>
+          <p:cNvSpPr>
+            <a:spLocks noGrp="1"/>
+          </p:cNvSpPr>
+          <p:nvPr>
+            <p:ph type="title"/>
+          </p:nvPr>
+        </p:nvSpPr>
         <p:spPr>
           <a:xfrm>
-            <a:off x="628650" y="3105150"/>
-            <a:ext cx="5619750" cy="0"/>
+            <a:off x="452718" y="438150"/>
+            <a:ext cx="8229600" cy="685800"/>
           </a:xfrm>
-          <a:prstGeom prst="line">
-            <a:avLst/>
-          </a:prstGeom>
-          <a:ln w="19050">
-            <a:solidFill>
-              <a:srgbClr val="BF5700"/>
-            </a:solidFill>
-          </a:ln>
         </p:spPr>
-        <p:style>
-          <a:lnRef idx="1">
-            <a:schemeClr val="accent1"/>
-          </a:lnRef>
-          <a:fillRef idx="0">
-            <a:schemeClr val="accent1"/>
-          </a:fillRef>
-          <a:effectRef idx="0">
-            <a:schemeClr val="accent1"/>
-          </a:effectRef>
-          <a:fontRef idx="minor">
-            <a:schemeClr val="tx1"/>
-          </a:fontRef>
-        </p:style>
-      </p:cxnSp>
-      <p:sp>
-        <p:nvSpPr>
-          <p:cNvPr id="11" name="Text Placeholder 9"/>
-          <p:cNvSpPr txBox="1">
-            <a:spLocks/>
-          </p:cNvSpPr>
-          <p:nvPr/>
+        <p:txBody>
+          <a:bodyPr>
+            <a:normAutofit/>
+          </a:bodyPr>
+          <a:lstStyle/>
+          <a:p>
+            <a:r>
+              <a:rPr lang="en-US" sz="3200" dirty="0"/>
+              <a:t>Review: Malloc and Free</a:t>
+            </a:r>
+          </a:p>
+        </p:txBody>
+      </p:sp>
+      <p:sp>
+        <p:nvSpPr>
+          <p:cNvPr id="5" name="Content Placeholder 4">
+            <a:extLst>
+              <a:ext uri="{FF2B5EF4-FFF2-40B4-BE49-F238E27FC236}">
+                <a16:creationId xmlns:a16="http://schemas.microsoft.com/office/drawing/2014/main" id="{C2726510-B241-6B12-A309-DDCBDBB186BF}"/>
+              </a:ext>
+            </a:extLst>
+          </p:cNvPr>
+          <p:cNvSpPr>
+            <a:spLocks noGrp="1"/>
+          </p:cNvSpPr>
+          <p:nvPr>
+            <p:ph idx="1"/>
+          </p:nvPr>
         </p:nvSpPr>
         <p:spPr>
           <a:xfrm>
-            <a:off x="548640" y="4114800"/>
-            <a:ext cx="7886700" cy="457201"/>
+            <a:off x="461682" y="1123950"/>
+            <a:ext cx="8229600" cy="3962400"/>
           </a:xfrm>
-          <a:prstGeom prst="rect">
-            <a:avLst/>
-          </a:prstGeom>
         </p:spPr>
         <p:txBody>
-          <a:bodyPr vert="horz" lIns="91440" tIns="45720" rIns="91440" bIns="45720" rtlCol="0" anchor="b">
-            <a:noAutofit/>
+          <a:bodyPr>
+            <a:normAutofit/>
           </a:bodyPr>
-          <a:lstStyle>
-            <a:lvl1pPr marL="0" indent="0" algn="l" defTabSz="914400" rtl="0" eaLnBrk="1" latinLnBrk="0" hangingPunct="1">
-              <a:lnSpc>
-                <a:spcPct val="90000"/>
-              </a:lnSpc>
-              <a:spcBef>
-                <a:spcPts val="1000"/>
-              </a:spcBef>
-              <a:buFont typeface="Arial"/>
-              <a:buNone/>
-              <a:defRPr sz="1600" b="0" i="0" kern="1200" baseline="0">
-                <a:solidFill>
-                  <a:schemeClr val="bg1"/>
-                </a:solidFill>
-                <a:latin typeface="Arial" charset="0"/>
-                <a:ea typeface="Arial" charset="0"/>
-                <a:cs typeface="Arial" charset="0"/>
-              </a:defRPr>
-            </a:lvl1pPr>
-            <a:lvl2pPr marL="685800" indent="-228600" algn="l" defTabSz="914400" rtl="0" eaLnBrk="1" latinLnBrk="0" hangingPunct="1">
-              <a:lnSpc>
-                <a:spcPct val="90000"/>
-              </a:lnSpc>
-              <a:spcBef>
-                <a:spcPts val="500"/>
-              </a:spcBef>
-              <a:buFont typeface="Arial"/>
-              <a:buChar char="•"/>
-              <a:defRPr sz="2400" b="0" i="0" kern="1200">
-                <a:solidFill>
-                  <a:schemeClr val="bg1"/>
-                </a:solidFill>
-                <a:latin typeface="Arial" charset="0"/>
-                <a:ea typeface="Arial" charset="0"/>
-                <a:cs typeface="Arial" charset="0"/>
-              </a:defRPr>
-            </a:lvl2pPr>
-            <a:lvl3pPr marL="1143000" indent="-228600" algn="l" defTabSz="914400" rtl="0" eaLnBrk="1" latinLnBrk="0" hangingPunct="1">
-              <a:lnSpc>
-                <a:spcPct val="90000"/>
-              </a:lnSpc>
-              <a:spcBef>
-                <a:spcPts val="500"/>
-              </a:spcBef>
-              <a:buFont typeface="Arial"/>
-              <a:buChar char="•"/>
-              <a:defRPr sz="2000" b="0" i="0" kern="1200">
-                <a:solidFill>
-                  <a:schemeClr val="bg1"/>
-                </a:solidFill>
-                <a:latin typeface="Arial" charset="0"/>
-                <a:ea typeface="Arial" charset="0"/>
-                <a:cs typeface="Arial" charset="0"/>
-              </a:defRPr>
-            </a:lvl3pPr>
-            <a:lvl4pPr marL="1600200" indent="-228600" algn="l" defTabSz="914400" rtl="0" eaLnBrk="1" latinLnBrk="0" hangingPunct="1">
-              <a:lnSpc>
-                <a:spcPct val="90000"/>
-              </a:lnSpc>
-              <a:spcBef>
-                <a:spcPts val="500"/>
-              </a:spcBef>
-              <a:buFont typeface="Arial"/>
-              <a:buChar char="•"/>
-              <a:defRPr sz="1800" b="0" i="0" kern="1200">
-                <a:solidFill>
-                  <a:schemeClr val="bg1"/>
-                </a:solidFill>
-                <a:latin typeface="Arial" charset="0"/>
-                <a:ea typeface="Arial" charset="0"/>
-                <a:cs typeface="Arial" charset="0"/>
-              </a:defRPr>
-            </a:lvl4pPr>
-            <a:lvl5pPr marL="2057400" indent="-228600" algn="l" defTabSz="914400" rtl="0" eaLnBrk="1" latinLnBrk="0" hangingPunct="1">
-              <a:lnSpc>
-                <a:spcPct val="90000"/>
-              </a:lnSpc>
-              <a:spcBef>
-                <a:spcPts val="500"/>
-              </a:spcBef>
-              <a:buFont typeface="Arial"/>
-              <a:buChar char="•"/>
-              <a:defRPr sz="1800" b="0" i="0" kern="1200">
-                <a:solidFill>
-                  <a:schemeClr val="bg1"/>
-                </a:solidFill>
-                <a:latin typeface="Arial" charset="0"/>
-                <a:ea typeface="Arial" charset="0"/>
-                <a:cs typeface="Arial" charset="0"/>
-              </a:defRPr>
-            </a:lvl5pPr>
-            <a:lvl6pPr marL="2514600" indent="-228600" algn="l" defTabSz="914400" rtl="0" eaLnBrk="1" latinLnBrk="0" hangingPunct="1">
-              <a:lnSpc>
-                <a:spcPct val="90000"/>
-              </a:lnSpc>
-              <a:spcBef>
-                <a:spcPts val="500"/>
-              </a:spcBef>
-              <a:buFont typeface="Arial"/>
-              <a:buChar char="•"/>
-              <a:defRPr sz="1800" kern="1200">
-                <a:solidFill>
-                  <a:schemeClr val="tx1"/>
-                </a:solidFill>
-                <a:latin typeface="+mn-lt"/>
-                <a:ea typeface="+mn-ea"/>
-                <a:cs typeface="+mn-cs"/>
-              </a:defRPr>
-            </a:lvl6pPr>
-            <a:lvl7pPr marL="2971800" indent="-228600" algn="l" defTabSz="914400" rtl="0" eaLnBrk="1" latinLnBrk="0" hangingPunct="1">
-              <a:lnSpc>
-                <a:spcPct val="90000"/>
-              </a:lnSpc>
-              <a:spcBef>
-                <a:spcPts val="500"/>
-              </a:spcBef>
-              <a:buFont typeface="Arial"/>
-              <a:buChar char="•"/>
-              <a:defRPr sz="1800" kern="1200">
-                <a:solidFill>
-                  <a:schemeClr val="tx1"/>
-                </a:solidFill>
-                <a:latin typeface="+mn-lt"/>
-                <a:ea typeface="+mn-ea"/>
-                <a:cs typeface="+mn-cs"/>
-              </a:defRPr>
-            </a:lvl7pPr>
-            <a:lvl8pPr marL="3429000" indent="-228600" algn="l" defTabSz="914400" rtl="0" eaLnBrk="1" latinLnBrk="0" hangingPunct="1">
-              <a:lnSpc>
-                <a:spcPct val="90000"/>
-              </a:lnSpc>
-              <a:spcBef>
-                <a:spcPts val="500"/>
-              </a:spcBef>
-              <a:buFont typeface="Arial"/>
-              <a:buChar char="•"/>
-              <a:defRPr sz="1800" kern="1200">
-                <a:solidFill>
-                  <a:schemeClr val="tx1"/>
-                </a:solidFill>
-                <a:latin typeface="+mn-lt"/>
-                <a:ea typeface="+mn-ea"/>
-                <a:cs typeface="+mn-cs"/>
-              </a:defRPr>
-            </a:lvl8pPr>
-            <a:lvl9pPr marL="3886200" indent="-228600" algn="l" defTabSz="914400" rtl="0" eaLnBrk="1" latinLnBrk="0" hangingPunct="1">
-              <a:lnSpc>
-                <a:spcPct val="90000"/>
-              </a:lnSpc>
-              <a:spcBef>
-                <a:spcPts val="500"/>
-              </a:spcBef>
-              <a:buFont typeface="Arial"/>
-              <a:buChar char="•"/>
-              <a:defRPr sz="1800" kern="1200">
-                <a:solidFill>
-                  <a:schemeClr val="tx1"/>
-                </a:solidFill>
-                <a:latin typeface="+mn-lt"/>
-                <a:ea typeface="+mn-ea"/>
-                <a:cs typeface="+mn-cs"/>
-              </a:defRPr>
-            </a:lvl9pPr>
-          </a:lstStyle>
-          <a:p>
-            <a:pPr fontAlgn="auto">
-              <a:lnSpc>
-                <a:spcPct val="50000"/>
-              </a:lnSpc>
-              <a:spcAft>
-                <a:spcPts val="0"/>
-              </a:spcAft>
+          <a:lstStyle/>
+          <a:p>
+            <a:pPr marL="0" indent="0">
+              <a:buNone/>
             </a:pPr>
-            <a:r>
-              <a:rPr lang="en-US" sz="1050" b="0" i="0" cap="all" baseline="0" dirty="0">
-                <a:solidFill>
-                  <a:srgbClr val="BF5700"/>
-                </a:solidFill>
-                <a:latin typeface="Arial Black" charset="0"/>
-              </a:rPr>
-              <a:t>Presenter or speaker name</a:t>
-            </a:r>
-          </a:p>
-          <a:p>
-            <a:pPr fontAlgn="auto">
-              <a:lnSpc>
-                <a:spcPct val="30000"/>
-              </a:lnSpc>
-              <a:spcAft>
-                <a:spcPts val="0"/>
-              </a:spcAft>
-            </a:pPr>
-            <a:r>
-              <a:rPr lang="en-US" sz="1050" dirty="0">
-                <a:solidFill>
-                  <a:srgbClr val="BF5700"/>
-                </a:solidFill>
-              </a:rPr>
-              <a:t>Position/Role,</a:t>
-            </a:r>
-            <a:r>
-              <a:rPr lang="en-US" sz="1050" baseline="0" dirty="0">
-                <a:solidFill>
-                  <a:srgbClr val="BF5700"/>
-                </a:solidFill>
-              </a:rPr>
-              <a:t> The University of Texas at Austin</a:t>
-            </a:r>
-            <a:endParaRPr lang="en-US" sz="1050" dirty="0">
-              <a:solidFill>
-                <a:srgbClr val="BF5700"/>
-              </a:solidFill>
-            </a:endParaRPr>
-          </a:p>
-        </p:txBody>
-      </p:sp>
-      <p:sp>
-        <p:nvSpPr>
-          <p:cNvPr id="12" name="Text Placeholder 9"/>
-          <p:cNvSpPr txBox="1">
-            <a:spLocks/>
-          </p:cNvSpPr>
-          <p:nvPr/>
-        </p:nvSpPr>
-        <p:spPr>
-          <a:xfrm>
-            <a:off x="548640" y="457200"/>
-            <a:ext cx="7828444" cy="389296"/>
-          </a:xfrm>
-          <a:prstGeom prst="rect">
-            <a:avLst/>
-          </a:prstGeom>
-        </p:spPr>
-        <p:txBody>
-          <a:bodyPr vert="horz" lIns="91440" tIns="45720" rIns="91440" bIns="45720" rtlCol="0" anchor="ctr">
-            <a:noAutofit/>
-          </a:bodyPr>
-          <a:lstStyle>
-            <a:lvl1pPr marL="0" indent="0" algn="l" defTabSz="914400" rtl="0" eaLnBrk="1" latinLnBrk="0" hangingPunct="1">
-              <a:lnSpc>
-                <a:spcPct val="90000"/>
-              </a:lnSpc>
-              <a:spcBef>
-                <a:spcPts val="1000"/>
-              </a:spcBef>
-              <a:buFont typeface="Arial"/>
-              <a:buNone/>
-              <a:defRPr sz="1600" b="0" i="0" kern="1200" baseline="0">
-                <a:solidFill>
-                  <a:schemeClr val="bg1"/>
-                </a:solidFill>
-                <a:latin typeface="Arial" charset="0"/>
-                <a:ea typeface="Arial" charset="0"/>
-                <a:cs typeface="Arial" charset="0"/>
-              </a:defRPr>
-            </a:lvl1pPr>
-            <a:lvl2pPr marL="685800" indent="-228600" algn="l" defTabSz="914400" rtl="0" eaLnBrk="1" latinLnBrk="0" hangingPunct="1">
-              <a:lnSpc>
-                <a:spcPct val="90000"/>
-              </a:lnSpc>
-              <a:spcBef>
-                <a:spcPts val="500"/>
-              </a:spcBef>
-              <a:buFont typeface="Arial"/>
-              <a:buChar char="•"/>
-              <a:defRPr sz="2400" b="0" i="0" kern="1200">
-                <a:solidFill>
-                  <a:schemeClr val="bg1"/>
-                </a:solidFill>
-                <a:latin typeface="Arial" charset="0"/>
-                <a:ea typeface="Arial" charset="0"/>
-                <a:cs typeface="Arial" charset="0"/>
-              </a:defRPr>
-            </a:lvl2pPr>
-            <a:lvl3pPr marL="1143000" indent="-228600" algn="l" defTabSz="914400" rtl="0" eaLnBrk="1" latinLnBrk="0" hangingPunct="1">
-              <a:lnSpc>
-                <a:spcPct val="90000"/>
-              </a:lnSpc>
-              <a:spcBef>
-                <a:spcPts val="500"/>
-              </a:spcBef>
-              <a:buFont typeface="Arial"/>
-              <a:buChar char="•"/>
-              <a:defRPr sz="2000" b="0" i="0" kern="1200">
-                <a:solidFill>
-                  <a:schemeClr val="bg1"/>
-                </a:solidFill>
-                <a:latin typeface="Arial" charset="0"/>
-                <a:ea typeface="Arial" charset="0"/>
-                <a:cs typeface="Arial" charset="0"/>
-              </a:defRPr>
-            </a:lvl3pPr>
-            <a:lvl4pPr marL="1600200" indent="-228600" algn="l" defTabSz="914400" rtl="0" eaLnBrk="1" latinLnBrk="0" hangingPunct="1">
-              <a:lnSpc>
-                <a:spcPct val="90000"/>
-              </a:lnSpc>
-              <a:spcBef>
-                <a:spcPts val="500"/>
-              </a:spcBef>
-              <a:buFont typeface="Arial"/>
-              <a:buChar char="•"/>
-              <a:defRPr sz="1800" b="0" i="0" kern="1200">
-                <a:solidFill>
-                  <a:schemeClr val="bg1"/>
-                </a:solidFill>
-                <a:latin typeface="Arial" charset="0"/>
-                <a:ea typeface="Arial" charset="0"/>
-                <a:cs typeface="Arial" charset="0"/>
-              </a:defRPr>
-            </a:lvl4pPr>
-            <a:lvl5pPr marL="2057400" indent="-228600" algn="l" defTabSz="914400" rtl="0" eaLnBrk="1" latinLnBrk="0" hangingPunct="1">
-              <a:lnSpc>
-                <a:spcPct val="90000"/>
-              </a:lnSpc>
-              <a:spcBef>
-                <a:spcPts val="500"/>
-              </a:spcBef>
-              <a:buFont typeface="Arial"/>
-              <a:buChar char="•"/>
-              <a:defRPr sz="1800" b="0" i="0" kern="1200">
-                <a:solidFill>
-                  <a:schemeClr val="bg1"/>
-                </a:solidFill>
-                <a:latin typeface="Arial" charset="0"/>
-                <a:ea typeface="Arial" charset="0"/>
-                <a:cs typeface="Arial" charset="0"/>
-              </a:defRPr>
-            </a:lvl5pPr>
-            <a:lvl6pPr marL="2514600" indent="-228600" algn="l" defTabSz="914400" rtl="0" eaLnBrk="1" latinLnBrk="0" hangingPunct="1">
-              <a:lnSpc>
-                <a:spcPct val="90000"/>
-              </a:lnSpc>
-              <a:spcBef>
-                <a:spcPts val="500"/>
-              </a:spcBef>
-              <a:buFont typeface="Arial"/>
-              <a:buChar char="•"/>
-              <a:defRPr sz="1800" kern="1200">
-                <a:solidFill>
-                  <a:schemeClr val="tx1"/>
-                </a:solidFill>
-                <a:latin typeface="+mn-lt"/>
-                <a:ea typeface="+mn-ea"/>
-                <a:cs typeface="+mn-cs"/>
-              </a:defRPr>
-            </a:lvl6pPr>
-            <a:lvl7pPr marL="2971800" indent="-228600" algn="l" defTabSz="914400" rtl="0" eaLnBrk="1" latinLnBrk="0" hangingPunct="1">
-              <a:lnSpc>
-                <a:spcPct val="90000"/>
-              </a:lnSpc>
-              <a:spcBef>
-                <a:spcPts val="500"/>
-              </a:spcBef>
-              <a:buFont typeface="Arial"/>
-              <a:buChar char="•"/>
-              <a:defRPr sz="1800" kern="1200">
-                <a:solidFill>
-                  <a:schemeClr val="tx1"/>
-                </a:solidFill>
-                <a:latin typeface="+mn-lt"/>
-                <a:ea typeface="+mn-ea"/>
-                <a:cs typeface="+mn-cs"/>
-              </a:defRPr>
-            </a:lvl7pPr>
-            <a:lvl8pPr marL="3429000" indent="-228600" algn="l" defTabSz="914400" rtl="0" eaLnBrk="1" latinLnBrk="0" hangingPunct="1">
-              <a:lnSpc>
-                <a:spcPct val="90000"/>
-              </a:lnSpc>
-              <a:spcBef>
-                <a:spcPts val="500"/>
-              </a:spcBef>
-              <a:buFont typeface="Arial"/>
-              <a:buChar char="•"/>
-              <a:defRPr sz="1800" kern="1200">
-                <a:solidFill>
-                  <a:schemeClr val="tx1"/>
-                </a:solidFill>
-                <a:latin typeface="+mn-lt"/>
-                <a:ea typeface="+mn-ea"/>
-                <a:cs typeface="+mn-cs"/>
-              </a:defRPr>
-            </a:lvl8pPr>
-            <a:lvl9pPr marL="3886200" indent="-228600" algn="l" defTabSz="914400" rtl="0" eaLnBrk="1" latinLnBrk="0" hangingPunct="1">
-              <a:lnSpc>
-                <a:spcPct val="90000"/>
-              </a:lnSpc>
-              <a:spcBef>
-                <a:spcPts val="500"/>
-              </a:spcBef>
-              <a:buFont typeface="Arial"/>
-              <a:buChar char="•"/>
-              <a:defRPr sz="1800" kern="1200">
-                <a:solidFill>
-                  <a:schemeClr val="tx1"/>
-                </a:solidFill>
-                <a:latin typeface="+mn-lt"/>
-                <a:ea typeface="+mn-ea"/>
-                <a:cs typeface="+mn-cs"/>
-              </a:defRPr>
-            </a:lvl9pPr>
-          </a:lstStyle>
-          <a:p>
-            <a:pPr fontAlgn="auto">
-              <a:spcAft>
-                <a:spcPts val="0"/>
-              </a:spcAft>
-            </a:pPr>
-            <a:r>
-              <a:rPr lang="en-US" sz="1200" b="0" i="0" cap="all" baseline="0" dirty="0">
-                <a:solidFill>
-                  <a:srgbClr val="BF5700"/>
-                </a:solidFill>
-                <a:latin typeface="Arial Black" charset="0"/>
-              </a:rPr>
-              <a:t>Month 20xx</a:t>
-            </a:r>
-            <a:endParaRPr lang="en-US" sz="1200" b="0" dirty="0">
-              <a:solidFill>
-                <a:srgbClr val="BF5700"/>
-              </a:solidFill>
-            </a:endParaRPr>
-          </a:p>
-        </p:txBody>
-      </p:sp>
-      <p:sp>
-        <p:nvSpPr>
-          <p:cNvPr id="13" name="Title Placeholder 7"/>
-          <p:cNvSpPr txBox="1">
-            <a:spLocks/>
-          </p:cNvSpPr>
-          <p:nvPr/>
-        </p:nvSpPr>
-        <p:spPr>
-          <a:xfrm>
-            <a:off x="502920" y="1200150"/>
-            <a:ext cx="7886700" cy="1752600"/>
-          </a:xfrm>
-          <a:prstGeom prst="rect">
-            <a:avLst/>
-          </a:prstGeom>
-        </p:spPr>
-        <p:txBody>
-          <a:bodyPr vert="horz" wrap="square" lIns="91440" tIns="45720" rIns="91440" bIns="45720" rtlCol="0" anchor="b">
-            <a:noAutofit/>
-          </a:bodyPr>
-          <a:lstStyle>
-            <a:lvl1pPr algn="l" defTabSz="914400" rtl="0" eaLnBrk="1" latinLnBrk="0" hangingPunct="1">
-              <a:lnSpc>
-                <a:spcPts val="4000"/>
-              </a:lnSpc>
-              <a:spcBef>
-                <a:spcPct val="0"/>
-              </a:spcBef>
-              <a:buNone/>
-              <a:defRPr sz="4800" b="1" i="0" kern="800" cap="all" normalizeH="0" baseline="0">
-                <a:solidFill>
-                  <a:schemeClr val="bg1"/>
-                </a:solidFill>
-                <a:latin typeface="Arial Black" charset="0"/>
-                <a:ea typeface="Arial Black" charset="0"/>
-                <a:cs typeface="Arial Black" charset="0"/>
-              </a:defRPr>
-            </a:lvl1pPr>
-          </a:lstStyle>
-          <a:p>
-            <a:pPr fontAlgn="auto">
-              <a:spcAft>
-                <a:spcPts val="0"/>
-              </a:spcAft>
-            </a:pPr>
-            <a:r>
-              <a:rPr lang="en-US" dirty="0">
-                <a:solidFill>
-                  <a:srgbClr val="BF5700"/>
-                </a:solidFill>
-              </a:rPr>
-              <a:t>Insert your</a:t>
-            </a:r>
-            <a:br>
-              <a:rPr lang="en-US" dirty="0">
-                <a:solidFill>
-                  <a:srgbClr val="BF5700"/>
-                </a:solidFill>
-              </a:rPr>
-            </a:br>
-            <a:r>
-              <a:rPr lang="en-US" dirty="0">
-                <a:solidFill>
-                  <a:srgbClr val="BF5700"/>
-                </a:solidFill>
-              </a:rPr>
-              <a:t>headline here</a:t>
-            </a:r>
-            <a:br>
-              <a:rPr lang="en-US" dirty="0">
-                <a:solidFill>
-                  <a:srgbClr val="BF5700"/>
-                </a:solidFill>
-              </a:rPr>
-            </a:br>
-            <a:r>
-              <a:rPr lang="en-US" dirty="0">
-                <a:solidFill>
-                  <a:srgbClr val="BF5700"/>
-                </a:solidFill>
-              </a:rPr>
-              <a:t>up to 3 lines</a:t>
-            </a:r>
-          </a:p>
-        </p:txBody>
-      </p:sp>
-      <p:sp>
-        <p:nvSpPr>
-          <p:cNvPr id="15" name="Text Placeholder 9"/>
-          <p:cNvSpPr txBox="1">
-            <a:spLocks/>
-          </p:cNvSpPr>
-          <p:nvPr/>
-        </p:nvSpPr>
-        <p:spPr>
-          <a:xfrm>
-            <a:off x="548640" y="3333749"/>
-            <a:ext cx="7886700" cy="457201"/>
-          </a:xfrm>
-          <a:prstGeom prst="rect">
-            <a:avLst/>
-          </a:prstGeom>
-        </p:spPr>
-        <p:txBody>
-          <a:bodyPr vert="horz" lIns="91440" tIns="45720" rIns="91440" bIns="45720" rtlCol="0">
-            <a:noAutofit/>
-          </a:bodyPr>
-          <a:lstStyle>
-            <a:lvl1pPr marL="0" indent="0" algn="l" defTabSz="914400" rtl="0" eaLnBrk="1" latinLnBrk="0" hangingPunct="1">
-              <a:lnSpc>
-                <a:spcPct val="90000"/>
-              </a:lnSpc>
-              <a:spcBef>
-                <a:spcPts val="1000"/>
-              </a:spcBef>
-              <a:buFont typeface="Arial"/>
-              <a:buNone/>
-              <a:defRPr sz="1400" b="0" i="0" kern="1200" baseline="0">
-                <a:solidFill>
-                  <a:schemeClr val="bg1"/>
-                </a:solidFill>
-                <a:latin typeface="Arial" charset="0"/>
-                <a:ea typeface="Arial" charset="0"/>
-                <a:cs typeface="Arial" charset="0"/>
-              </a:defRPr>
-            </a:lvl1pPr>
-            <a:lvl2pPr marL="685800" indent="-228600" algn="l" defTabSz="914400" rtl="0" eaLnBrk="1" latinLnBrk="0" hangingPunct="1">
-              <a:lnSpc>
-                <a:spcPct val="90000"/>
-              </a:lnSpc>
-              <a:spcBef>
-                <a:spcPts val="500"/>
-              </a:spcBef>
-              <a:buFont typeface="Arial"/>
-              <a:buChar char="•"/>
-              <a:defRPr sz="2400" b="0" i="0" kern="1200">
-                <a:solidFill>
-                  <a:schemeClr val="bg1"/>
-                </a:solidFill>
-                <a:latin typeface="Arial" charset="0"/>
-                <a:ea typeface="Arial" charset="0"/>
-                <a:cs typeface="Arial" charset="0"/>
-              </a:defRPr>
-            </a:lvl2pPr>
-            <a:lvl3pPr marL="1143000" indent="-228600" algn="l" defTabSz="914400" rtl="0" eaLnBrk="1" latinLnBrk="0" hangingPunct="1">
-              <a:lnSpc>
-                <a:spcPct val="90000"/>
-              </a:lnSpc>
-              <a:spcBef>
-                <a:spcPts val="500"/>
-              </a:spcBef>
-              <a:buFont typeface="Arial"/>
-              <a:buChar char="•"/>
-              <a:defRPr sz="2000" b="0" i="0" kern="1200">
-                <a:solidFill>
-                  <a:schemeClr val="bg1"/>
-                </a:solidFill>
-                <a:latin typeface="Arial" charset="0"/>
-                <a:ea typeface="Arial" charset="0"/>
-                <a:cs typeface="Arial" charset="0"/>
-              </a:defRPr>
-            </a:lvl3pPr>
-            <a:lvl4pPr marL="1600200" indent="-228600" algn="l" defTabSz="914400" rtl="0" eaLnBrk="1" latinLnBrk="0" hangingPunct="1">
-              <a:lnSpc>
-                <a:spcPct val="90000"/>
-              </a:lnSpc>
-              <a:spcBef>
-                <a:spcPts val="500"/>
-              </a:spcBef>
-              <a:buFont typeface="Arial"/>
-              <a:buChar char="•"/>
-              <a:defRPr sz="1800" b="0" i="0" kern="1200">
-                <a:solidFill>
-                  <a:schemeClr val="bg1"/>
-                </a:solidFill>
-                <a:latin typeface="Arial" charset="0"/>
-                <a:ea typeface="Arial" charset="0"/>
-                <a:cs typeface="Arial" charset="0"/>
-              </a:defRPr>
-            </a:lvl4pPr>
-            <a:lvl5pPr marL="2057400" indent="-228600" algn="l" defTabSz="914400" rtl="0" eaLnBrk="1" latinLnBrk="0" hangingPunct="1">
-              <a:lnSpc>
-                <a:spcPct val="90000"/>
-              </a:lnSpc>
-              <a:spcBef>
-                <a:spcPts val="500"/>
-              </a:spcBef>
-              <a:buFont typeface="Arial"/>
-              <a:buChar char="•"/>
-              <a:defRPr sz="1800" b="0" i="0" kern="1200">
-                <a:solidFill>
-                  <a:schemeClr val="bg1"/>
-                </a:solidFill>
-                <a:latin typeface="Arial" charset="0"/>
-                <a:ea typeface="Arial" charset="0"/>
-                <a:cs typeface="Arial" charset="0"/>
-              </a:defRPr>
-            </a:lvl5pPr>
-            <a:lvl6pPr marL="2514600" indent="-228600" algn="l" defTabSz="914400" rtl="0" eaLnBrk="1" latinLnBrk="0" hangingPunct="1">
-              <a:lnSpc>
-                <a:spcPct val="90000"/>
-              </a:lnSpc>
-              <a:spcBef>
-                <a:spcPts val="500"/>
-              </a:spcBef>
-              <a:buFont typeface="Arial"/>
-              <a:buChar char="•"/>
-              <a:defRPr sz="1800" kern="1200">
-                <a:solidFill>
-                  <a:schemeClr val="tx1"/>
-                </a:solidFill>
-                <a:latin typeface="+mn-lt"/>
-                <a:ea typeface="+mn-ea"/>
-                <a:cs typeface="+mn-cs"/>
-              </a:defRPr>
-            </a:lvl6pPr>
-            <a:lvl7pPr marL="2971800" indent="-228600" algn="l" defTabSz="914400" rtl="0" eaLnBrk="1" latinLnBrk="0" hangingPunct="1">
-              <a:lnSpc>
-                <a:spcPct val="90000"/>
-              </a:lnSpc>
-              <a:spcBef>
-                <a:spcPts val="500"/>
-              </a:spcBef>
-              <a:buFont typeface="Arial"/>
-              <a:buChar char="•"/>
-              <a:defRPr sz="1800" kern="1200">
-                <a:solidFill>
-                  <a:schemeClr val="tx1"/>
-                </a:solidFill>
-                <a:latin typeface="+mn-lt"/>
-                <a:ea typeface="+mn-ea"/>
-                <a:cs typeface="+mn-cs"/>
-              </a:defRPr>
-            </a:lvl7pPr>
-            <a:lvl8pPr marL="3429000" indent="-228600" algn="l" defTabSz="914400" rtl="0" eaLnBrk="1" latinLnBrk="0" hangingPunct="1">
-              <a:lnSpc>
-                <a:spcPct val="90000"/>
-              </a:lnSpc>
-              <a:spcBef>
-                <a:spcPts val="500"/>
-              </a:spcBef>
-              <a:buFont typeface="Arial"/>
-              <a:buChar char="•"/>
-              <a:defRPr sz="1800" kern="1200">
-                <a:solidFill>
-                  <a:schemeClr val="tx1"/>
-                </a:solidFill>
-                <a:latin typeface="+mn-lt"/>
-                <a:ea typeface="+mn-ea"/>
-                <a:cs typeface="+mn-cs"/>
-              </a:defRPr>
-            </a:lvl8pPr>
-            <a:lvl9pPr marL="3886200" indent="-228600" algn="l" defTabSz="914400" rtl="0" eaLnBrk="1" latinLnBrk="0" hangingPunct="1">
-              <a:lnSpc>
-                <a:spcPct val="90000"/>
-              </a:lnSpc>
-              <a:spcBef>
-                <a:spcPts val="500"/>
-              </a:spcBef>
-              <a:buFont typeface="Arial"/>
-              <a:buChar char="•"/>
-              <a:defRPr sz="1800" kern="1200">
-                <a:solidFill>
-                  <a:schemeClr val="tx1"/>
-                </a:solidFill>
-                <a:latin typeface="+mn-lt"/>
-                <a:ea typeface="+mn-ea"/>
-                <a:cs typeface="+mn-cs"/>
-              </a:defRPr>
-            </a:lvl9pPr>
-          </a:lstStyle>
-          <a:p>
-            <a:pPr fontAlgn="auto">
-              <a:spcAft>
-                <a:spcPts val="0"/>
-              </a:spcAft>
-            </a:pPr>
-            <a:r>
-              <a:rPr lang="en-US" dirty="0">
-                <a:solidFill>
-                  <a:srgbClr val="BF5700"/>
-                </a:solidFill>
-              </a:rPr>
-              <a:t>Insert your subtitle or any additional description text here up to</a:t>
-            </a:r>
-            <a:br>
-              <a:rPr lang="en-US" dirty="0">
-                <a:solidFill>
-                  <a:srgbClr val="BF5700"/>
-                </a:solidFill>
-              </a:rPr>
-            </a:br>
-            <a:r>
-              <a:rPr lang="en-US" dirty="0">
-                <a:solidFill>
-                  <a:srgbClr val="BF5700"/>
-                </a:solidFill>
-              </a:rPr>
-              <a:t>two lines of text or you can delete this text box</a:t>
-            </a:r>
+            <a:endParaRPr lang="en-US" sz="1800" dirty="0"/>
+          </a:p>
+          <a:p>
+            <a:endParaRPr lang="en-US" sz="1800" dirty="0"/>
           </a:p>
         </p:txBody>
       </p:sp>
       <p:pic>
         <p:nvPicPr>
-          <p:cNvPr id="16" name="Picture 15"/>
+          <p:cNvPr id="7" name="Picture 6" descr="A screenshot of a computer program&#10;&#10;AI-generated content may be incorrect.">
+            <a:extLst>
+              <a:ext uri="{FF2B5EF4-FFF2-40B4-BE49-F238E27FC236}">
+                <a16:creationId xmlns:a16="http://schemas.microsoft.com/office/drawing/2014/main" id="{C05237C0-EC01-7592-27BC-BE103844942E}"/>
+              </a:ext>
+            </a:extLst>
+          </p:cNvPr>
           <p:cNvPicPr>
             <a:picLocks noChangeAspect="1"/>
           </p:cNvPicPr>
           <p:nvPr/>
         </p:nvPicPr>
         <p:blipFill>
-          <a:blip r:embed="rId3" cstate="print">
+          <a:blip r:embed="rId3">
             <a:extLst>
               <a:ext uri="{28A0092B-C50C-407E-A947-70E740481C1C}">
                 <a14:useLocalDpi xmlns:a14="http://schemas.microsoft.com/office/drawing/2010/main" val="0"/>
@@ -10449,8 +8541,841 @@
         </p:blipFill>
         <p:spPr>
           <a:xfrm>
-            <a:off x="6978699" y="320040"/>
-            <a:ext cx="1877397" cy="914399"/>
+            <a:off x="304800" y="1047750"/>
+            <a:ext cx="4419600" cy="3904695"/>
+          </a:xfrm>
+          <a:prstGeom prst="rect">
+            <a:avLst/>
+          </a:prstGeom>
+        </p:spPr>
+      </p:pic>
+      <p:sp>
+        <p:nvSpPr>
+          <p:cNvPr id="8" name="TextBox 7">
+            <a:extLst>
+              <a:ext uri="{FF2B5EF4-FFF2-40B4-BE49-F238E27FC236}">
+                <a16:creationId xmlns:a16="http://schemas.microsoft.com/office/drawing/2014/main" id="{2DFE1DD8-8331-2A06-080D-6FAFDD22D6E7}"/>
+              </a:ext>
+            </a:extLst>
+          </p:cNvPr>
+          <p:cNvSpPr txBox="1"/>
+          <p:nvPr/>
+        </p:nvSpPr>
+        <p:spPr>
+          <a:xfrm>
+            <a:off x="5410200" y="2114550"/>
+            <a:ext cx="3581400" cy="1200329"/>
+          </a:xfrm>
+          <a:prstGeom prst="rect">
+            <a:avLst/>
+          </a:prstGeom>
+          <a:noFill/>
+        </p:spPr>
+        <p:txBody>
+          <a:bodyPr wrap="square" rtlCol="0">
+            <a:spAutoFit/>
+          </a:bodyPr>
+          <a:lstStyle/>
+          <a:p>
+            <a:r>
+              <a:rPr lang="en-US" dirty="0">
+                <a:solidFill>
+                  <a:schemeClr val="bg1"/>
+                </a:solidFill>
+              </a:rPr>
+              <a:t>What is wrong with the following code? Is anything wrong?</a:t>
+            </a:r>
+          </a:p>
+        </p:txBody>
+      </p:sp>
+    </p:spTree>
+    <p:extLst>
+      <p:ext uri="{BB962C8B-B14F-4D97-AF65-F5344CB8AC3E}">
+        <p14:creationId xmlns:p14="http://schemas.microsoft.com/office/powerpoint/2010/main" val="3491766170"/>
+      </p:ext>
+    </p:extLst>
+  </p:cSld>
+  <p:clrMapOvr>
+    <a:masterClrMapping/>
+  </p:clrMapOvr>
+</p:sld>
+</file>
+
+<file path=ppt/slides/slide11.xml><?xml version="1.0" encoding="utf-8"?>
+<p:sld xmlns:a="http://schemas.openxmlformats.org/drawingml/2006/main" xmlns:r="http://schemas.openxmlformats.org/officeDocument/2006/relationships" xmlns:p="http://schemas.openxmlformats.org/presentationml/2006/main">
+  <p:cSld>
+    <p:spTree>
+      <p:nvGrpSpPr>
+        <p:cNvPr id="1" name="">
+          <a:extLst>
+            <a:ext uri="{FF2B5EF4-FFF2-40B4-BE49-F238E27FC236}">
+              <a16:creationId xmlns:a16="http://schemas.microsoft.com/office/drawing/2014/main" id="{91EE70EE-DC59-BEEE-F063-D5A6CD7ADAE0}"/>
+            </a:ext>
+          </a:extLst>
+        </p:cNvPr>
+        <p:cNvGrpSpPr/>
+        <p:nvPr/>
+      </p:nvGrpSpPr>
+      <p:grpSpPr>
+        <a:xfrm>
+          <a:off x="0" y="0"/>
+          <a:ext cx="0" cy="0"/>
+          <a:chOff x="0" y="0"/>
+          <a:chExt cx="0" cy="0"/>
+        </a:xfrm>
+      </p:grpSpPr>
+      <p:sp>
+        <p:nvSpPr>
+          <p:cNvPr id="4" name="Title 3">
+            <a:extLst>
+              <a:ext uri="{FF2B5EF4-FFF2-40B4-BE49-F238E27FC236}">
+                <a16:creationId xmlns:a16="http://schemas.microsoft.com/office/drawing/2014/main" id="{DD9B1D67-4923-C533-1FF3-80965C74087C}"/>
+              </a:ext>
+            </a:extLst>
+          </p:cNvPr>
+          <p:cNvSpPr>
+            <a:spLocks noGrp="1"/>
+          </p:cNvSpPr>
+          <p:nvPr>
+            <p:ph type="title"/>
+          </p:nvPr>
+        </p:nvSpPr>
+        <p:spPr>
+          <a:xfrm>
+            <a:off x="452718" y="438150"/>
+            <a:ext cx="8229600" cy="685800"/>
+          </a:xfrm>
+        </p:spPr>
+        <p:txBody>
+          <a:bodyPr>
+            <a:normAutofit/>
+          </a:bodyPr>
+          <a:lstStyle/>
+          <a:p>
+            <a:r>
+              <a:rPr lang="en-US" sz="3200" dirty="0"/>
+              <a:t>Review: Malloc and Free</a:t>
+            </a:r>
+          </a:p>
+        </p:txBody>
+      </p:sp>
+      <p:sp>
+        <p:nvSpPr>
+          <p:cNvPr id="5" name="Content Placeholder 4">
+            <a:extLst>
+              <a:ext uri="{FF2B5EF4-FFF2-40B4-BE49-F238E27FC236}">
+                <a16:creationId xmlns:a16="http://schemas.microsoft.com/office/drawing/2014/main" id="{BE59517A-F653-9BB2-7440-8116209C0F4F}"/>
+              </a:ext>
+            </a:extLst>
+          </p:cNvPr>
+          <p:cNvSpPr>
+            <a:spLocks noGrp="1"/>
+          </p:cNvSpPr>
+          <p:nvPr>
+            <p:ph idx="1"/>
+          </p:nvPr>
+        </p:nvSpPr>
+        <p:spPr>
+          <a:xfrm>
+            <a:off x="461682" y="1123950"/>
+            <a:ext cx="8229600" cy="3962400"/>
+          </a:xfrm>
+        </p:spPr>
+        <p:txBody>
+          <a:bodyPr>
+            <a:normAutofit/>
+          </a:bodyPr>
+          <a:lstStyle/>
+          <a:p>
+            <a:pPr marL="0" indent="0">
+              <a:buNone/>
+            </a:pPr>
+            <a:endParaRPr lang="en-US" sz="1800" dirty="0"/>
+          </a:p>
+          <a:p>
+            <a:endParaRPr lang="en-US" sz="1800" dirty="0"/>
+          </a:p>
+        </p:txBody>
+      </p:sp>
+      <p:pic>
+        <p:nvPicPr>
+          <p:cNvPr id="7" name="Picture 6" descr="A screenshot of a computer program&#10;&#10;AI-generated content may be incorrect.">
+            <a:extLst>
+              <a:ext uri="{FF2B5EF4-FFF2-40B4-BE49-F238E27FC236}">
+                <a16:creationId xmlns:a16="http://schemas.microsoft.com/office/drawing/2014/main" id="{F8122A78-928C-164E-E4D7-F762F329C5C5}"/>
+              </a:ext>
+            </a:extLst>
+          </p:cNvPr>
+          <p:cNvPicPr>
+            <a:picLocks noChangeAspect="1"/>
+          </p:cNvPicPr>
+          <p:nvPr/>
+        </p:nvPicPr>
+        <p:blipFill>
+          <a:blip r:embed="rId3">
+            <a:extLst>
+              <a:ext uri="{28A0092B-C50C-407E-A947-70E740481C1C}">
+                <a14:useLocalDpi xmlns:a14="http://schemas.microsoft.com/office/drawing/2010/main" val="0"/>
+              </a:ext>
+            </a:extLst>
+          </a:blip>
+          <a:stretch>
+            <a:fillRect/>
+          </a:stretch>
+        </p:blipFill>
+        <p:spPr>
+          <a:xfrm>
+            <a:off x="304800" y="1047750"/>
+            <a:ext cx="4419600" cy="3904695"/>
+          </a:xfrm>
+          <a:prstGeom prst="rect">
+            <a:avLst/>
+          </a:prstGeom>
+        </p:spPr>
+      </p:pic>
+      <p:sp>
+        <p:nvSpPr>
+          <p:cNvPr id="8" name="TextBox 7">
+            <a:extLst>
+              <a:ext uri="{FF2B5EF4-FFF2-40B4-BE49-F238E27FC236}">
+                <a16:creationId xmlns:a16="http://schemas.microsoft.com/office/drawing/2014/main" id="{A87F5B49-F8B1-186C-378A-31886A19CC02}"/>
+              </a:ext>
+            </a:extLst>
+          </p:cNvPr>
+          <p:cNvSpPr txBox="1"/>
+          <p:nvPr/>
+        </p:nvSpPr>
+        <p:spPr>
+          <a:xfrm>
+            <a:off x="5448300" y="1581150"/>
+            <a:ext cx="3581400" cy="2677656"/>
+          </a:xfrm>
+          <a:prstGeom prst="rect">
+            <a:avLst/>
+          </a:prstGeom>
+          <a:noFill/>
+        </p:spPr>
+        <p:txBody>
+          <a:bodyPr wrap="square" rtlCol="0">
+            <a:spAutoFit/>
+          </a:bodyPr>
+          <a:lstStyle/>
+          <a:p>
+            <a:r>
+              <a:rPr lang="en-US" dirty="0">
+                <a:solidFill>
+                  <a:schemeClr val="bg1"/>
+                </a:solidFill>
+              </a:rPr>
+              <a:t>Our free() function only frees the top-most malloc in the matrix. All of the </a:t>
+            </a:r>
+            <a:r>
+              <a:rPr lang="en-US" dirty="0" err="1">
+                <a:solidFill>
+                  <a:schemeClr val="bg1"/>
+                </a:solidFill>
+              </a:rPr>
+              <a:t>malloc’ed</a:t>
+            </a:r>
+            <a:r>
+              <a:rPr lang="en-US" dirty="0">
+                <a:solidFill>
+                  <a:schemeClr val="bg1"/>
+                </a:solidFill>
+              </a:rPr>
+              <a:t> arrays inside the loop are now leaked memory because we never freed them.</a:t>
+            </a:r>
+          </a:p>
+        </p:txBody>
+      </p:sp>
+      <p:sp>
+        <p:nvSpPr>
+          <p:cNvPr id="2" name="Right Arrow 1">
+            <a:extLst>
+              <a:ext uri="{FF2B5EF4-FFF2-40B4-BE49-F238E27FC236}">
+                <a16:creationId xmlns:a16="http://schemas.microsoft.com/office/drawing/2014/main" id="{92EE2CB6-7F21-9DE9-AC65-639ED9EEFAB3}"/>
+              </a:ext>
+            </a:extLst>
+          </p:cNvPr>
+          <p:cNvSpPr/>
+          <p:nvPr/>
+        </p:nvSpPr>
+        <p:spPr>
+          <a:xfrm>
+            <a:off x="1905000" y="3105150"/>
+            <a:ext cx="3543300" cy="228600"/>
+          </a:xfrm>
+          <a:prstGeom prst="rightArrow">
+            <a:avLst/>
+          </a:prstGeom>
+        </p:spPr>
+        <p:style>
+          <a:lnRef idx="1">
+            <a:schemeClr val="accent1"/>
+          </a:lnRef>
+          <a:fillRef idx="3">
+            <a:schemeClr val="accent1"/>
+          </a:fillRef>
+          <a:effectRef idx="2">
+            <a:schemeClr val="accent1"/>
+          </a:effectRef>
+          <a:fontRef idx="minor">
+            <a:schemeClr val="lt1"/>
+          </a:fontRef>
+        </p:style>
+        <p:txBody>
+          <a:bodyPr rtlCol="0" anchor="ctr"/>
+          <a:lstStyle/>
+          <a:p>
+            <a:pPr algn="ctr"/>
+            <a:endParaRPr lang="en-US"/>
+          </a:p>
+        </p:txBody>
+      </p:sp>
+    </p:spTree>
+    <p:extLst>
+      <p:ext uri="{BB962C8B-B14F-4D97-AF65-F5344CB8AC3E}">
+        <p14:creationId xmlns:p14="http://schemas.microsoft.com/office/powerpoint/2010/main" val="1530341302"/>
+      </p:ext>
+    </p:extLst>
+  </p:cSld>
+  <p:clrMapOvr>
+    <a:masterClrMapping/>
+  </p:clrMapOvr>
+</p:sld>
+</file>
+
+<file path=ppt/slides/slide12.xml><?xml version="1.0" encoding="utf-8"?>
+<p:sld xmlns:a="http://schemas.openxmlformats.org/drawingml/2006/main" xmlns:r="http://schemas.openxmlformats.org/officeDocument/2006/relationships" xmlns:p="http://schemas.openxmlformats.org/presentationml/2006/main">
+  <p:cSld>
+    <p:spTree>
+      <p:nvGrpSpPr>
+        <p:cNvPr id="1" name="">
+          <a:extLst>
+            <a:ext uri="{FF2B5EF4-FFF2-40B4-BE49-F238E27FC236}">
+              <a16:creationId xmlns:a16="http://schemas.microsoft.com/office/drawing/2014/main" id="{F3102FDB-99E2-4809-9D4C-0DD932B715B4}"/>
+            </a:ext>
+          </a:extLst>
+        </p:cNvPr>
+        <p:cNvGrpSpPr/>
+        <p:nvPr/>
+      </p:nvGrpSpPr>
+      <p:grpSpPr>
+        <a:xfrm>
+          <a:off x="0" y="0"/>
+          <a:ext cx="0" cy="0"/>
+          <a:chOff x="0" y="0"/>
+          <a:chExt cx="0" cy="0"/>
+        </a:xfrm>
+      </p:grpSpPr>
+      <p:sp>
+        <p:nvSpPr>
+          <p:cNvPr id="4" name="Title 3">
+            <a:extLst>
+              <a:ext uri="{FF2B5EF4-FFF2-40B4-BE49-F238E27FC236}">
+                <a16:creationId xmlns:a16="http://schemas.microsoft.com/office/drawing/2014/main" id="{11E564B4-5BFA-AE17-D173-FF6B7F04B2D8}"/>
+              </a:ext>
+            </a:extLst>
+          </p:cNvPr>
+          <p:cNvSpPr>
+            <a:spLocks noGrp="1"/>
+          </p:cNvSpPr>
+          <p:nvPr>
+            <p:ph type="title"/>
+          </p:nvPr>
+        </p:nvSpPr>
+        <p:spPr>
+          <a:xfrm>
+            <a:off x="452718" y="438150"/>
+            <a:ext cx="8229600" cy="685800"/>
+          </a:xfrm>
+        </p:spPr>
+        <p:txBody>
+          <a:bodyPr>
+            <a:normAutofit/>
+          </a:bodyPr>
+          <a:lstStyle/>
+          <a:p>
+            <a:r>
+              <a:rPr lang="en-US" sz="3200" dirty="0"/>
+              <a:t>Review: Stack and Heap</a:t>
+            </a:r>
+          </a:p>
+        </p:txBody>
+      </p:sp>
+      <p:sp>
+        <p:nvSpPr>
+          <p:cNvPr id="5" name="Content Placeholder 4">
+            <a:extLst>
+              <a:ext uri="{FF2B5EF4-FFF2-40B4-BE49-F238E27FC236}">
+                <a16:creationId xmlns:a16="http://schemas.microsoft.com/office/drawing/2014/main" id="{416DBA81-A25A-98C1-6B9C-64C8D826A957}"/>
+              </a:ext>
+            </a:extLst>
+          </p:cNvPr>
+          <p:cNvSpPr>
+            <a:spLocks noGrp="1"/>
+          </p:cNvSpPr>
+          <p:nvPr>
+            <p:ph idx="1"/>
+          </p:nvPr>
+        </p:nvSpPr>
+        <p:spPr>
+          <a:xfrm>
+            <a:off x="461682" y="1123950"/>
+            <a:ext cx="8229600" cy="3962400"/>
+          </a:xfrm>
+        </p:spPr>
+        <p:txBody>
+          <a:bodyPr>
+            <a:normAutofit/>
+          </a:bodyPr>
+          <a:lstStyle/>
+          <a:p>
+            <a:pPr marL="0" indent="0">
+              <a:buNone/>
+            </a:pPr>
+            <a:r>
+              <a:rPr lang="en-US" sz="2400" dirty="0"/>
+              <a:t>How are the stack and heap different?</a:t>
+            </a:r>
+          </a:p>
+        </p:txBody>
+      </p:sp>
+    </p:spTree>
+    <p:extLst>
+      <p:ext uri="{BB962C8B-B14F-4D97-AF65-F5344CB8AC3E}">
+        <p14:creationId xmlns:p14="http://schemas.microsoft.com/office/powerpoint/2010/main" val="2378140770"/>
+      </p:ext>
+    </p:extLst>
+  </p:cSld>
+  <p:clrMapOvr>
+    <a:masterClrMapping/>
+  </p:clrMapOvr>
+</p:sld>
+</file>
+
+<file path=ppt/slides/slide13.xml><?xml version="1.0" encoding="utf-8"?>
+<p:sld xmlns:a="http://schemas.openxmlformats.org/drawingml/2006/main" xmlns:r="http://schemas.openxmlformats.org/officeDocument/2006/relationships" xmlns:p="http://schemas.openxmlformats.org/presentationml/2006/main">
+  <p:cSld>
+    <p:spTree>
+      <p:nvGrpSpPr>
+        <p:cNvPr id="1" name="">
+          <a:extLst>
+            <a:ext uri="{FF2B5EF4-FFF2-40B4-BE49-F238E27FC236}">
+              <a16:creationId xmlns:a16="http://schemas.microsoft.com/office/drawing/2014/main" id="{907E5B7B-C0CB-BB4F-784A-1B8AFC1DAE96}"/>
+            </a:ext>
+          </a:extLst>
+        </p:cNvPr>
+        <p:cNvGrpSpPr/>
+        <p:nvPr/>
+      </p:nvGrpSpPr>
+      <p:grpSpPr>
+        <a:xfrm>
+          <a:off x="0" y="0"/>
+          <a:ext cx="0" cy="0"/>
+          <a:chOff x="0" y="0"/>
+          <a:chExt cx="0" cy="0"/>
+        </a:xfrm>
+      </p:grpSpPr>
+      <p:sp>
+        <p:nvSpPr>
+          <p:cNvPr id="4" name="Title 3">
+            <a:extLst>
+              <a:ext uri="{FF2B5EF4-FFF2-40B4-BE49-F238E27FC236}">
+                <a16:creationId xmlns:a16="http://schemas.microsoft.com/office/drawing/2014/main" id="{66662470-10C3-F7A4-CA9E-39BB13007BA2}"/>
+              </a:ext>
+            </a:extLst>
+          </p:cNvPr>
+          <p:cNvSpPr>
+            <a:spLocks noGrp="1"/>
+          </p:cNvSpPr>
+          <p:nvPr>
+            <p:ph type="title"/>
+          </p:nvPr>
+        </p:nvSpPr>
+        <p:spPr>
+          <a:xfrm>
+            <a:off x="452718" y="438150"/>
+            <a:ext cx="8229600" cy="685800"/>
+          </a:xfrm>
+        </p:spPr>
+        <p:txBody>
+          <a:bodyPr>
+            <a:normAutofit/>
+          </a:bodyPr>
+          <a:lstStyle/>
+          <a:p>
+            <a:r>
+              <a:rPr lang="en-US" sz="3200" dirty="0"/>
+              <a:t>Review: Stack and Heap</a:t>
+            </a:r>
+          </a:p>
+        </p:txBody>
+      </p:sp>
+      <p:sp>
+        <p:nvSpPr>
+          <p:cNvPr id="5" name="Content Placeholder 4">
+            <a:extLst>
+              <a:ext uri="{FF2B5EF4-FFF2-40B4-BE49-F238E27FC236}">
+                <a16:creationId xmlns:a16="http://schemas.microsoft.com/office/drawing/2014/main" id="{8BA917C8-9297-A9B7-4B4B-5B000004CD37}"/>
+              </a:ext>
+            </a:extLst>
+          </p:cNvPr>
+          <p:cNvSpPr>
+            <a:spLocks noGrp="1"/>
+          </p:cNvSpPr>
+          <p:nvPr>
+            <p:ph idx="1"/>
+          </p:nvPr>
+        </p:nvSpPr>
+        <p:spPr>
+          <a:xfrm>
+            <a:off x="461682" y="1123950"/>
+            <a:ext cx="8229600" cy="3962400"/>
+          </a:xfrm>
+        </p:spPr>
+        <p:txBody>
+          <a:bodyPr>
+            <a:normAutofit/>
+          </a:bodyPr>
+          <a:lstStyle/>
+          <a:p>
+            <a:pPr marL="0" indent="0">
+              <a:buNone/>
+            </a:pPr>
+            <a:r>
+              <a:rPr lang="en-US" sz="2400" dirty="0"/>
+              <a:t>Stack:</a:t>
+            </a:r>
+          </a:p>
+          <a:p>
+            <a:pPr>
+              <a:buFontTx/>
+              <a:buChar char="-"/>
+            </a:pPr>
+            <a:r>
+              <a:rPr lang="en-US" sz="2400" dirty="0"/>
+              <a:t>Memory is contiguous</a:t>
+            </a:r>
+          </a:p>
+          <a:p>
+            <a:pPr>
+              <a:buFontTx/>
+              <a:buChar char="-"/>
+            </a:pPr>
+            <a:r>
+              <a:rPr lang="en-US" sz="2400" dirty="0"/>
+              <a:t>Memory cannot be un-assigned/reused</a:t>
+            </a:r>
+          </a:p>
+          <a:p>
+            <a:pPr>
+              <a:buFontTx/>
+              <a:buChar char="-"/>
+            </a:pPr>
+            <a:r>
+              <a:rPr lang="en-US" sz="2400" dirty="0"/>
+              <a:t>Addresses DECREASE as stack size increases</a:t>
+            </a:r>
+          </a:p>
+        </p:txBody>
+      </p:sp>
+    </p:spTree>
+    <p:extLst>
+      <p:ext uri="{BB962C8B-B14F-4D97-AF65-F5344CB8AC3E}">
+        <p14:creationId xmlns:p14="http://schemas.microsoft.com/office/powerpoint/2010/main" val="3274717556"/>
+      </p:ext>
+    </p:extLst>
+  </p:cSld>
+  <p:clrMapOvr>
+    <a:masterClrMapping/>
+  </p:clrMapOvr>
+</p:sld>
+</file>
+
+<file path=ppt/slides/slide14.xml><?xml version="1.0" encoding="utf-8"?>
+<p:sld xmlns:a="http://schemas.openxmlformats.org/drawingml/2006/main" xmlns:r="http://schemas.openxmlformats.org/officeDocument/2006/relationships" xmlns:p="http://schemas.openxmlformats.org/presentationml/2006/main">
+  <p:cSld>
+    <p:spTree>
+      <p:nvGrpSpPr>
+        <p:cNvPr id="1" name="">
+          <a:extLst>
+            <a:ext uri="{FF2B5EF4-FFF2-40B4-BE49-F238E27FC236}">
+              <a16:creationId xmlns:a16="http://schemas.microsoft.com/office/drawing/2014/main" id="{CE369EA1-087D-43CB-6BDE-90904F8A8FB2}"/>
+            </a:ext>
+          </a:extLst>
+        </p:cNvPr>
+        <p:cNvGrpSpPr/>
+        <p:nvPr/>
+      </p:nvGrpSpPr>
+      <p:grpSpPr>
+        <a:xfrm>
+          <a:off x="0" y="0"/>
+          <a:ext cx="0" cy="0"/>
+          <a:chOff x="0" y="0"/>
+          <a:chExt cx="0" cy="0"/>
+        </a:xfrm>
+      </p:grpSpPr>
+      <p:sp>
+        <p:nvSpPr>
+          <p:cNvPr id="4" name="Title 3">
+            <a:extLst>
+              <a:ext uri="{FF2B5EF4-FFF2-40B4-BE49-F238E27FC236}">
+                <a16:creationId xmlns:a16="http://schemas.microsoft.com/office/drawing/2014/main" id="{9DF7E32F-6110-71FA-910F-10A15D094F52}"/>
+              </a:ext>
+            </a:extLst>
+          </p:cNvPr>
+          <p:cNvSpPr>
+            <a:spLocks noGrp="1"/>
+          </p:cNvSpPr>
+          <p:nvPr>
+            <p:ph type="title"/>
+          </p:nvPr>
+        </p:nvSpPr>
+        <p:spPr>
+          <a:xfrm>
+            <a:off x="452718" y="438150"/>
+            <a:ext cx="8229600" cy="685800"/>
+          </a:xfrm>
+        </p:spPr>
+        <p:txBody>
+          <a:bodyPr>
+            <a:normAutofit/>
+          </a:bodyPr>
+          <a:lstStyle/>
+          <a:p>
+            <a:r>
+              <a:rPr lang="en-US" sz="3200" dirty="0"/>
+              <a:t>Review: Stack and Heap</a:t>
+            </a:r>
+          </a:p>
+        </p:txBody>
+      </p:sp>
+      <p:sp>
+        <p:nvSpPr>
+          <p:cNvPr id="5" name="Content Placeholder 4">
+            <a:extLst>
+              <a:ext uri="{FF2B5EF4-FFF2-40B4-BE49-F238E27FC236}">
+                <a16:creationId xmlns:a16="http://schemas.microsoft.com/office/drawing/2014/main" id="{F35B7636-83D0-6811-E164-672949BF9BE4}"/>
+              </a:ext>
+            </a:extLst>
+          </p:cNvPr>
+          <p:cNvSpPr>
+            <a:spLocks noGrp="1"/>
+          </p:cNvSpPr>
+          <p:nvPr>
+            <p:ph idx="1"/>
+          </p:nvPr>
+        </p:nvSpPr>
+        <p:spPr>
+          <a:xfrm>
+            <a:off x="461682" y="1123950"/>
+            <a:ext cx="8229600" cy="3962400"/>
+          </a:xfrm>
+        </p:spPr>
+        <p:txBody>
+          <a:bodyPr>
+            <a:normAutofit/>
+          </a:bodyPr>
+          <a:lstStyle/>
+          <a:p>
+            <a:pPr marL="0" indent="0">
+              <a:buNone/>
+            </a:pPr>
+            <a:r>
+              <a:rPr lang="en-US" sz="2400" dirty="0"/>
+              <a:t>Heap:</a:t>
+            </a:r>
+          </a:p>
+          <a:p>
+            <a:pPr>
+              <a:buFontTx/>
+              <a:buChar char="-"/>
+            </a:pPr>
+            <a:r>
+              <a:rPr lang="en-US" sz="2400" dirty="0"/>
+              <a:t>Memory addresses of elements are determined by the allocator and are not necessarily related in any way</a:t>
+            </a:r>
+          </a:p>
+          <a:p>
+            <a:pPr>
+              <a:buFontTx/>
+              <a:buChar char="-"/>
+            </a:pPr>
+            <a:r>
+              <a:rPr lang="en-US" sz="2400" dirty="0"/>
+              <a:t>Memory must be explicitly allocated by the programmer using malloc()</a:t>
+            </a:r>
+          </a:p>
+          <a:p>
+            <a:pPr>
+              <a:buFontTx/>
+              <a:buChar char="-"/>
+            </a:pPr>
+            <a:r>
+              <a:rPr lang="en-US" sz="2400" dirty="0"/>
+              <a:t>Memory CAN be un-assigned/reused if free() or </a:t>
+            </a:r>
+            <a:r>
+              <a:rPr lang="en-US" sz="2400" dirty="0" err="1"/>
+              <a:t>realloc</a:t>
+            </a:r>
+            <a:r>
+              <a:rPr lang="en-US" sz="2400" dirty="0"/>
+              <a:t>() is called</a:t>
+            </a:r>
+          </a:p>
+          <a:p>
+            <a:pPr>
+              <a:buFontTx/>
+              <a:buChar char="-"/>
+            </a:pPr>
+            <a:r>
+              <a:rPr lang="en-US" sz="2400" dirty="0"/>
+              <a:t>Addresses HAVE NO PREDETERMINED PATTERN as heap size increases.</a:t>
+            </a:r>
+          </a:p>
+        </p:txBody>
+      </p:sp>
+    </p:spTree>
+    <p:extLst>
+      <p:ext uri="{BB962C8B-B14F-4D97-AF65-F5344CB8AC3E}">
+        <p14:creationId xmlns:p14="http://schemas.microsoft.com/office/powerpoint/2010/main" val="2456615962"/>
+      </p:ext>
+    </p:extLst>
+  </p:cSld>
+  <p:clrMapOvr>
+    <a:masterClrMapping/>
+  </p:clrMapOvr>
+</p:sld>
+</file>
+
+<file path=ppt/slides/slide15.xml><?xml version="1.0" encoding="utf-8"?>
+<p:sld xmlns:a="http://schemas.openxmlformats.org/drawingml/2006/main" xmlns:r="http://schemas.openxmlformats.org/officeDocument/2006/relationships" xmlns:p="http://schemas.openxmlformats.org/presentationml/2006/main">
+  <p:cSld>
+    <p:spTree>
+      <p:nvGrpSpPr>
+        <p:cNvPr id="1" name="">
+          <a:extLst>
+            <a:ext uri="{FF2B5EF4-FFF2-40B4-BE49-F238E27FC236}">
+              <a16:creationId xmlns:a16="http://schemas.microsoft.com/office/drawing/2014/main" id="{439221F8-2B43-4975-036A-7950665CF45A}"/>
+            </a:ext>
+          </a:extLst>
+        </p:cNvPr>
+        <p:cNvGrpSpPr/>
+        <p:nvPr/>
+      </p:nvGrpSpPr>
+      <p:grpSpPr>
+        <a:xfrm>
+          <a:off x="0" y="0"/>
+          <a:ext cx="0" cy="0"/>
+          <a:chOff x="0" y="0"/>
+          <a:chExt cx="0" cy="0"/>
+        </a:xfrm>
+      </p:grpSpPr>
+      <p:sp>
+        <p:nvSpPr>
+          <p:cNvPr id="4" name="Title 3">
+            <a:extLst>
+              <a:ext uri="{FF2B5EF4-FFF2-40B4-BE49-F238E27FC236}">
+                <a16:creationId xmlns:a16="http://schemas.microsoft.com/office/drawing/2014/main" id="{56E2A5E6-C7E9-2047-17F4-D83DA2858AEA}"/>
+              </a:ext>
+            </a:extLst>
+          </p:cNvPr>
+          <p:cNvSpPr>
+            <a:spLocks noGrp="1"/>
+          </p:cNvSpPr>
+          <p:nvPr>
+            <p:ph type="title"/>
+          </p:nvPr>
+        </p:nvSpPr>
+        <p:spPr>
+          <a:xfrm>
+            <a:off x="452718" y="438150"/>
+            <a:ext cx="8229600" cy="685800"/>
+          </a:xfrm>
+        </p:spPr>
+        <p:txBody>
+          <a:bodyPr>
+            <a:normAutofit/>
+          </a:bodyPr>
+          <a:lstStyle/>
+          <a:p>
+            <a:r>
+              <a:rPr lang="en-US" sz="3200" dirty="0"/>
+              <a:t>Review: Time Complexity</a:t>
+            </a:r>
+          </a:p>
+        </p:txBody>
+      </p:sp>
+      <p:sp>
+        <p:nvSpPr>
+          <p:cNvPr id="5" name="Content Placeholder 4">
+            <a:extLst>
+              <a:ext uri="{FF2B5EF4-FFF2-40B4-BE49-F238E27FC236}">
+                <a16:creationId xmlns:a16="http://schemas.microsoft.com/office/drawing/2014/main" id="{2D5232A9-1685-E4BE-644D-1E79AC42AA54}"/>
+              </a:ext>
+            </a:extLst>
+          </p:cNvPr>
+          <p:cNvSpPr>
+            <a:spLocks noGrp="1"/>
+          </p:cNvSpPr>
+          <p:nvPr>
+            <p:ph idx="1"/>
+          </p:nvPr>
+        </p:nvSpPr>
+        <p:spPr>
+          <a:xfrm>
+            <a:off x="5791200" y="1925171"/>
+            <a:ext cx="2662518" cy="1524000"/>
+          </a:xfrm>
+        </p:spPr>
+        <p:txBody>
+          <a:bodyPr>
+            <a:normAutofit/>
+          </a:bodyPr>
+          <a:lstStyle/>
+          <a:p>
+            <a:pPr marL="0" indent="0">
+              <a:buNone/>
+            </a:pPr>
+            <a:r>
+              <a:rPr lang="en-US" sz="2400" dirty="0"/>
+              <a:t>What is the time complexity of the code?</a:t>
+            </a:r>
+          </a:p>
+        </p:txBody>
+      </p:sp>
+      <p:pic>
+        <p:nvPicPr>
+          <p:cNvPr id="3" name="Picture 2" descr="A screen shot of a computer code&#10;&#10;AI-generated content may be incorrect.">
+            <a:extLst>
+              <a:ext uri="{FF2B5EF4-FFF2-40B4-BE49-F238E27FC236}">
+                <a16:creationId xmlns:a16="http://schemas.microsoft.com/office/drawing/2014/main" id="{B5681454-40B2-8D75-D8D1-0B6DD2F936B1}"/>
+              </a:ext>
+            </a:extLst>
+          </p:cNvPr>
+          <p:cNvPicPr>
+            <a:picLocks noChangeAspect="1"/>
+          </p:cNvPicPr>
+          <p:nvPr/>
+        </p:nvPicPr>
+        <p:blipFill>
+          <a:blip r:embed="rId3">
+            <a:extLst>
+              <a:ext uri="{28A0092B-C50C-407E-A947-70E740481C1C}">
+                <a14:useLocalDpi xmlns:a14="http://schemas.microsoft.com/office/drawing/2010/main" val="0"/>
+              </a:ext>
+            </a:extLst>
+          </a:blip>
+          <a:stretch>
+            <a:fillRect/>
+          </a:stretch>
+        </p:blipFill>
+        <p:spPr>
+          <a:xfrm>
+            <a:off x="329453" y="1696570"/>
+            <a:ext cx="4318748" cy="2023197"/>
           </a:xfrm>
           <a:prstGeom prst="rect">
             <a:avLst/>
@@ -10460,7 +9385,7 @@
     </p:spTree>
     <p:extLst>
       <p:ext uri="{BB962C8B-B14F-4D97-AF65-F5344CB8AC3E}">
-        <p14:creationId xmlns:p14="http://schemas.microsoft.com/office/powerpoint/2010/main" val="1825105875"/>
+        <p14:creationId xmlns:p14="http://schemas.microsoft.com/office/powerpoint/2010/main" val="2428123919"/>
       </p:ext>
     </p:extLst>
   </p:cSld>
@@ -10470,7 +9395,499 @@
 </p:sld>
 </file>
 
-<file path=ppt/slides/slide6.xml><?xml version="1.0" encoding="utf-8"?>
+<file path=ppt/slides/slide16.xml><?xml version="1.0" encoding="utf-8"?>
+<p:sld xmlns:a="http://schemas.openxmlformats.org/drawingml/2006/main" xmlns:r="http://schemas.openxmlformats.org/officeDocument/2006/relationships" xmlns:p="http://schemas.openxmlformats.org/presentationml/2006/main">
+  <p:cSld>
+    <p:spTree>
+      <p:nvGrpSpPr>
+        <p:cNvPr id="1" name="">
+          <a:extLst>
+            <a:ext uri="{FF2B5EF4-FFF2-40B4-BE49-F238E27FC236}">
+              <a16:creationId xmlns:a16="http://schemas.microsoft.com/office/drawing/2014/main" id="{6EA0B3CE-2681-EBB0-2B4D-5609CA8B4F80}"/>
+            </a:ext>
+          </a:extLst>
+        </p:cNvPr>
+        <p:cNvGrpSpPr/>
+        <p:nvPr/>
+      </p:nvGrpSpPr>
+      <p:grpSpPr>
+        <a:xfrm>
+          <a:off x="0" y="0"/>
+          <a:ext cx="0" cy="0"/>
+          <a:chOff x="0" y="0"/>
+          <a:chExt cx="0" cy="0"/>
+        </a:xfrm>
+      </p:grpSpPr>
+      <p:sp>
+        <p:nvSpPr>
+          <p:cNvPr id="4" name="Title 3">
+            <a:extLst>
+              <a:ext uri="{FF2B5EF4-FFF2-40B4-BE49-F238E27FC236}">
+                <a16:creationId xmlns:a16="http://schemas.microsoft.com/office/drawing/2014/main" id="{5AC1CA9E-2E00-94BD-2E44-8BB5A09F7352}"/>
+              </a:ext>
+            </a:extLst>
+          </p:cNvPr>
+          <p:cNvSpPr>
+            <a:spLocks noGrp="1"/>
+          </p:cNvSpPr>
+          <p:nvPr>
+            <p:ph type="title"/>
+          </p:nvPr>
+        </p:nvSpPr>
+        <p:spPr>
+          <a:xfrm>
+            <a:off x="452718" y="438150"/>
+            <a:ext cx="8229600" cy="685800"/>
+          </a:xfrm>
+        </p:spPr>
+        <p:txBody>
+          <a:bodyPr>
+            <a:normAutofit/>
+          </a:bodyPr>
+          <a:lstStyle/>
+          <a:p>
+            <a:r>
+              <a:rPr lang="en-US" sz="3200" dirty="0"/>
+              <a:t>Review: Time Complexity</a:t>
+            </a:r>
+          </a:p>
+        </p:txBody>
+      </p:sp>
+      <p:sp>
+        <p:nvSpPr>
+          <p:cNvPr id="5" name="Content Placeholder 4">
+            <a:extLst>
+              <a:ext uri="{FF2B5EF4-FFF2-40B4-BE49-F238E27FC236}">
+                <a16:creationId xmlns:a16="http://schemas.microsoft.com/office/drawing/2014/main" id="{18D1A7D4-06F1-FCD8-06B1-2BC958BDEEFA}"/>
+              </a:ext>
+            </a:extLst>
+          </p:cNvPr>
+          <p:cNvSpPr>
+            <a:spLocks noGrp="1"/>
+          </p:cNvSpPr>
+          <p:nvPr>
+            <p:ph idx="1"/>
+          </p:nvPr>
+        </p:nvSpPr>
+        <p:spPr>
+          <a:xfrm>
+            <a:off x="5181600" y="1696570"/>
+            <a:ext cx="3500718" cy="2475380"/>
+          </a:xfrm>
+        </p:spPr>
+        <p:txBody>
+          <a:bodyPr>
+            <a:normAutofit lnSpcReduction="10000"/>
+          </a:bodyPr>
+          <a:lstStyle/>
+          <a:p>
+            <a:pPr marL="0" indent="0">
+              <a:buNone/>
+            </a:pPr>
+            <a:r>
+              <a:rPr lang="en-US" sz="2400" dirty="0"/>
+              <a:t>The outer loop iterates through the entire array. The inner loop also iterates through the entire array. Therefore, this time complexity is O(n^2)</a:t>
+            </a:r>
+          </a:p>
+        </p:txBody>
+      </p:sp>
+      <p:pic>
+        <p:nvPicPr>
+          <p:cNvPr id="3" name="Picture 2" descr="A screen shot of a computer code&#10;&#10;AI-generated content may be incorrect.">
+            <a:extLst>
+              <a:ext uri="{FF2B5EF4-FFF2-40B4-BE49-F238E27FC236}">
+                <a16:creationId xmlns:a16="http://schemas.microsoft.com/office/drawing/2014/main" id="{30A407AA-5F3E-95ED-FC45-EF8D79A38BD2}"/>
+              </a:ext>
+            </a:extLst>
+          </p:cNvPr>
+          <p:cNvPicPr>
+            <a:picLocks noChangeAspect="1"/>
+          </p:cNvPicPr>
+          <p:nvPr/>
+        </p:nvPicPr>
+        <p:blipFill>
+          <a:blip r:embed="rId3">
+            <a:extLst>
+              <a:ext uri="{28A0092B-C50C-407E-A947-70E740481C1C}">
+                <a14:useLocalDpi xmlns:a14="http://schemas.microsoft.com/office/drawing/2010/main" val="0"/>
+              </a:ext>
+            </a:extLst>
+          </a:blip>
+          <a:stretch>
+            <a:fillRect/>
+          </a:stretch>
+        </p:blipFill>
+        <p:spPr>
+          <a:xfrm>
+            <a:off x="329453" y="1696570"/>
+            <a:ext cx="4318748" cy="2023197"/>
+          </a:xfrm>
+          <a:prstGeom prst="rect">
+            <a:avLst/>
+          </a:prstGeom>
+        </p:spPr>
+      </p:pic>
+    </p:spTree>
+    <p:extLst>
+      <p:ext uri="{BB962C8B-B14F-4D97-AF65-F5344CB8AC3E}">
+        <p14:creationId xmlns:p14="http://schemas.microsoft.com/office/powerpoint/2010/main" val="745525522"/>
+      </p:ext>
+    </p:extLst>
+  </p:cSld>
+  <p:clrMapOvr>
+    <a:masterClrMapping/>
+  </p:clrMapOvr>
+</p:sld>
+</file>
+
+<file path=ppt/slides/slide17.xml><?xml version="1.0" encoding="utf-8"?>
+<p:sld xmlns:a="http://schemas.openxmlformats.org/drawingml/2006/main" xmlns:r="http://schemas.openxmlformats.org/officeDocument/2006/relationships" xmlns:p="http://schemas.openxmlformats.org/presentationml/2006/main">
+  <p:cSld>
+    <p:spTree>
+      <p:nvGrpSpPr>
+        <p:cNvPr id="1" name="">
+          <a:extLst>
+            <a:ext uri="{FF2B5EF4-FFF2-40B4-BE49-F238E27FC236}">
+              <a16:creationId xmlns:a16="http://schemas.microsoft.com/office/drawing/2014/main" id="{29D847B5-15AB-3295-7CAB-9DA757645DDE}"/>
+            </a:ext>
+          </a:extLst>
+        </p:cNvPr>
+        <p:cNvGrpSpPr/>
+        <p:nvPr/>
+      </p:nvGrpSpPr>
+      <p:grpSpPr>
+        <a:xfrm>
+          <a:off x="0" y="0"/>
+          <a:ext cx="0" cy="0"/>
+          <a:chOff x="0" y="0"/>
+          <a:chExt cx="0" cy="0"/>
+        </a:xfrm>
+      </p:grpSpPr>
+      <p:sp>
+        <p:nvSpPr>
+          <p:cNvPr id="4" name="Title 3">
+            <a:extLst>
+              <a:ext uri="{FF2B5EF4-FFF2-40B4-BE49-F238E27FC236}">
+                <a16:creationId xmlns:a16="http://schemas.microsoft.com/office/drawing/2014/main" id="{B3625BF9-3D13-AB7C-1161-299BE1900E26}"/>
+              </a:ext>
+            </a:extLst>
+          </p:cNvPr>
+          <p:cNvSpPr>
+            <a:spLocks noGrp="1"/>
+          </p:cNvSpPr>
+          <p:nvPr>
+            <p:ph type="title"/>
+          </p:nvPr>
+        </p:nvSpPr>
+        <p:spPr>
+          <a:xfrm>
+            <a:off x="452718" y="438150"/>
+            <a:ext cx="8229600" cy="685800"/>
+          </a:xfrm>
+        </p:spPr>
+        <p:txBody>
+          <a:bodyPr>
+            <a:normAutofit/>
+          </a:bodyPr>
+          <a:lstStyle/>
+          <a:p>
+            <a:r>
+              <a:rPr lang="en-US" sz="3200" dirty="0"/>
+              <a:t>Review: Time Complexity</a:t>
+            </a:r>
+          </a:p>
+        </p:txBody>
+      </p:sp>
+      <p:sp>
+        <p:nvSpPr>
+          <p:cNvPr id="5" name="Content Placeholder 4">
+            <a:extLst>
+              <a:ext uri="{FF2B5EF4-FFF2-40B4-BE49-F238E27FC236}">
+                <a16:creationId xmlns:a16="http://schemas.microsoft.com/office/drawing/2014/main" id="{9647F89D-C01D-50EB-BCF7-F6E0CCC695A5}"/>
+              </a:ext>
+            </a:extLst>
+          </p:cNvPr>
+          <p:cNvSpPr>
+            <a:spLocks noGrp="1"/>
+          </p:cNvSpPr>
+          <p:nvPr>
+            <p:ph idx="1"/>
+          </p:nvPr>
+        </p:nvSpPr>
+        <p:spPr>
+          <a:xfrm>
+            <a:off x="5791200" y="1925171"/>
+            <a:ext cx="2662518" cy="1524000"/>
+          </a:xfrm>
+        </p:spPr>
+        <p:txBody>
+          <a:bodyPr>
+            <a:normAutofit/>
+          </a:bodyPr>
+          <a:lstStyle/>
+          <a:p>
+            <a:pPr marL="0" indent="0">
+              <a:buNone/>
+            </a:pPr>
+            <a:r>
+              <a:rPr lang="en-US" sz="2400" dirty="0"/>
+              <a:t>What is the time complexity of the code?</a:t>
+            </a:r>
+          </a:p>
+        </p:txBody>
+      </p:sp>
+      <p:pic>
+        <p:nvPicPr>
+          <p:cNvPr id="6" name="Picture 5" descr="A computer code with many text&#10;&#10;AI-generated content may be incorrect.">
+            <a:extLst>
+              <a:ext uri="{FF2B5EF4-FFF2-40B4-BE49-F238E27FC236}">
+                <a16:creationId xmlns:a16="http://schemas.microsoft.com/office/drawing/2014/main" id="{A82B8D86-7B44-83C6-DCBC-824AC430C163}"/>
+              </a:ext>
+            </a:extLst>
+          </p:cNvPr>
+          <p:cNvPicPr>
+            <a:picLocks noChangeAspect="1"/>
+          </p:cNvPicPr>
+          <p:nvPr/>
+        </p:nvPicPr>
+        <p:blipFill>
+          <a:blip r:embed="rId3">
+            <a:extLst>
+              <a:ext uri="{28A0092B-C50C-407E-A947-70E740481C1C}">
+                <a14:useLocalDpi xmlns:a14="http://schemas.microsoft.com/office/drawing/2010/main" val="0"/>
+              </a:ext>
+            </a:extLst>
+          </a:blip>
+          <a:stretch>
+            <a:fillRect/>
+          </a:stretch>
+        </p:blipFill>
+        <p:spPr>
+          <a:xfrm>
+            <a:off x="573742" y="1657350"/>
+            <a:ext cx="3962400" cy="2781300"/>
+          </a:xfrm>
+          <a:prstGeom prst="rect">
+            <a:avLst/>
+          </a:prstGeom>
+        </p:spPr>
+      </p:pic>
+    </p:spTree>
+    <p:extLst>
+      <p:ext uri="{BB962C8B-B14F-4D97-AF65-F5344CB8AC3E}">
+        <p14:creationId xmlns:p14="http://schemas.microsoft.com/office/powerpoint/2010/main" val="951996185"/>
+      </p:ext>
+    </p:extLst>
+  </p:cSld>
+  <p:clrMapOvr>
+    <a:masterClrMapping/>
+  </p:clrMapOvr>
+</p:sld>
+</file>
+
+<file path=ppt/slides/slide18.xml><?xml version="1.0" encoding="utf-8"?>
+<p:sld xmlns:a="http://schemas.openxmlformats.org/drawingml/2006/main" xmlns:r="http://schemas.openxmlformats.org/officeDocument/2006/relationships" xmlns:p="http://schemas.openxmlformats.org/presentationml/2006/main">
+  <p:cSld>
+    <p:spTree>
+      <p:nvGrpSpPr>
+        <p:cNvPr id="1" name="">
+          <a:extLst>
+            <a:ext uri="{FF2B5EF4-FFF2-40B4-BE49-F238E27FC236}">
+              <a16:creationId xmlns:a16="http://schemas.microsoft.com/office/drawing/2014/main" id="{C29332BB-055B-27DA-BD1B-954CC16852F0}"/>
+            </a:ext>
+          </a:extLst>
+        </p:cNvPr>
+        <p:cNvGrpSpPr/>
+        <p:nvPr/>
+      </p:nvGrpSpPr>
+      <p:grpSpPr>
+        <a:xfrm>
+          <a:off x="0" y="0"/>
+          <a:ext cx="0" cy="0"/>
+          <a:chOff x="0" y="0"/>
+          <a:chExt cx="0" cy="0"/>
+        </a:xfrm>
+      </p:grpSpPr>
+      <p:sp>
+        <p:nvSpPr>
+          <p:cNvPr id="4" name="Title 3">
+            <a:extLst>
+              <a:ext uri="{FF2B5EF4-FFF2-40B4-BE49-F238E27FC236}">
+                <a16:creationId xmlns:a16="http://schemas.microsoft.com/office/drawing/2014/main" id="{494B4EAE-23AC-8C98-7E29-46F170EBBBDC}"/>
+              </a:ext>
+            </a:extLst>
+          </p:cNvPr>
+          <p:cNvSpPr>
+            <a:spLocks noGrp="1"/>
+          </p:cNvSpPr>
+          <p:nvPr>
+            <p:ph type="title"/>
+          </p:nvPr>
+        </p:nvSpPr>
+        <p:spPr>
+          <a:xfrm>
+            <a:off x="452718" y="438150"/>
+            <a:ext cx="8229600" cy="685800"/>
+          </a:xfrm>
+        </p:spPr>
+        <p:txBody>
+          <a:bodyPr>
+            <a:normAutofit/>
+          </a:bodyPr>
+          <a:lstStyle/>
+          <a:p>
+            <a:r>
+              <a:rPr lang="en-US" sz="3200" dirty="0"/>
+              <a:t>Review: Time Complexity</a:t>
+            </a:r>
+          </a:p>
+        </p:txBody>
+      </p:sp>
+      <p:sp>
+        <p:nvSpPr>
+          <p:cNvPr id="5" name="Content Placeholder 4">
+            <a:extLst>
+              <a:ext uri="{FF2B5EF4-FFF2-40B4-BE49-F238E27FC236}">
+                <a16:creationId xmlns:a16="http://schemas.microsoft.com/office/drawing/2014/main" id="{A6705ADD-27B9-9519-3269-6CF806424B54}"/>
+              </a:ext>
+            </a:extLst>
+          </p:cNvPr>
+          <p:cNvSpPr>
+            <a:spLocks noGrp="1"/>
+          </p:cNvSpPr>
+          <p:nvPr>
+            <p:ph idx="1"/>
+          </p:nvPr>
+        </p:nvSpPr>
+        <p:spPr>
+          <a:xfrm>
+            <a:off x="4267200" y="1123950"/>
+            <a:ext cx="4648200" cy="3810000"/>
+          </a:xfrm>
+        </p:spPr>
+        <p:txBody>
+          <a:bodyPr>
+            <a:normAutofit fontScale="92500"/>
+          </a:bodyPr>
+          <a:lstStyle/>
+          <a:p>
+            <a:pPr marL="0" indent="0">
+              <a:buNone/>
+            </a:pPr>
+            <a:r>
+              <a:rPr lang="en-US" sz="2400" dirty="0"/>
+              <a:t>The loop in foo() iterates size times. It calls bar() each time, passing the current index </a:t>
+            </a:r>
+            <a:r>
+              <a:rPr lang="en-US" sz="2400" dirty="0" err="1"/>
+              <a:t>i</a:t>
+            </a:r>
+            <a:r>
+              <a:rPr lang="en-US" sz="2400" dirty="0"/>
+              <a:t>. Inside bar(), the loop iterates ”</a:t>
+            </a:r>
+            <a:r>
+              <a:rPr lang="en-US" sz="2400" dirty="0" err="1"/>
+              <a:t>idx</a:t>
+            </a:r>
+            <a:r>
+              <a:rPr lang="en-US" sz="2400" dirty="0"/>
+              <a:t>” times.</a:t>
+            </a:r>
+          </a:p>
+          <a:p>
+            <a:pPr marL="0" indent="0">
+              <a:buNone/>
+            </a:pPr>
+            <a:r>
+              <a:rPr lang="en-US" sz="2400" dirty="0"/>
+              <a:t>The total number of times “</a:t>
+            </a:r>
+            <a:r>
+              <a:rPr lang="en-US" sz="2400" dirty="0" err="1"/>
+              <a:t>arr</a:t>
+            </a:r>
+            <a:r>
+              <a:rPr lang="en-US" sz="2400" dirty="0"/>
+              <a:t>[</a:t>
+            </a:r>
+            <a:r>
+              <a:rPr lang="en-US" sz="2400" dirty="0" err="1"/>
+              <a:t>idx</a:t>
+            </a:r>
+            <a:r>
+              <a:rPr lang="en-US" sz="2400" dirty="0"/>
+              <a:t>] += </a:t>
+            </a:r>
+            <a:r>
+              <a:rPr lang="en-US" sz="2400" dirty="0" err="1"/>
+              <a:t>arr</a:t>
+            </a:r>
+            <a:r>
+              <a:rPr lang="en-US" sz="2400" dirty="0"/>
+              <a:t>[</a:t>
+            </a:r>
+            <a:r>
+              <a:rPr lang="en-US" sz="2400" dirty="0" err="1"/>
+              <a:t>i</a:t>
+            </a:r>
+            <a:r>
+              <a:rPr lang="en-US" sz="2400" dirty="0"/>
+              <a:t>]” is run is 0 + 1 +…+ (size-2) times, or 1 + (size * size/2) times. Therefore, the complexity is O(n^2) (or O(n^2/2+1) if you want to be precise</a:t>
+            </a:r>
+          </a:p>
+        </p:txBody>
+      </p:sp>
+      <p:pic>
+        <p:nvPicPr>
+          <p:cNvPr id="6" name="Picture 5" descr="A computer code with many text&#10;&#10;AI-generated content may be incorrect.">
+            <a:extLst>
+              <a:ext uri="{FF2B5EF4-FFF2-40B4-BE49-F238E27FC236}">
+                <a16:creationId xmlns:a16="http://schemas.microsoft.com/office/drawing/2014/main" id="{F8AA2AAA-9B37-259A-BB9F-57F88F376B98}"/>
+              </a:ext>
+            </a:extLst>
+          </p:cNvPr>
+          <p:cNvPicPr>
+            <a:picLocks noChangeAspect="1"/>
+          </p:cNvPicPr>
+          <p:nvPr/>
+        </p:nvPicPr>
+        <p:blipFill>
+          <a:blip r:embed="rId3">
+            <a:extLst>
+              <a:ext uri="{28A0092B-C50C-407E-A947-70E740481C1C}">
+                <a14:useLocalDpi xmlns:a14="http://schemas.microsoft.com/office/drawing/2010/main" val="0"/>
+              </a:ext>
+            </a:extLst>
+          </a:blip>
+          <a:stretch>
+            <a:fillRect/>
+          </a:stretch>
+        </p:blipFill>
+        <p:spPr>
+          <a:xfrm>
+            <a:off x="228600" y="1581150"/>
+            <a:ext cx="3962400" cy="2781300"/>
+          </a:xfrm>
+          <a:prstGeom prst="rect">
+            <a:avLst/>
+          </a:prstGeom>
+        </p:spPr>
+      </p:pic>
+    </p:spTree>
+    <p:extLst>
+      <p:ext uri="{BB962C8B-B14F-4D97-AF65-F5344CB8AC3E}">
+        <p14:creationId xmlns:p14="http://schemas.microsoft.com/office/powerpoint/2010/main" val="1904688862"/>
+      </p:ext>
+    </p:extLst>
+  </p:cSld>
+  <p:clrMapOvr>
+    <a:masterClrMapping/>
+  </p:clrMapOvr>
+</p:sld>
+</file>
+
+<file path=ppt/slides/slide2.xml><?xml version="1.0" encoding="utf-8"?>
 <p:sld xmlns:a="http://schemas.openxmlformats.org/drawingml/2006/main" xmlns:r="http://schemas.openxmlformats.org/officeDocument/2006/relationships" xmlns:p="http://schemas.openxmlformats.org/presentationml/2006/main">
   <p:cSld>
     <p:spTree>
@@ -10497,12 +9914,22 @@
             <p:ph type="title"/>
           </p:nvPr>
         </p:nvSpPr>
-        <p:spPr/>
-        <p:txBody>
-          <a:bodyPr/>
+        <p:spPr>
+          <a:xfrm>
+            <a:off x="457200" y="361950"/>
+            <a:ext cx="8229600" cy="857250"/>
+          </a:xfrm>
+        </p:spPr>
+        <p:txBody>
+          <a:bodyPr>
+            <a:normAutofit/>
+          </a:bodyPr>
           <a:lstStyle/>
           <a:p>
-            <a:endParaRPr lang="en-US" dirty="0"/>
+            <a:r>
+              <a:rPr lang="en-US" sz="3200" dirty="0"/>
+              <a:t>Exam Details</a:t>
+            </a:r>
           </a:p>
         </p:txBody>
       </p:sp>
@@ -10516,12 +9943,66 @@
             <p:ph idx="1"/>
           </p:nvPr>
         </p:nvSpPr>
-        <p:spPr/>
-        <p:txBody>
-          <a:bodyPr/>
+        <p:spPr>
+          <a:xfrm>
+            <a:off x="452718" y="1219200"/>
+            <a:ext cx="8229600" cy="3352800"/>
+          </a:xfrm>
+        </p:spPr>
+        <p:txBody>
+          <a:bodyPr>
+            <a:normAutofit/>
+          </a:bodyPr>
           <a:lstStyle/>
           <a:p>
-            <a:endParaRPr lang="en-US"/>
+            <a:r>
+              <a:rPr lang="en-US" sz="1800" dirty="0"/>
+              <a:t>This is a WRITTEN exam, so please bring pencils/erasers</a:t>
+            </a:r>
+          </a:p>
+          <a:p>
+            <a:r>
+              <a:rPr lang="en-US" sz="1800" dirty="0"/>
+              <a:t>The exam is </a:t>
+            </a:r>
+            <a:r>
+              <a:rPr lang="en-US" sz="1800" i="1" dirty="0"/>
+              <a:t>open note/book</a:t>
+            </a:r>
+            <a:r>
+              <a:rPr lang="en-US" sz="1800" dirty="0"/>
+              <a:t>, but </a:t>
+            </a:r>
+            <a:r>
+              <a:rPr lang="en-US" sz="1800" i="1" dirty="0"/>
+              <a:t>closed laptop/calculator/electronics</a:t>
+            </a:r>
+            <a:endParaRPr lang="en-US" sz="1800" dirty="0"/>
+          </a:p>
+          <a:p>
+            <a:r>
+              <a:rPr lang="en-US" sz="1800" dirty="0"/>
+              <a:t>There are some multiple choice questions, and some free response questions</a:t>
+            </a:r>
+          </a:p>
+          <a:p>
+            <a:pPr lvl="1"/>
+            <a:r>
+              <a:rPr lang="en-US" sz="1600" dirty="0"/>
+              <a:t>Free response questions are mostly about writing code</a:t>
+            </a:r>
+          </a:p>
+          <a:p>
+            <a:r>
+              <a:rPr lang="en-US" sz="2000" dirty="0"/>
+              <a:t>We will most likely be curving the exam, depending on the overall class performance</a:t>
+            </a:r>
+          </a:p>
+          <a:p>
+            <a:r>
+              <a:rPr lang="en-US" sz="2000" dirty="0"/>
+              <a:t>A list of C standard library functions that you can use in your free response questions will be provided. </a:t>
+            </a:r>
           </a:p>
         </p:txBody>
       </p:sp>
@@ -10529,6 +10010,625 @@
     <p:extLst>
       <p:ext uri="{BB962C8B-B14F-4D97-AF65-F5344CB8AC3E}">
         <p14:creationId xmlns:p14="http://schemas.microsoft.com/office/powerpoint/2010/main" val="78549601"/>
+      </p:ext>
+    </p:extLst>
+  </p:cSld>
+  <p:clrMapOvr>
+    <a:masterClrMapping/>
+  </p:clrMapOvr>
+</p:sld>
+</file>
+
+<file path=ppt/slides/slide3.xml><?xml version="1.0" encoding="utf-8"?>
+<p:sld xmlns:a="http://schemas.openxmlformats.org/drawingml/2006/main" xmlns:r="http://schemas.openxmlformats.org/officeDocument/2006/relationships" xmlns:p="http://schemas.openxmlformats.org/presentationml/2006/main">
+  <p:cSld>
+    <p:spTree>
+      <p:nvGrpSpPr>
+        <p:cNvPr id="1" name="">
+          <a:extLst>
+            <a:ext uri="{FF2B5EF4-FFF2-40B4-BE49-F238E27FC236}">
+              <a16:creationId xmlns:a16="http://schemas.microsoft.com/office/drawing/2014/main" id="{A621FDF0-1350-9678-93D2-F15127F11FBB}"/>
+            </a:ext>
+          </a:extLst>
+        </p:cNvPr>
+        <p:cNvGrpSpPr/>
+        <p:nvPr/>
+      </p:nvGrpSpPr>
+      <p:grpSpPr>
+        <a:xfrm>
+          <a:off x="0" y="0"/>
+          <a:ext cx="0" cy="0"/>
+          <a:chOff x="0" y="0"/>
+          <a:chExt cx="0" cy="0"/>
+        </a:xfrm>
+      </p:grpSpPr>
+      <p:sp>
+        <p:nvSpPr>
+          <p:cNvPr id="4" name="Title 3">
+            <a:extLst>
+              <a:ext uri="{FF2B5EF4-FFF2-40B4-BE49-F238E27FC236}">
+                <a16:creationId xmlns:a16="http://schemas.microsoft.com/office/drawing/2014/main" id="{4C35CE1D-4EE3-4E64-8BCF-9A8D8823B48C}"/>
+              </a:ext>
+            </a:extLst>
+          </p:cNvPr>
+          <p:cNvSpPr>
+            <a:spLocks noGrp="1"/>
+          </p:cNvSpPr>
+          <p:nvPr>
+            <p:ph type="title"/>
+          </p:nvPr>
+        </p:nvSpPr>
+        <p:spPr>
+          <a:xfrm>
+            <a:off x="457200" y="361950"/>
+            <a:ext cx="8229600" cy="857250"/>
+          </a:xfrm>
+        </p:spPr>
+        <p:txBody>
+          <a:bodyPr>
+            <a:normAutofit/>
+          </a:bodyPr>
+          <a:lstStyle/>
+          <a:p>
+            <a:r>
+              <a:rPr lang="en-US" sz="3200" dirty="0"/>
+              <a:t>Free Response Tips</a:t>
+            </a:r>
+          </a:p>
+        </p:txBody>
+      </p:sp>
+      <p:sp>
+        <p:nvSpPr>
+          <p:cNvPr id="5" name="Content Placeholder 4">
+            <a:extLst>
+              <a:ext uri="{FF2B5EF4-FFF2-40B4-BE49-F238E27FC236}">
+                <a16:creationId xmlns:a16="http://schemas.microsoft.com/office/drawing/2014/main" id="{33B1450E-C425-ACB0-2C96-75A9EEDCB61A}"/>
+              </a:ext>
+            </a:extLst>
+          </p:cNvPr>
+          <p:cNvSpPr>
+            <a:spLocks noGrp="1"/>
+          </p:cNvSpPr>
+          <p:nvPr>
+            <p:ph idx="1"/>
+          </p:nvPr>
+        </p:nvSpPr>
+        <p:spPr>
+          <a:xfrm>
+            <a:off x="457200" y="1383926"/>
+            <a:ext cx="8229600" cy="3352800"/>
+          </a:xfrm>
+        </p:spPr>
+        <p:txBody>
+          <a:bodyPr>
+            <a:normAutofit/>
+          </a:bodyPr>
+          <a:lstStyle/>
+          <a:p>
+            <a:r>
+              <a:rPr lang="en-US" sz="1800" dirty="0"/>
+              <a:t>Make a quick general plan for your solution, then start writing</a:t>
+            </a:r>
+          </a:p>
+          <a:p>
+            <a:r>
+              <a:rPr lang="en-US" sz="1800" dirty="0"/>
+              <a:t>As you write, you will think of things to change. Allow yourself space to change your solution as you go.</a:t>
+            </a:r>
+          </a:p>
+          <a:p>
+            <a:r>
+              <a:rPr lang="en-US" sz="1800" i="1" dirty="0"/>
+              <a:t>Think about edge cases!!!</a:t>
+            </a:r>
+          </a:p>
+          <a:p>
+            <a:r>
+              <a:rPr lang="en-US" sz="1800" dirty="0"/>
+              <a:t>If you can only think of a partial solution, something is better than nothing. Write as much as you can!</a:t>
+            </a:r>
+          </a:p>
+          <a:p>
+            <a:r>
+              <a:rPr lang="en-US" sz="1800" dirty="0"/>
+              <a:t>We will likely be lenient with some C syntax (e.g., no semicolons after every line, a missing set of brackets) if we can understand what your intent was, but try your best to write compile-able code.</a:t>
+            </a:r>
+          </a:p>
+          <a:p>
+            <a:r>
+              <a:rPr lang="en-US" sz="1800" dirty="0"/>
+              <a:t>Believe in yourself! You are smarter than you think.</a:t>
+            </a:r>
+          </a:p>
+        </p:txBody>
+      </p:sp>
+    </p:spTree>
+    <p:extLst>
+      <p:ext uri="{BB962C8B-B14F-4D97-AF65-F5344CB8AC3E}">
+        <p14:creationId xmlns:p14="http://schemas.microsoft.com/office/powerpoint/2010/main" val="2976743968"/>
+      </p:ext>
+    </p:extLst>
+  </p:cSld>
+  <p:clrMapOvr>
+    <a:masterClrMapping/>
+  </p:clrMapOvr>
+</p:sld>
+</file>
+
+<file path=ppt/slides/slide4.xml><?xml version="1.0" encoding="utf-8"?>
+<p:sld xmlns:a="http://schemas.openxmlformats.org/drawingml/2006/main" xmlns:r="http://schemas.openxmlformats.org/officeDocument/2006/relationships" xmlns:p="http://schemas.openxmlformats.org/presentationml/2006/main">
+  <p:cSld>
+    <p:spTree>
+      <p:nvGrpSpPr>
+        <p:cNvPr id="1" name="">
+          <a:extLst>
+            <a:ext uri="{FF2B5EF4-FFF2-40B4-BE49-F238E27FC236}">
+              <a16:creationId xmlns:a16="http://schemas.microsoft.com/office/drawing/2014/main" id="{4485424F-6B3D-FB06-C875-85F75A55FEA8}"/>
+            </a:ext>
+          </a:extLst>
+        </p:cNvPr>
+        <p:cNvGrpSpPr/>
+        <p:nvPr/>
+      </p:nvGrpSpPr>
+      <p:grpSpPr>
+        <a:xfrm>
+          <a:off x="0" y="0"/>
+          <a:ext cx="0" cy="0"/>
+          <a:chOff x="0" y="0"/>
+          <a:chExt cx="0" cy="0"/>
+        </a:xfrm>
+      </p:grpSpPr>
+      <p:sp>
+        <p:nvSpPr>
+          <p:cNvPr id="4" name="Title 3">
+            <a:extLst>
+              <a:ext uri="{FF2B5EF4-FFF2-40B4-BE49-F238E27FC236}">
+                <a16:creationId xmlns:a16="http://schemas.microsoft.com/office/drawing/2014/main" id="{6E8FA896-4C13-E563-A0E4-9609531E3071}"/>
+              </a:ext>
+            </a:extLst>
+          </p:cNvPr>
+          <p:cNvSpPr>
+            <a:spLocks noGrp="1"/>
+          </p:cNvSpPr>
+          <p:nvPr>
+            <p:ph type="title"/>
+          </p:nvPr>
+        </p:nvSpPr>
+        <p:spPr>
+          <a:xfrm>
+            <a:off x="452718" y="285750"/>
+            <a:ext cx="8229600" cy="857250"/>
+          </a:xfrm>
+        </p:spPr>
+        <p:txBody>
+          <a:bodyPr>
+            <a:normAutofit/>
+          </a:bodyPr>
+          <a:lstStyle/>
+          <a:p>
+            <a:r>
+              <a:rPr lang="en-US" sz="3200" dirty="0"/>
+              <a:t>What You Should Study</a:t>
+            </a:r>
+          </a:p>
+        </p:txBody>
+      </p:sp>
+      <p:sp>
+        <p:nvSpPr>
+          <p:cNvPr id="5" name="Content Placeholder 4">
+            <a:extLst>
+              <a:ext uri="{FF2B5EF4-FFF2-40B4-BE49-F238E27FC236}">
+                <a16:creationId xmlns:a16="http://schemas.microsoft.com/office/drawing/2014/main" id="{8FABC334-EFB2-E3FB-019A-38600A4BC8CF}"/>
+              </a:ext>
+            </a:extLst>
+          </p:cNvPr>
+          <p:cNvSpPr>
+            <a:spLocks noGrp="1"/>
+          </p:cNvSpPr>
+          <p:nvPr>
+            <p:ph idx="1"/>
+          </p:nvPr>
+        </p:nvSpPr>
+        <p:spPr>
+          <a:xfrm>
+            <a:off x="466164" y="1132915"/>
+            <a:ext cx="8229600" cy="3962400"/>
+          </a:xfrm>
+        </p:spPr>
+        <p:txBody>
+          <a:bodyPr>
+            <a:normAutofit/>
+          </a:bodyPr>
+          <a:lstStyle/>
+          <a:p>
+            <a:r>
+              <a:rPr lang="en-US" sz="1800" dirty="0"/>
+              <a:t>Pointers (double/triple pointers, pointer arithmetic, etc.)</a:t>
+            </a:r>
+          </a:p>
+          <a:p>
+            <a:r>
+              <a:rPr lang="en-US" sz="1800" dirty="0"/>
+              <a:t>Strings</a:t>
+            </a:r>
+          </a:p>
+          <a:p>
+            <a:r>
+              <a:rPr lang="en-US" sz="1800" dirty="0"/>
+              <a:t>Variable Declarations (types, visibility, etc.)</a:t>
+            </a:r>
+          </a:p>
+          <a:p>
+            <a:r>
+              <a:rPr lang="en-US" sz="1800" dirty="0"/>
+              <a:t>Code Image (stack and heap, how are they different? Where do global/constant variables go?)</a:t>
+            </a:r>
+          </a:p>
+          <a:p>
+            <a:r>
+              <a:rPr lang="en-US" sz="1800" dirty="0"/>
+              <a:t>Malloc and free (how to use, memory leaks, use-after-free, etc.)</a:t>
+            </a:r>
+          </a:p>
+          <a:p>
+            <a:r>
+              <a:rPr lang="en-US" sz="1800" dirty="0"/>
+              <a:t>Structs (how to declare/define, how to access elements, struct size, etc.)</a:t>
+            </a:r>
+          </a:p>
+          <a:p>
+            <a:r>
+              <a:rPr lang="en-US" sz="1800" dirty="0"/>
+              <a:t>Time complexity</a:t>
+            </a:r>
+          </a:p>
+          <a:p>
+            <a:r>
+              <a:rPr lang="en-US" sz="1800" dirty="0"/>
+              <a:t>Recursion (we will talk about it in class today)</a:t>
+            </a:r>
+          </a:p>
+          <a:p>
+            <a:r>
+              <a:rPr lang="en-US" sz="1800" dirty="0"/>
+              <a:t>Search algorithms (linear search, binary search)</a:t>
+            </a:r>
+          </a:p>
+          <a:p>
+            <a:r>
+              <a:rPr lang="en-US" sz="1800" dirty="0"/>
+              <a:t>Sorting algorithms</a:t>
+            </a:r>
+          </a:p>
+        </p:txBody>
+      </p:sp>
+    </p:spTree>
+    <p:extLst>
+      <p:ext uri="{BB962C8B-B14F-4D97-AF65-F5344CB8AC3E}">
+        <p14:creationId xmlns:p14="http://schemas.microsoft.com/office/powerpoint/2010/main" val="2300202409"/>
+      </p:ext>
+    </p:extLst>
+  </p:cSld>
+  <p:clrMapOvr>
+    <a:masterClrMapping/>
+  </p:clrMapOvr>
+</p:sld>
+</file>
+
+<file path=ppt/slides/slide5.xml><?xml version="1.0" encoding="utf-8"?>
+<p:sld xmlns:a="http://schemas.openxmlformats.org/drawingml/2006/main" xmlns:r="http://schemas.openxmlformats.org/officeDocument/2006/relationships" xmlns:p="http://schemas.openxmlformats.org/presentationml/2006/main">
+  <p:cSld>
+    <p:spTree>
+      <p:nvGrpSpPr>
+        <p:cNvPr id="1" name="">
+          <a:extLst>
+            <a:ext uri="{FF2B5EF4-FFF2-40B4-BE49-F238E27FC236}">
+              <a16:creationId xmlns:a16="http://schemas.microsoft.com/office/drawing/2014/main" id="{676920E3-FD02-9C78-84DF-BE1186E7FB1F}"/>
+            </a:ext>
+          </a:extLst>
+        </p:cNvPr>
+        <p:cNvGrpSpPr/>
+        <p:nvPr/>
+      </p:nvGrpSpPr>
+      <p:grpSpPr>
+        <a:xfrm>
+          <a:off x="0" y="0"/>
+          <a:ext cx="0" cy="0"/>
+          <a:chOff x="0" y="0"/>
+          <a:chExt cx="0" cy="0"/>
+        </a:xfrm>
+      </p:grpSpPr>
+      <p:sp>
+        <p:nvSpPr>
+          <p:cNvPr id="4" name="Title 3">
+            <a:extLst>
+              <a:ext uri="{FF2B5EF4-FFF2-40B4-BE49-F238E27FC236}">
+                <a16:creationId xmlns:a16="http://schemas.microsoft.com/office/drawing/2014/main" id="{2A8D5F4E-AD9B-BF86-3D3B-DBB6AF33C2BF}"/>
+              </a:ext>
+            </a:extLst>
+          </p:cNvPr>
+          <p:cNvSpPr>
+            <a:spLocks noGrp="1"/>
+          </p:cNvSpPr>
+          <p:nvPr>
+            <p:ph type="title"/>
+          </p:nvPr>
+        </p:nvSpPr>
+        <p:spPr>
+          <a:xfrm>
+            <a:off x="452718" y="438150"/>
+            <a:ext cx="8229600" cy="685800"/>
+          </a:xfrm>
+        </p:spPr>
+        <p:txBody>
+          <a:bodyPr>
+            <a:normAutofit/>
+          </a:bodyPr>
+          <a:lstStyle/>
+          <a:p>
+            <a:r>
+              <a:rPr lang="en-US" sz="3200" dirty="0"/>
+              <a:t>What You Don’t Have to Study</a:t>
+            </a:r>
+          </a:p>
+        </p:txBody>
+      </p:sp>
+      <p:sp>
+        <p:nvSpPr>
+          <p:cNvPr id="5" name="Content Placeholder 4">
+            <a:extLst>
+              <a:ext uri="{FF2B5EF4-FFF2-40B4-BE49-F238E27FC236}">
+                <a16:creationId xmlns:a16="http://schemas.microsoft.com/office/drawing/2014/main" id="{2E9AFD5C-443A-0136-AB48-07DF22B7EFE2}"/>
+              </a:ext>
+            </a:extLst>
+          </p:cNvPr>
+          <p:cNvSpPr>
+            <a:spLocks noGrp="1"/>
+          </p:cNvSpPr>
+          <p:nvPr>
+            <p:ph idx="1"/>
+          </p:nvPr>
+        </p:nvSpPr>
+        <p:spPr>
+          <a:xfrm>
+            <a:off x="461682" y="1123950"/>
+            <a:ext cx="8229600" cy="3962400"/>
+          </a:xfrm>
+        </p:spPr>
+        <p:txBody>
+          <a:bodyPr>
+            <a:normAutofit/>
+          </a:bodyPr>
+          <a:lstStyle/>
+          <a:p>
+            <a:r>
+              <a:rPr lang="en-US" sz="1800" dirty="0"/>
+              <a:t>Linux commands/compiler commands</a:t>
+            </a:r>
+          </a:p>
+          <a:p>
+            <a:r>
+              <a:rPr lang="en-US" sz="1800" dirty="0"/>
+              <a:t>Git and </a:t>
+            </a:r>
+            <a:r>
+              <a:rPr lang="en-US" sz="1800" dirty="0" err="1"/>
+              <a:t>Github</a:t>
+            </a:r>
+            <a:r>
+              <a:rPr lang="en-US" sz="1800" dirty="0"/>
+              <a:t> stuff</a:t>
+            </a:r>
+          </a:p>
+          <a:p>
+            <a:r>
+              <a:rPr lang="en-US" sz="1800" dirty="0"/>
+              <a:t>How to use </a:t>
+            </a:r>
+            <a:r>
+              <a:rPr lang="en-US" sz="1800" dirty="0" err="1"/>
+              <a:t>Valgrind</a:t>
+            </a:r>
+            <a:r>
+              <a:rPr lang="en-US" sz="1800" dirty="0"/>
+              <a:t>/</a:t>
+            </a:r>
+            <a:r>
+              <a:rPr lang="en-US" sz="1800" dirty="0" err="1"/>
+              <a:t>AddressSanitizer</a:t>
+            </a:r>
+            <a:r>
+              <a:rPr lang="en-US" sz="1800" dirty="0"/>
+              <a:t> (though you should be familiar with heap usage errors in general, we will not test on how to specifically use these tools or read the output)</a:t>
+            </a:r>
+          </a:p>
+          <a:p>
+            <a:r>
+              <a:rPr lang="en-US" sz="1800" dirty="0" err="1"/>
+              <a:t>Makefile</a:t>
+            </a:r>
+            <a:r>
+              <a:rPr lang="en-US" sz="1800" dirty="0"/>
+              <a:t> (VERY useful skill, but it won’t be on the midterm)</a:t>
+            </a:r>
+          </a:p>
+          <a:p>
+            <a:endParaRPr lang="en-US" sz="1800" dirty="0"/>
+          </a:p>
+          <a:p>
+            <a:endParaRPr lang="en-US" sz="1800" dirty="0"/>
+          </a:p>
+        </p:txBody>
+      </p:sp>
+    </p:spTree>
+    <p:extLst>
+      <p:ext uri="{BB962C8B-B14F-4D97-AF65-F5344CB8AC3E}">
+        <p14:creationId xmlns:p14="http://schemas.microsoft.com/office/powerpoint/2010/main" val="2976301919"/>
+      </p:ext>
+    </p:extLst>
+  </p:cSld>
+  <p:clrMapOvr>
+    <a:masterClrMapping/>
+  </p:clrMapOvr>
+</p:sld>
+</file>
+
+<file path=ppt/slides/slide6.xml><?xml version="1.0" encoding="utf-8"?>
+<p:sld xmlns:a="http://schemas.openxmlformats.org/drawingml/2006/main" xmlns:r="http://schemas.openxmlformats.org/officeDocument/2006/relationships" xmlns:p="http://schemas.openxmlformats.org/presentationml/2006/main">
+  <p:cSld>
+    <p:spTree>
+      <p:nvGrpSpPr>
+        <p:cNvPr id="1" name="">
+          <a:extLst>
+            <a:ext uri="{FF2B5EF4-FFF2-40B4-BE49-F238E27FC236}">
+              <a16:creationId xmlns:a16="http://schemas.microsoft.com/office/drawing/2014/main" id="{7337F215-3BB1-FA68-D675-953F2CBA79B5}"/>
+            </a:ext>
+          </a:extLst>
+        </p:cNvPr>
+        <p:cNvGrpSpPr/>
+        <p:nvPr/>
+      </p:nvGrpSpPr>
+      <p:grpSpPr>
+        <a:xfrm>
+          <a:off x="0" y="0"/>
+          <a:ext cx="0" cy="0"/>
+          <a:chOff x="0" y="0"/>
+          <a:chExt cx="0" cy="0"/>
+        </a:xfrm>
+      </p:grpSpPr>
+      <p:sp>
+        <p:nvSpPr>
+          <p:cNvPr id="4" name="Title 3">
+            <a:extLst>
+              <a:ext uri="{FF2B5EF4-FFF2-40B4-BE49-F238E27FC236}">
+                <a16:creationId xmlns:a16="http://schemas.microsoft.com/office/drawing/2014/main" id="{6B62C407-320A-726A-3105-FDEE56DCB687}"/>
+              </a:ext>
+            </a:extLst>
+          </p:cNvPr>
+          <p:cNvSpPr>
+            <a:spLocks noGrp="1"/>
+          </p:cNvSpPr>
+          <p:nvPr>
+            <p:ph type="title"/>
+          </p:nvPr>
+        </p:nvSpPr>
+        <p:spPr>
+          <a:xfrm>
+            <a:off x="452718" y="438150"/>
+            <a:ext cx="8229600" cy="685800"/>
+          </a:xfrm>
+        </p:spPr>
+        <p:txBody>
+          <a:bodyPr>
+            <a:normAutofit/>
+          </a:bodyPr>
+          <a:lstStyle/>
+          <a:p>
+            <a:r>
+              <a:rPr lang="en-US" sz="3200" dirty="0"/>
+              <a:t>Review: Free Response</a:t>
+            </a:r>
+          </a:p>
+        </p:txBody>
+      </p:sp>
+      <p:sp>
+        <p:nvSpPr>
+          <p:cNvPr id="5" name="Content Placeholder 4">
+            <a:extLst>
+              <a:ext uri="{FF2B5EF4-FFF2-40B4-BE49-F238E27FC236}">
+                <a16:creationId xmlns:a16="http://schemas.microsoft.com/office/drawing/2014/main" id="{F48ED61A-FDD7-8BE1-3012-A88A1BDAB7AA}"/>
+              </a:ext>
+            </a:extLst>
+          </p:cNvPr>
+          <p:cNvSpPr>
+            <a:spLocks noGrp="1"/>
+          </p:cNvSpPr>
+          <p:nvPr>
+            <p:ph idx="1"/>
+          </p:nvPr>
+        </p:nvSpPr>
+        <p:spPr>
+          <a:xfrm>
+            <a:off x="461682" y="1123950"/>
+            <a:ext cx="8229600" cy="3962400"/>
+          </a:xfrm>
+        </p:spPr>
+        <p:txBody>
+          <a:bodyPr>
+            <a:normAutofit/>
+          </a:bodyPr>
+          <a:lstStyle/>
+          <a:p>
+            <a:pPr marL="0" indent="0">
+              <a:buNone/>
+            </a:pPr>
+            <a:endParaRPr lang="en-US" sz="1800" dirty="0"/>
+          </a:p>
+          <a:p>
+            <a:endParaRPr lang="en-US" sz="1800" dirty="0"/>
+          </a:p>
+        </p:txBody>
+      </p:sp>
+      <p:sp>
+        <p:nvSpPr>
+          <p:cNvPr id="2" name="TextBox 1">
+            <a:extLst>
+              <a:ext uri="{FF2B5EF4-FFF2-40B4-BE49-F238E27FC236}">
+                <a16:creationId xmlns:a16="http://schemas.microsoft.com/office/drawing/2014/main" id="{F73D6F03-6D64-DF71-0BFD-1EFC8D9140EB}"/>
+              </a:ext>
+            </a:extLst>
+          </p:cNvPr>
+          <p:cNvSpPr txBox="1"/>
+          <p:nvPr/>
+        </p:nvSpPr>
+        <p:spPr>
+          <a:xfrm>
+            <a:off x="461682" y="1276350"/>
+            <a:ext cx="7996518" cy="2308324"/>
+          </a:xfrm>
+          <a:prstGeom prst="rect">
+            <a:avLst/>
+          </a:prstGeom>
+          <a:noFill/>
+        </p:spPr>
+        <p:txBody>
+          <a:bodyPr wrap="square" rtlCol="0">
+            <a:spAutoFit/>
+          </a:bodyPr>
+          <a:lstStyle/>
+          <a:p>
+            <a:r>
+              <a:rPr lang="en-US" sz="1800" dirty="0">
+                <a:solidFill>
+                  <a:schemeClr val="bg1"/>
+                </a:solidFill>
+              </a:rPr>
+              <a:t>Write code that can keep track of books in a library. Each Book struct should record book title, author, and whether the book is checked out. A Library should contain all Book structs, as well as a total count of all books.</a:t>
+            </a:r>
+          </a:p>
+          <a:p>
+            <a:endParaRPr lang="en-US" sz="1800" dirty="0">
+              <a:solidFill>
+                <a:schemeClr val="bg1"/>
+              </a:solidFill>
+            </a:endParaRPr>
+          </a:p>
+          <a:p>
+            <a:r>
+              <a:rPr lang="en-US" sz="1800" dirty="0">
+                <a:solidFill>
+                  <a:schemeClr val="bg1"/>
+                </a:solidFill>
+              </a:rPr>
+              <a:t>Define the Book struct, and write a function that can create a Book given a title and author. Define the Library struct, and write a function that can add a Book to the Library. Finally, write a function that will sort Books in the Library by author name.</a:t>
+            </a:r>
+          </a:p>
+        </p:txBody>
+      </p:sp>
+    </p:spTree>
+    <p:extLst>
+      <p:ext uri="{BB962C8B-B14F-4D97-AF65-F5344CB8AC3E}">
+        <p14:creationId xmlns:p14="http://schemas.microsoft.com/office/powerpoint/2010/main" val="2543961624"/>
       </p:ext>
     </p:extLst>
   </p:cSld>
@@ -10543,7 +10643,13 @@
   <p:cSld>
     <p:spTree>
       <p:nvGrpSpPr>
-        <p:cNvPr id="1" name=""/>
+        <p:cNvPr id="1" name="">
+          <a:extLst>
+            <a:ext uri="{FF2B5EF4-FFF2-40B4-BE49-F238E27FC236}">
+              <a16:creationId xmlns:a16="http://schemas.microsoft.com/office/drawing/2014/main" id="{C460420E-3FE2-02B8-1AA9-84C4B5A21CB3}"/>
+            </a:ext>
+          </a:extLst>
+        </p:cNvPr>
         <p:cNvGrpSpPr/>
         <p:nvPr/>
       </p:nvGrpSpPr>
@@ -10560,7 +10666,7 @@
           <p:cNvPr id="4" name="Title 3">
             <a:extLst>
               <a:ext uri="{FF2B5EF4-FFF2-40B4-BE49-F238E27FC236}">
-                <a16:creationId xmlns:a16="http://schemas.microsoft.com/office/drawing/2014/main" id="{3AB3D818-D681-D4B2-088F-9551F919D65B}"/>
+                <a16:creationId xmlns:a16="http://schemas.microsoft.com/office/drawing/2014/main" id="{D6000414-05AD-6605-8211-AE48FE4FDEF8}"/>
               </a:ext>
             </a:extLst>
           </p:cNvPr>
@@ -10571,12 +10677,22 @@
             <p:ph type="title"/>
           </p:nvPr>
         </p:nvSpPr>
-        <p:spPr/>
-        <p:txBody>
-          <a:bodyPr/>
+        <p:spPr>
+          <a:xfrm>
+            <a:off x="452718" y="438150"/>
+            <a:ext cx="8229600" cy="685800"/>
+          </a:xfrm>
+        </p:spPr>
+        <p:txBody>
+          <a:bodyPr>
+            <a:normAutofit/>
+          </a:bodyPr>
           <a:lstStyle/>
           <a:p>
-            <a:endParaRPr lang="en-US" dirty="0"/>
+            <a:r>
+              <a:rPr lang="en-US" sz="3200" dirty="0"/>
+              <a:t>Review: Size of Structs</a:t>
+            </a:r>
           </a:p>
         </p:txBody>
       </p:sp>
@@ -10585,7 +10701,7 @@
           <p:cNvPr id="5" name="Content Placeholder 4">
             <a:extLst>
               <a:ext uri="{FF2B5EF4-FFF2-40B4-BE49-F238E27FC236}">
-                <a16:creationId xmlns:a16="http://schemas.microsoft.com/office/drawing/2014/main" id="{49B2C2A8-3704-5D1A-D48C-088953EBB831}"/>
+                <a16:creationId xmlns:a16="http://schemas.microsoft.com/office/drawing/2014/main" id="{053A2DDB-9045-7E6D-71E3-E5DAE3DC9405}"/>
               </a:ext>
             </a:extLst>
           </p:cNvPr>
@@ -10596,19 +10712,139 @@
             <p:ph idx="1"/>
           </p:nvPr>
         </p:nvSpPr>
-        <p:spPr/>
-        <p:txBody>
-          <a:bodyPr/>
+        <p:spPr>
+          <a:xfrm>
+            <a:off x="461682" y="1123950"/>
+            <a:ext cx="8229600" cy="3962400"/>
+          </a:xfrm>
+        </p:spPr>
+        <p:txBody>
+          <a:bodyPr>
+            <a:normAutofit/>
+          </a:bodyPr>
           <a:lstStyle/>
           <a:p>
-            <a:endParaRPr lang="en-US"/>
+            <a:pPr marL="0" indent="0">
+              <a:buNone/>
+            </a:pPr>
+            <a:endParaRPr lang="en-US" sz="1800" dirty="0"/>
+          </a:p>
+          <a:p>
+            <a:endParaRPr lang="en-US" sz="1800" dirty="0"/>
+          </a:p>
+        </p:txBody>
+      </p:sp>
+      <p:pic>
+        <p:nvPicPr>
+          <p:cNvPr id="3" name="Picture 2" descr="A screen shot of a computer code&#10;&#10;AI-generated content may be incorrect.">
+            <a:extLst>
+              <a:ext uri="{FF2B5EF4-FFF2-40B4-BE49-F238E27FC236}">
+                <a16:creationId xmlns:a16="http://schemas.microsoft.com/office/drawing/2014/main" id="{DD7D7058-C077-2751-1762-C4C7FE9A0C66}"/>
+              </a:ext>
+            </a:extLst>
+          </p:cNvPr>
+          <p:cNvPicPr>
+            <a:picLocks noChangeAspect="1"/>
+          </p:cNvPicPr>
+          <p:nvPr/>
+        </p:nvPicPr>
+        <p:blipFill>
+          <a:blip r:embed="rId3">
+            <a:extLst>
+              <a:ext uri="{28A0092B-C50C-407E-A947-70E740481C1C}">
+                <a14:useLocalDpi xmlns:a14="http://schemas.microsoft.com/office/drawing/2010/main" val="0"/>
+              </a:ext>
+            </a:extLst>
+          </a:blip>
+          <a:stretch>
+            <a:fillRect/>
+          </a:stretch>
+        </p:blipFill>
+        <p:spPr>
+          <a:xfrm>
+            <a:off x="452718" y="1657350"/>
+            <a:ext cx="3657600" cy="2717800"/>
+          </a:xfrm>
+          <a:prstGeom prst="rect">
+            <a:avLst/>
+          </a:prstGeom>
+        </p:spPr>
+      </p:pic>
+      <p:sp>
+        <p:nvSpPr>
+          <p:cNvPr id="6" name="TextBox 5">
+            <a:extLst>
+              <a:ext uri="{FF2B5EF4-FFF2-40B4-BE49-F238E27FC236}">
+                <a16:creationId xmlns:a16="http://schemas.microsoft.com/office/drawing/2014/main" id="{ABD49DE1-95AD-690E-EE15-E1E4F2BE4BD8}"/>
+              </a:ext>
+            </a:extLst>
+          </p:cNvPr>
+          <p:cNvSpPr txBox="1"/>
+          <p:nvPr/>
+        </p:nvSpPr>
+        <p:spPr>
+          <a:xfrm>
+            <a:off x="4800600" y="2416085"/>
+            <a:ext cx="3352800" cy="1200329"/>
+          </a:xfrm>
+          <a:prstGeom prst="rect">
+            <a:avLst/>
+          </a:prstGeom>
+          <a:noFill/>
+        </p:spPr>
+        <p:txBody>
+          <a:bodyPr wrap="square" rtlCol="0">
+            <a:spAutoFit/>
+          </a:bodyPr>
+          <a:lstStyle/>
+          <a:p>
+            <a:r>
+              <a:rPr lang="en-US" dirty="0">
+                <a:solidFill>
+                  <a:schemeClr val="bg1"/>
+                </a:solidFill>
+              </a:rPr>
+              <a:t>What is the size of </a:t>
+            </a:r>
+            <a:r>
+              <a:rPr lang="en-US" dirty="0" err="1">
+                <a:solidFill>
+                  <a:schemeClr val="bg1"/>
+                </a:solidFill>
+              </a:rPr>
+              <a:t>MyStruct</a:t>
+            </a:r>
+            <a:r>
+              <a:rPr lang="en-US" dirty="0">
+                <a:solidFill>
+                  <a:schemeClr val="bg1"/>
+                </a:solidFill>
+              </a:rPr>
+              <a:t>? What is the size of </a:t>
+            </a:r>
+            <a:r>
+              <a:rPr lang="en-US" dirty="0" err="1">
+                <a:solidFill>
+                  <a:schemeClr val="bg1"/>
+                </a:solidFill>
+              </a:rPr>
+              <a:t>MyOtherStruct</a:t>
+            </a:r>
+            <a:r>
+              <a:rPr lang="en-US" dirty="0">
+                <a:solidFill>
+                  <a:schemeClr val="bg1"/>
+                </a:solidFill>
+              </a:rPr>
+              <a:t>?</a:t>
+            </a:r>
           </a:p>
         </p:txBody>
       </p:sp>
     </p:spTree>
     <p:extLst>
       <p:ext uri="{BB962C8B-B14F-4D97-AF65-F5344CB8AC3E}">
-        <p14:creationId xmlns:p14="http://schemas.microsoft.com/office/powerpoint/2010/main" val="3086678487"/>
+        <p14:creationId xmlns:p14="http://schemas.microsoft.com/office/powerpoint/2010/main" val="3472039521"/>
       </p:ext>
     </p:extLst>
   </p:cSld>
@@ -10623,7 +10859,13 @@
   <p:cSld>
     <p:spTree>
       <p:nvGrpSpPr>
-        <p:cNvPr id="1" name=""/>
+        <p:cNvPr id="1" name="">
+          <a:extLst>
+            <a:ext uri="{FF2B5EF4-FFF2-40B4-BE49-F238E27FC236}">
+              <a16:creationId xmlns:a16="http://schemas.microsoft.com/office/drawing/2014/main" id="{C5D37E75-0794-529F-A080-B1C1EFF65021}"/>
+            </a:ext>
+          </a:extLst>
+        </p:cNvPr>
         <p:cNvGrpSpPr/>
         <p:nvPr/>
       </p:nvGrpSpPr>
@@ -10637,7 +10879,13 @@
       </p:grpSpPr>
       <p:sp>
         <p:nvSpPr>
-          <p:cNvPr id="2" name="Title 1"/>
+          <p:cNvPr id="4" name="Title 3">
+            <a:extLst>
+              <a:ext uri="{FF2B5EF4-FFF2-40B4-BE49-F238E27FC236}">
+                <a16:creationId xmlns:a16="http://schemas.microsoft.com/office/drawing/2014/main" id="{B296EAE3-94F3-5B58-8CA8-BF690302E9CC}"/>
+              </a:ext>
+            </a:extLst>
+          </p:cNvPr>
           <p:cNvSpPr>
             <a:spLocks noGrp="1"/>
           </p:cNvSpPr>
@@ -10645,18 +10893,34 @@
             <p:ph type="title"/>
           </p:nvPr>
         </p:nvSpPr>
-        <p:spPr/>
-        <p:txBody>
-          <a:bodyPr/>
+        <p:spPr>
+          <a:xfrm>
+            <a:off x="452718" y="438150"/>
+            <a:ext cx="8229600" cy="685800"/>
+          </a:xfrm>
+        </p:spPr>
+        <p:txBody>
+          <a:bodyPr>
+            <a:normAutofit/>
+          </a:bodyPr>
           <a:lstStyle/>
           <a:p>
-            <a:endParaRPr lang="en-US" dirty="0"/>
-          </a:p>
-        </p:txBody>
-      </p:sp>
-      <p:sp>
-        <p:nvSpPr>
-          <p:cNvPr id="3" name="Content Placeholder 2"/>
+            <a:r>
+              <a:rPr lang="en-US" sz="3200" dirty="0"/>
+              <a:t>Review: Size of Structs</a:t>
+            </a:r>
+          </a:p>
+        </p:txBody>
+      </p:sp>
+      <p:sp>
+        <p:nvSpPr>
+          <p:cNvPr id="5" name="Content Placeholder 4">
+            <a:extLst>
+              <a:ext uri="{FF2B5EF4-FFF2-40B4-BE49-F238E27FC236}">
+                <a16:creationId xmlns:a16="http://schemas.microsoft.com/office/drawing/2014/main" id="{311A8718-EA2F-AF2C-F74C-9E6722DC994D}"/>
+              </a:ext>
+            </a:extLst>
+          </p:cNvPr>
           <p:cNvSpPr>
             <a:spLocks noGrp="1"/>
           </p:cNvSpPr>
@@ -10664,19 +10928,444 @@
             <p:ph idx="1"/>
           </p:nvPr>
         </p:nvSpPr>
-        <p:spPr/>
-        <p:txBody>
-          <a:bodyPr/>
+        <p:spPr>
+          <a:xfrm>
+            <a:off x="461682" y="1123950"/>
+            <a:ext cx="8229600" cy="3962400"/>
+          </a:xfrm>
+        </p:spPr>
+        <p:txBody>
+          <a:bodyPr>
+            <a:normAutofit/>
+          </a:bodyPr>
           <a:lstStyle/>
           <a:p>
-            <a:endParaRPr lang="en-US"/>
+            <a:pPr marL="0" indent="0">
+              <a:buNone/>
+            </a:pPr>
+            <a:endParaRPr lang="en-US" sz="1800" dirty="0"/>
+          </a:p>
+          <a:p>
+            <a:endParaRPr lang="en-US" sz="1800" dirty="0"/>
+          </a:p>
+        </p:txBody>
+      </p:sp>
+      <p:pic>
+        <p:nvPicPr>
+          <p:cNvPr id="3" name="Picture 2" descr="A screen shot of a computer code&#10;&#10;AI-generated content may be incorrect.">
+            <a:extLst>
+              <a:ext uri="{FF2B5EF4-FFF2-40B4-BE49-F238E27FC236}">
+                <a16:creationId xmlns:a16="http://schemas.microsoft.com/office/drawing/2014/main" id="{5F2C6204-5EE5-6325-92EF-98F7095A0FB0}"/>
+              </a:ext>
+            </a:extLst>
+          </p:cNvPr>
+          <p:cNvPicPr>
+            <a:picLocks noChangeAspect="1"/>
+          </p:cNvPicPr>
+          <p:nvPr/>
+        </p:nvPicPr>
+        <p:blipFill>
+          <a:blip r:embed="rId3">
+            <a:extLst>
+              <a:ext uri="{28A0092B-C50C-407E-A947-70E740481C1C}">
+                <a14:useLocalDpi xmlns:a14="http://schemas.microsoft.com/office/drawing/2010/main" val="0"/>
+              </a:ext>
+            </a:extLst>
+          </a:blip>
+          <a:stretch>
+            <a:fillRect/>
+          </a:stretch>
+        </p:blipFill>
+        <p:spPr>
+          <a:xfrm>
+            <a:off x="452718" y="1657350"/>
+            <a:ext cx="3657600" cy="2717800"/>
+          </a:xfrm>
+          <a:prstGeom prst="rect">
+            <a:avLst/>
+          </a:prstGeom>
+        </p:spPr>
+      </p:pic>
+      <p:sp>
+        <p:nvSpPr>
+          <p:cNvPr id="6" name="TextBox 5">
+            <a:extLst>
+              <a:ext uri="{FF2B5EF4-FFF2-40B4-BE49-F238E27FC236}">
+                <a16:creationId xmlns:a16="http://schemas.microsoft.com/office/drawing/2014/main" id="{39CAAE06-78B9-126E-2D18-8CCA2E98BD93}"/>
+              </a:ext>
+            </a:extLst>
+          </p:cNvPr>
+          <p:cNvSpPr txBox="1"/>
+          <p:nvPr/>
+        </p:nvSpPr>
+        <p:spPr>
+          <a:xfrm>
+            <a:off x="4343400" y="1492756"/>
+            <a:ext cx="4495800" cy="3046988"/>
+          </a:xfrm>
+          <a:prstGeom prst="rect">
+            <a:avLst/>
+          </a:prstGeom>
+          <a:noFill/>
+        </p:spPr>
+        <p:txBody>
+          <a:bodyPr wrap="square" rtlCol="0">
+            <a:spAutoFit/>
+          </a:bodyPr>
+          <a:lstStyle/>
+          <a:p>
+            <a:r>
+              <a:rPr lang="en-US" dirty="0">
+                <a:solidFill>
+                  <a:schemeClr val="bg1"/>
+                </a:solidFill>
+              </a:rPr>
+              <a:t>2 rules for calculating the size of structs: </a:t>
+            </a:r>
+          </a:p>
+          <a:p>
+            <a:pPr marL="457200" indent="-457200">
+              <a:buAutoNum type="arabicPeriod"/>
+            </a:pPr>
+            <a:r>
+              <a:rPr lang="en-US" dirty="0">
+                <a:solidFill>
+                  <a:schemeClr val="bg1"/>
+                </a:solidFill>
+              </a:rPr>
+              <a:t>All elements should land on an address divisible by their size</a:t>
+            </a:r>
+          </a:p>
+          <a:p>
+            <a:pPr marL="457200" indent="-457200">
+              <a:buAutoNum type="arabicPeriod"/>
+            </a:pPr>
+            <a:r>
+              <a:rPr lang="en-US" dirty="0">
+                <a:solidFill>
+                  <a:schemeClr val="bg1"/>
+                </a:solidFill>
+              </a:rPr>
+              <a:t>The entire struct size should be divisible by the size of the biggest element</a:t>
+            </a:r>
           </a:p>
         </p:txBody>
       </p:sp>
     </p:spTree>
     <p:extLst>
       <p:ext uri="{BB962C8B-B14F-4D97-AF65-F5344CB8AC3E}">
-        <p14:creationId xmlns:p14="http://schemas.microsoft.com/office/powerpoint/2010/main" val="86700209"/>
+        <p14:creationId xmlns:p14="http://schemas.microsoft.com/office/powerpoint/2010/main" val="2853131738"/>
+      </p:ext>
+    </p:extLst>
+  </p:cSld>
+  <p:clrMapOvr>
+    <a:masterClrMapping/>
+  </p:clrMapOvr>
+</p:sld>
+</file>
+
+<file path=ppt/slides/slide9.xml><?xml version="1.0" encoding="utf-8"?>
+<p:sld xmlns:a="http://schemas.openxmlformats.org/drawingml/2006/main" xmlns:r="http://schemas.openxmlformats.org/officeDocument/2006/relationships" xmlns:p="http://schemas.openxmlformats.org/presentationml/2006/main">
+  <p:cSld>
+    <p:spTree>
+      <p:nvGrpSpPr>
+        <p:cNvPr id="1" name="">
+          <a:extLst>
+            <a:ext uri="{FF2B5EF4-FFF2-40B4-BE49-F238E27FC236}">
+              <a16:creationId xmlns:a16="http://schemas.microsoft.com/office/drawing/2014/main" id="{410D6196-34E5-33A5-0537-AD33C3C5D333}"/>
+            </a:ext>
+          </a:extLst>
+        </p:cNvPr>
+        <p:cNvGrpSpPr/>
+        <p:nvPr/>
+      </p:nvGrpSpPr>
+      <p:grpSpPr>
+        <a:xfrm>
+          <a:off x="0" y="0"/>
+          <a:ext cx="0" cy="0"/>
+          <a:chOff x="0" y="0"/>
+          <a:chExt cx="0" cy="0"/>
+        </a:xfrm>
+      </p:grpSpPr>
+      <p:sp>
+        <p:nvSpPr>
+          <p:cNvPr id="4" name="Title 3">
+            <a:extLst>
+              <a:ext uri="{FF2B5EF4-FFF2-40B4-BE49-F238E27FC236}">
+                <a16:creationId xmlns:a16="http://schemas.microsoft.com/office/drawing/2014/main" id="{696336B7-CDA2-A0F0-B493-35509F063E42}"/>
+              </a:ext>
+            </a:extLst>
+          </p:cNvPr>
+          <p:cNvSpPr>
+            <a:spLocks noGrp="1"/>
+          </p:cNvSpPr>
+          <p:nvPr>
+            <p:ph type="title"/>
+          </p:nvPr>
+        </p:nvSpPr>
+        <p:spPr>
+          <a:xfrm>
+            <a:off x="452718" y="438150"/>
+            <a:ext cx="8229600" cy="685800"/>
+          </a:xfrm>
+        </p:spPr>
+        <p:txBody>
+          <a:bodyPr>
+            <a:normAutofit/>
+          </a:bodyPr>
+          <a:lstStyle/>
+          <a:p>
+            <a:r>
+              <a:rPr lang="en-US" sz="3200" dirty="0"/>
+              <a:t>Review: Size of Structs</a:t>
+            </a:r>
+          </a:p>
+        </p:txBody>
+      </p:sp>
+      <p:sp>
+        <p:nvSpPr>
+          <p:cNvPr id="5" name="Content Placeholder 4">
+            <a:extLst>
+              <a:ext uri="{FF2B5EF4-FFF2-40B4-BE49-F238E27FC236}">
+                <a16:creationId xmlns:a16="http://schemas.microsoft.com/office/drawing/2014/main" id="{0B2837F5-2BD4-6B3F-DBCE-A073574D6CE3}"/>
+              </a:ext>
+            </a:extLst>
+          </p:cNvPr>
+          <p:cNvSpPr>
+            <a:spLocks noGrp="1"/>
+          </p:cNvSpPr>
+          <p:nvPr>
+            <p:ph idx="1"/>
+          </p:nvPr>
+        </p:nvSpPr>
+        <p:spPr>
+          <a:xfrm>
+            <a:off x="461682" y="1123950"/>
+            <a:ext cx="8229600" cy="3962400"/>
+          </a:xfrm>
+        </p:spPr>
+        <p:txBody>
+          <a:bodyPr>
+            <a:normAutofit/>
+          </a:bodyPr>
+          <a:lstStyle/>
+          <a:p>
+            <a:pPr marL="0" indent="0">
+              <a:buNone/>
+            </a:pPr>
+            <a:endParaRPr lang="en-US" sz="1800" dirty="0"/>
+          </a:p>
+          <a:p>
+            <a:endParaRPr lang="en-US" sz="1800" dirty="0"/>
+          </a:p>
+        </p:txBody>
+      </p:sp>
+      <p:pic>
+        <p:nvPicPr>
+          <p:cNvPr id="3" name="Picture 2" descr="A screen shot of a computer code&#10;&#10;AI-generated content may be incorrect.">
+            <a:extLst>
+              <a:ext uri="{FF2B5EF4-FFF2-40B4-BE49-F238E27FC236}">
+                <a16:creationId xmlns:a16="http://schemas.microsoft.com/office/drawing/2014/main" id="{07A10997-45B7-89E6-91A7-8BBC5B6D047F}"/>
+              </a:ext>
+            </a:extLst>
+          </p:cNvPr>
+          <p:cNvPicPr>
+            <a:picLocks noChangeAspect="1"/>
+          </p:cNvPicPr>
+          <p:nvPr/>
+        </p:nvPicPr>
+        <p:blipFill>
+          <a:blip r:embed="rId3">
+            <a:extLst>
+              <a:ext uri="{28A0092B-C50C-407E-A947-70E740481C1C}">
+                <a14:useLocalDpi xmlns:a14="http://schemas.microsoft.com/office/drawing/2010/main" val="0"/>
+              </a:ext>
+            </a:extLst>
+          </a:blip>
+          <a:stretch>
+            <a:fillRect/>
+          </a:stretch>
+        </p:blipFill>
+        <p:spPr>
+          <a:xfrm>
+            <a:off x="452718" y="1657350"/>
+            <a:ext cx="3657600" cy="2717800"/>
+          </a:xfrm>
+          <a:prstGeom prst="rect">
+            <a:avLst/>
+          </a:prstGeom>
+        </p:spPr>
+      </p:pic>
+      <p:sp>
+        <p:nvSpPr>
+          <p:cNvPr id="6" name="TextBox 5">
+            <a:extLst>
+              <a:ext uri="{FF2B5EF4-FFF2-40B4-BE49-F238E27FC236}">
+                <a16:creationId xmlns:a16="http://schemas.microsoft.com/office/drawing/2014/main" id="{69F92D42-9300-CF10-83AB-26E4617277C9}"/>
+              </a:ext>
+            </a:extLst>
+          </p:cNvPr>
+          <p:cNvSpPr txBox="1"/>
+          <p:nvPr/>
+        </p:nvSpPr>
+        <p:spPr>
+          <a:xfrm>
+            <a:off x="4800600" y="1276350"/>
+            <a:ext cx="3200400" cy="1323439"/>
+          </a:xfrm>
+          <a:prstGeom prst="rect">
+            <a:avLst/>
+          </a:prstGeom>
+          <a:noFill/>
+        </p:spPr>
+        <p:txBody>
+          <a:bodyPr wrap="square" rtlCol="0">
+            <a:spAutoFit/>
+          </a:bodyPr>
+          <a:lstStyle/>
+          <a:p>
+            <a:r>
+              <a:rPr lang="en-US" sz="1600" dirty="0">
+                <a:solidFill>
+                  <a:schemeClr val="bg1"/>
+                </a:solidFill>
+              </a:rPr>
+              <a:t>char b must have enough space that int* c lands on an address divisible by 8. char b must therefore be 8 bytes, and the total size is 24 bytes</a:t>
+            </a:r>
+          </a:p>
+        </p:txBody>
+      </p:sp>
+      <p:sp>
+        <p:nvSpPr>
+          <p:cNvPr id="2" name="TextBox 1">
+            <a:extLst>
+              <a:ext uri="{FF2B5EF4-FFF2-40B4-BE49-F238E27FC236}">
+                <a16:creationId xmlns:a16="http://schemas.microsoft.com/office/drawing/2014/main" id="{B4765BB7-0914-F715-1F54-2149EEED9917}"/>
+              </a:ext>
+            </a:extLst>
+          </p:cNvPr>
+          <p:cNvSpPr txBox="1"/>
+          <p:nvPr/>
+        </p:nvSpPr>
+        <p:spPr>
+          <a:xfrm>
+            <a:off x="4800600" y="2836098"/>
+            <a:ext cx="3200400" cy="2062103"/>
+          </a:xfrm>
+          <a:prstGeom prst="rect">
+            <a:avLst/>
+          </a:prstGeom>
+          <a:noFill/>
+        </p:spPr>
+        <p:txBody>
+          <a:bodyPr wrap="square" rtlCol="0">
+            <a:spAutoFit/>
+          </a:bodyPr>
+          <a:lstStyle/>
+          <a:p>
+            <a:r>
+              <a:rPr lang="en-US" sz="1600" dirty="0">
+                <a:solidFill>
+                  <a:schemeClr val="bg1"/>
+                </a:solidFill>
+              </a:rPr>
+              <a:t>char* c is 8 bytes, so char a and int b must together make a multiple of 8 bytes. int b is 4 bytes, so char a must be a multiple of 4 bytes. Therefore, char a is 4 bytes, int b is 4 bytes, and char* c is 8 bytes. Total size is 16 bytes</a:t>
+            </a:r>
+          </a:p>
+        </p:txBody>
+      </p:sp>
+      <p:sp>
+        <p:nvSpPr>
+          <p:cNvPr id="7" name="Right Arrow 6">
+            <a:extLst>
+              <a:ext uri="{FF2B5EF4-FFF2-40B4-BE49-F238E27FC236}">
+                <a16:creationId xmlns:a16="http://schemas.microsoft.com/office/drawing/2014/main" id="{80CCCDBA-11D6-5A7D-AFF9-59322819694C}"/>
+              </a:ext>
+            </a:extLst>
+          </p:cNvPr>
+          <p:cNvSpPr/>
+          <p:nvPr/>
+        </p:nvSpPr>
+        <p:spPr>
+          <a:xfrm>
+            <a:off x="2119753" y="3477719"/>
+            <a:ext cx="2680847" cy="312755"/>
+          </a:xfrm>
+          <a:prstGeom prst="rightArrow">
+            <a:avLst/>
+          </a:prstGeom>
+        </p:spPr>
+        <p:style>
+          <a:lnRef idx="1">
+            <a:schemeClr val="accent1"/>
+          </a:lnRef>
+          <a:fillRef idx="3">
+            <a:schemeClr val="accent1"/>
+          </a:fillRef>
+          <a:effectRef idx="2">
+            <a:schemeClr val="accent1"/>
+          </a:effectRef>
+          <a:fontRef idx="minor">
+            <a:schemeClr val="lt1"/>
+          </a:fontRef>
+        </p:style>
+        <p:txBody>
+          <a:bodyPr rtlCol="0" anchor="ctr"/>
+          <a:lstStyle/>
+          <a:p>
+            <a:pPr algn="ctr"/>
+            <a:endParaRPr lang="en-US"/>
+          </a:p>
+        </p:txBody>
+      </p:sp>
+      <p:sp>
+        <p:nvSpPr>
+          <p:cNvPr id="8" name="Right Arrow 7">
+            <a:extLst>
+              <a:ext uri="{FF2B5EF4-FFF2-40B4-BE49-F238E27FC236}">
+                <a16:creationId xmlns:a16="http://schemas.microsoft.com/office/drawing/2014/main" id="{B1715049-A837-D945-2A43-722D4CA7587C}"/>
+              </a:ext>
+            </a:extLst>
+          </p:cNvPr>
+          <p:cNvSpPr/>
+          <p:nvPr/>
+        </p:nvSpPr>
+        <p:spPr>
+          <a:xfrm rot="20765271">
+            <a:off x="1862405" y="2110997"/>
+            <a:ext cx="2909447" cy="295829"/>
+          </a:xfrm>
+          <a:prstGeom prst="rightArrow">
+            <a:avLst/>
+          </a:prstGeom>
+        </p:spPr>
+        <p:style>
+          <a:lnRef idx="1">
+            <a:schemeClr val="accent1"/>
+          </a:lnRef>
+          <a:fillRef idx="3">
+            <a:schemeClr val="accent1"/>
+          </a:fillRef>
+          <a:effectRef idx="2">
+            <a:schemeClr val="accent1"/>
+          </a:effectRef>
+          <a:fontRef idx="minor">
+            <a:schemeClr val="lt1"/>
+          </a:fontRef>
+        </p:style>
+        <p:txBody>
+          <a:bodyPr rtlCol="0" anchor="ctr"/>
+          <a:lstStyle/>
+          <a:p>
+            <a:pPr algn="ctr"/>
+            <a:endParaRPr lang="en-US"/>
+          </a:p>
+        </p:txBody>
+      </p:sp>
+    </p:spTree>
+    <p:extLst>
+      <p:ext uri="{BB962C8B-B14F-4D97-AF65-F5344CB8AC3E}">
+        <p14:creationId xmlns:p14="http://schemas.microsoft.com/office/powerpoint/2010/main" val="1566268815"/>
       </p:ext>
     </p:extLst>
   </p:cSld>
